--- a/preview_v7/cn/l-cn-bs-u2-6.pptx
+++ b/preview_v7/cn/l-cn-bs-u2-6.pptx
@@ -3140,31 +3140,47 @@
           </a:p>
         </p:txBody>
       </p:sp>
-      <p:pic>
-        <p:nvPicPr>
-          <p:cNvPr id="3" name="Picture 2" descr="ctype.jpg"/>
-          <p:cNvPicPr>
-            <a:picLocks noChangeAspect="1"/>
-          </p:cNvPicPr>
-          <p:nvPr/>
-        </p:nvPicPr>
-        <p:blipFill>
-          <a:blip r:embed="rId2"/>
-          <a:srcRect t="12499" b="12499"/>
-          <a:stretch>
-            <a:fillRect/>
-          </a:stretch>
-        </p:blipFill>
-        <p:spPr>
-          <a:xfrm>
-            <a:off x="0" y="0"/>
-            <a:ext cx="12191695" cy="6858000"/>
-          </a:xfrm>
-          <a:prstGeom prst="rect">
-            <a:avLst/>
-          </a:prstGeom>
-        </p:spPr>
-      </p:pic>
+      <p:sp>
+        <p:nvSpPr>
+          <p:cNvPr id="3" name="TextBox 2"/>
+          <p:cNvSpPr txBox="1"/>
+          <p:nvPr/>
+        </p:nvSpPr>
+        <p:spPr>
+          <a:xfrm>
+            <a:off x="640080" y="640080"/>
+            <a:ext cx="10911535" cy="502920"/>
+          </a:xfrm>
+          <a:prstGeom prst="rect">
+            <a:avLst/>
+          </a:prstGeom>
+          <a:noFill/>
+        </p:spPr>
+        <p:txBody>
+          <a:bodyPr wrap="square" anchor="t" lIns="0" rIns="0" tIns="0" bIns="0">
+            <a:spAutoFit/>
+          </a:bodyPr>
+          <a:lstStyle/>
+          <a:p>
+            <a:pPr algn="l">
+              <a:spcAft>
+                <a:spcPts val="0"/>
+              </a:spcAft>
+            </a:pPr>
+            <a:r>
+              <a:rPr sz="1200" b="1">
+                <a:solidFill>
+                  <a:srgbClr val="B23A2A"/>
+                </a:solidFill>
+                <a:latin typeface="微软雅黑"/>
+                <a:ea typeface="微软雅黑"/>
+                <a:cs typeface="微软雅黑"/>
+              </a:rPr>
+              <a:t>语文 · 必修上册 · 第2单元 劳动光荣</a:t>
+            </a:r>
+          </a:p>
+        </p:txBody>
+      </p:sp>
       <p:sp>
         <p:nvSpPr>
           <p:cNvPr id="4" name="Rectangle 3"/>
@@ -3173,16 +3189,14 @@
         </p:nvSpPr>
         <p:spPr>
           <a:xfrm>
-            <a:off x="0" y="0"/>
-            <a:ext cx="12191695" cy="6858000"/>
+            <a:off x="640080" y="1207008"/>
+            <a:ext cx="822960" cy="30480"/>
           </a:xfrm>
           <a:prstGeom prst="rect">
             <a:avLst/>
           </a:prstGeom>
           <a:solidFill>
-            <a:srgbClr val="1C2A33">
-              <a:alpha val="52000"/>
-            </a:srgbClr>
+            <a:srgbClr val="B23A2A"/>
           </a:solidFill>
           <a:ln>
             <a:noFill/>
@@ -3213,14 +3227,92 @@
       </p:sp>
       <p:sp>
         <p:nvSpPr>
-          <p:cNvPr id="5" name="Rectangle 4"/>
+          <p:cNvPr id="5" name="TextBox 4"/>
+          <p:cNvSpPr txBox="1"/>
+          <p:nvPr/>
+        </p:nvSpPr>
+        <p:spPr>
+          <a:xfrm>
+            <a:off x="640080" y="1737360"/>
+            <a:ext cx="10911535" cy="2011680"/>
+          </a:xfrm>
+          <a:prstGeom prst="rect">
+            <a:avLst/>
+          </a:prstGeom>
+          <a:noFill/>
+        </p:spPr>
+        <p:txBody>
+          <a:bodyPr wrap="square" anchor="t" lIns="0" rIns="0" tIns="0" bIns="0">
+            <a:spAutoFit/>
+          </a:bodyPr>
+          <a:lstStyle/>
+          <a:p>
+            <a:pPr algn="l">
+              <a:lnSpc>
+                <a:spcPct val="115000"/>
+              </a:lnSpc>
+            </a:pPr>
+            <a:r>
+              <a:rPr sz="4000" b="1">
+                <a:solidFill>
+                  <a:srgbClr val="1C2A33"/>
+                </a:solidFill>
+                <a:latin typeface="楷体"/>
+                <a:ea typeface="楷体"/>
+                <a:cs typeface="楷体"/>
+              </a:rPr>
+              <a:t>写作指导——学写人物通讯：从采访到成文</a:t>
+            </a:r>
+          </a:p>
+        </p:txBody>
+      </p:sp>
+      <p:sp>
+        <p:nvSpPr>
+          <p:cNvPr id="6" name="TextBox 5"/>
+          <p:cNvSpPr txBox="1"/>
+          <p:nvPr/>
+        </p:nvSpPr>
+        <p:spPr>
+          <a:xfrm>
+            <a:off x="640080" y="3840480"/>
+            <a:ext cx="10911535" cy="457200"/>
+          </a:xfrm>
+          <a:prstGeom prst="rect">
+            <a:avLst/>
+          </a:prstGeom>
+          <a:noFill/>
+        </p:spPr>
+        <p:txBody>
+          <a:bodyPr wrap="square" anchor="t" lIns="0" rIns="0" tIns="0" bIns="0">
+            <a:spAutoFit/>
+          </a:bodyPr>
+          <a:lstStyle/>
+          <a:p>
+            <a:pPr algn="l"/>
+            <a:r>
+              <a:rPr sz="1700" b="1">
+                <a:solidFill>
+                  <a:srgbClr val="B23A2A"/>
+                </a:solidFill>
+                <a:latin typeface="微软雅黑"/>
+                <a:ea typeface="微软雅黑"/>
+                <a:cs typeface="微软雅黑"/>
+              </a:rPr>
+              <a:t>写作指导  ·  第6课时  ·  45分钟</a:t>
+            </a:r>
+          </a:p>
+        </p:txBody>
+      </p:sp>
+      <p:sp>
+        <p:nvSpPr>
+          <p:cNvPr id="7" name="Rectangle 6"/>
           <p:cNvSpPr/>
           <p:nvPr/>
         </p:nvSpPr>
         <p:spPr>
           <a:xfrm>
-            <a:off x="640080" y="1005840"/>
-            <a:ext cx="822960" cy="38100"/>
+            <a:off x="640080" y="5394960"/>
+            <a:ext cx="2011680" cy="33020"/>
           </a:xfrm>
           <a:prstGeom prst="rect">
             <a:avLst/>
@@ -3257,14 +3349,14 @@
       </p:sp>
       <p:sp>
         <p:nvSpPr>
-          <p:cNvPr id="6" name="TextBox 5"/>
+          <p:cNvPr id="8" name="TextBox 7"/>
           <p:cNvSpPr txBox="1"/>
           <p:nvPr/>
         </p:nvSpPr>
         <p:spPr>
           <a:xfrm>
-            <a:off x="640080" y="1188720"/>
-            <a:ext cx="10058400" cy="457200"/>
+            <a:off x="640080" y="5623560"/>
+            <a:ext cx="10911535" cy="548640"/>
           </a:xfrm>
           <a:prstGeom prst="rect">
             <a:avLst/>
@@ -3279,89 +3371,15 @@
           <a:p>
             <a:pPr algn="l"/>
             <a:r>
-              <a:rPr sz="1500" b="1">
-                <a:solidFill>
-                  <a:srgbClr val="C8A86B"/>
+              <a:rPr sz="1400" b="0">
+                <a:solidFill>
+                  <a:srgbClr val="6B6258"/>
                 </a:solidFill>
                 <a:latin typeface="微软雅黑"/>
                 <a:ea typeface="微软雅黑"/>
                 <a:cs typeface="微软雅黑"/>
               </a:rPr>
-              <a:t>必修上 第二单元 · 劳动光荣 · 第六课时</a:t>
-            </a:r>
-          </a:p>
-        </p:txBody>
-      </p:sp>
-      <p:sp>
-        <p:nvSpPr>
-          <p:cNvPr id="7" name="TextBox 6"/>
-          <p:cNvSpPr txBox="1"/>
-          <p:nvPr/>
-        </p:nvSpPr>
-        <p:spPr>
-          <a:xfrm>
-            <a:off x="640080" y="1874519"/>
-            <a:ext cx="11247120" cy="1828800"/>
-          </a:xfrm>
-          <a:prstGeom prst="rect">
-            <a:avLst/>
-          </a:prstGeom>
-          <a:noFill/>
-        </p:spPr>
-        <p:txBody>
-          <a:bodyPr wrap="square" anchor="t" lIns="0" rIns="0" tIns="0" bIns="0">
-            <a:spAutoFit/>
-          </a:bodyPr>
-          <a:lstStyle/>
-          <a:p>
-            <a:pPr algn="l"/>
-            <a:r>
-              <a:rPr sz="5200" b="1">
-                <a:solidFill>
-                  <a:srgbClr val="FFFFFF"/>
-                </a:solidFill>
-                <a:latin typeface="楷体"/>
-                <a:ea typeface="楷体"/>
-                <a:cs typeface="楷体"/>
-              </a:rPr>
-              <a:t>写作指导</a:t>
-            </a:r>
-          </a:p>
-        </p:txBody>
-      </p:sp>
-      <p:sp>
-        <p:nvSpPr>
-          <p:cNvPr id="8" name="TextBox 7"/>
-          <p:cNvSpPr txBox="1"/>
-          <p:nvPr/>
-        </p:nvSpPr>
-        <p:spPr>
-          <a:xfrm>
-            <a:off x="640080" y="2926080"/>
-            <a:ext cx="11247120" cy="1097280"/>
-          </a:xfrm>
-          <a:prstGeom prst="rect">
-            <a:avLst/>
-          </a:prstGeom>
-          <a:noFill/>
-        </p:spPr>
-        <p:txBody>
-          <a:bodyPr wrap="square" anchor="t" lIns="0" rIns="0" tIns="0" bIns="0">
-            <a:spAutoFit/>
-          </a:bodyPr>
-          <a:lstStyle/>
-          <a:p>
-            <a:pPr algn="l"/>
-            <a:r>
-              <a:rPr sz="3200" b="1">
-                <a:solidFill>
-                  <a:srgbClr val="C8A86B"/>
-                </a:solidFill>
-                <a:latin typeface="楷体"/>
-                <a:ea typeface="楷体"/>
-                <a:cs typeface="楷体"/>
-              </a:rPr>
-              <a:t>学写人物通讯：从采访到成文</a:t>
+              <a:t>学习任务群：实用性阅读与交流    |    年级：高一</a:t>
             </a:r>
           </a:p>
         </p:txBody>
@@ -3369,88 +3387,6 @@
       <p:sp>
         <p:nvSpPr>
           <p:cNvPr id="9" name="TextBox 8"/>
-          <p:cNvSpPr txBox="1"/>
-          <p:nvPr/>
-        </p:nvSpPr>
-        <p:spPr>
-          <a:xfrm>
-            <a:off x="640080" y="4297680"/>
-            <a:ext cx="10972800" cy="1005840"/>
-          </a:xfrm>
-          <a:prstGeom prst="rect">
-            <a:avLst/>
-          </a:prstGeom>
-          <a:noFill/>
-        </p:spPr>
-        <p:txBody>
-          <a:bodyPr wrap="square" anchor="t" lIns="0" rIns="0" tIns="0" bIns="0">
-            <a:spAutoFit/>
-          </a:bodyPr>
-          <a:lstStyle/>
-          <a:p>
-            <a:pPr algn="l">
-              <a:lnSpc>
-                <a:spcPct val="140000"/>
-              </a:lnSpc>
-            </a:pPr>
-            <a:r>
-              <a:rPr sz="1700" b="0">
-                <a:solidFill>
-                  <a:srgbClr val="E7DFD2"/>
-                </a:solidFill>
-                <a:latin typeface="楷体"/>
-                <a:ea typeface="楷体"/>
-                <a:cs typeface="楷体"/>
-              </a:rPr>
-              <a:t>把读到的、问到的劳动故事，写成一篇真实的人物通讯。</a:t>
-            </a:r>
-          </a:p>
-        </p:txBody>
-      </p:sp>
-      <p:sp>
-        <p:nvSpPr>
-          <p:cNvPr id="10" name="TextBox 9"/>
-          <p:cNvSpPr txBox="1"/>
-          <p:nvPr/>
-        </p:nvSpPr>
-        <p:spPr>
-          <a:xfrm>
-            <a:off x="640080" y="4937760"/>
-            <a:ext cx="10972800" cy="914400"/>
-          </a:xfrm>
-          <a:prstGeom prst="rect">
-            <a:avLst/>
-          </a:prstGeom>
-          <a:noFill/>
-        </p:spPr>
-        <p:txBody>
-          <a:bodyPr wrap="square" anchor="t" lIns="0" rIns="0" tIns="0" bIns="0">
-            <a:spAutoFit/>
-          </a:bodyPr>
-          <a:lstStyle/>
-          <a:p>
-            <a:pPr algn="l">
-              <a:lnSpc>
-                <a:spcPct val="140000"/>
-              </a:lnSpc>
-            </a:pPr>
-            <a:r>
-              <a:rPr sz="1700" b="0">
-                <a:solidFill>
-                  <a:srgbClr val="FFFFFF"/>
-                </a:solidFill>
-                <a:latin typeface="楷体"/>
-                <a:ea typeface="楷体"/>
-                <a:cs typeface="楷体"/>
-              </a:rPr>
-              <a:t>以事写人 —— 不说"好"，让事件自己说明"好"。</a:t>
-            </a:r>
-          </a:p>
-        </p:txBody>
-      </p:sp>
-      <p:sp>
-        <p:nvSpPr>
-          <p:cNvPr id="11" name="TextBox 10"/>
           <p:cNvSpPr txBox="1"/>
           <p:nvPr/>
         </p:nvSpPr>
@@ -3583,7 +3519,7 @@
                 <a:ea typeface="微软雅黑"/>
                 <a:cs typeface="微软雅黑"/>
               </a:rPr>
-              <a:t>本课目标</a:t>
+              <a:t>学习目标</a:t>
             </a:r>
           </a:p>
         </p:txBody>
@@ -3634,51 +3570,14 @@
       </p:sp>
       <p:sp>
         <p:nvSpPr>
-          <p:cNvPr id="5" name="TextBox 4"/>
-          <p:cNvSpPr txBox="1"/>
-          <p:nvPr/>
-        </p:nvSpPr>
-        <p:spPr>
-          <a:xfrm>
-            <a:off x="640080" y="1325880"/>
-            <a:ext cx="10058400" cy="640080"/>
-          </a:xfrm>
-          <a:prstGeom prst="rect">
-            <a:avLst/>
-          </a:prstGeom>
-          <a:noFill/>
-        </p:spPr>
-        <p:txBody>
-          <a:bodyPr wrap="square" anchor="t" lIns="0" rIns="0" tIns="0" bIns="0">
-            <a:spAutoFit/>
-          </a:bodyPr>
-          <a:lstStyle/>
-          <a:p>
-            <a:pPr algn="l"/>
-            <a:r>
-              <a:rPr sz="3200" b="1">
-                <a:solidFill>
-                  <a:srgbClr val="1C2A33"/>
-                </a:solidFill>
-                <a:latin typeface="楷体"/>
-                <a:ea typeface="楷体"/>
-                <a:cs typeface="楷体"/>
-              </a:rPr>
-              <a:t>四向学习目标</a:t>
-            </a:r>
-          </a:p>
-        </p:txBody>
-      </p:sp>
-      <p:sp>
-        <p:nvSpPr>
-          <p:cNvPr id="6" name="Rounded Rectangle 5"/>
+          <p:cNvPr id="5" name="Rounded Rectangle 4"/>
           <p:cNvSpPr/>
           <p:nvPr/>
         </p:nvSpPr>
         <p:spPr>
           <a:xfrm>
-            <a:off x="640080" y="2377440"/>
-            <a:ext cx="2453563" cy="3291840"/>
+            <a:off x="640080" y="1417320"/>
+            <a:ext cx="5349240" cy="2057400"/>
           </a:xfrm>
           <a:prstGeom prst="roundRect">
             <a:avLst/>
@@ -3686,7 +3585,7 @@
           <a:solidFill>
             <a:srgbClr val="FFFFFF"/>
           </a:solidFill>
-          <a:ln w="20320">
+          <a:ln w="22860">
             <a:solidFill>
               <a:srgbClr val="B23A2A"/>
             </a:solidFill>
@@ -3717,14 +3616,14 @@
       </p:sp>
       <p:sp>
         <p:nvSpPr>
-          <p:cNvPr id="7" name="Oval 6"/>
+          <p:cNvPr id="6" name="Oval 5"/>
           <p:cNvSpPr/>
           <p:nvPr/>
         </p:nvSpPr>
         <p:spPr>
           <a:xfrm>
-            <a:off x="1455381" y="2697480"/>
-            <a:ext cx="822960" cy="822960"/>
+            <a:off x="804672" y="1581912"/>
+            <a:ext cx="457200" cy="457200"/>
           </a:xfrm>
           <a:prstGeom prst="ellipse">
             <a:avLst/>
@@ -3761,14 +3660,14 @@
       </p:sp>
       <p:sp>
         <p:nvSpPr>
-          <p:cNvPr id="8" name="TextBox 7"/>
+          <p:cNvPr id="7" name="TextBox 6"/>
           <p:cNvSpPr txBox="1"/>
           <p:nvPr/>
         </p:nvSpPr>
         <p:spPr>
           <a:xfrm>
-            <a:off x="1455381" y="2880360"/>
-            <a:ext cx="822960" cy="457200"/>
+            <a:off x="804672" y="1636776"/>
+            <a:ext cx="457200" cy="384048"/>
           </a:xfrm>
           <a:prstGeom prst="rect">
             <a:avLst/>
@@ -3783,107 +3682,111 @@
           <a:p>
             <a:pPr algn="ctr"/>
             <a:r>
-              <a:rPr sz="2400" b="1">
+              <a:rPr sz="1600" b="1">
                 <a:solidFill>
                   <a:srgbClr val="FFFFFF"/>
+                </a:solidFill>
+                <a:latin typeface="微软雅黑"/>
+                <a:ea typeface="微软雅黑"/>
+                <a:cs typeface="微软雅黑"/>
+              </a:rPr>
+              <a:t>1</a:t>
+            </a:r>
+          </a:p>
+        </p:txBody>
+      </p:sp>
+      <p:sp>
+        <p:nvSpPr>
+          <p:cNvPr id="8" name="TextBox 7"/>
+          <p:cNvSpPr txBox="1"/>
+          <p:nvPr/>
+        </p:nvSpPr>
+        <p:spPr>
+          <a:xfrm>
+            <a:off x="1371600" y="1527048"/>
+            <a:ext cx="4434840" cy="457200"/>
+          </a:xfrm>
+          <a:prstGeom prst="rect">
+            <a:avLst/>
+          </a:prstGeom>
+          <a:noFill/>
+        </p:spPr>
+        <p:txBody>
+          <a:bodyPr wrap="square" anchor="t" lIns="0" rIns="0" tIns="0" bIns="0">
+            <a:spAutoFit/>
+          </a:bodyPr>
+          <a:lstStyle/>
+          <a:p>
+            <a:pPr algn="l">
+              <a:lnSpc>
+                <a:spcPct val="110000"/>
+              </a:lnSpc>
+            </a:pPr>
+            <a:r>
+              <a:rPr sz="1600" b="1">
+                <a:solidFill>
+                  <a:srgbClr val="1C2A33"/>
+                </a:solidFill>
+                <a:latin typeface="微软雅黑"/>
+                <a:ea typeface="微软雅黑"/>
+                <a:cs typeface="微软雅黑"/>
+              </a:rPr>
+              <a:t>目标</a:t>
+            </a:r>
+          </a:p>
+        </p:txBody>
+      </p:sp>
+      <p:sp>
+        <p:nvSpPr>
+          <p:cNvPr id="9" name="TextBox 8"/>
+          <p:cNvSpPr txBox="1"/>
+          <p:nvPr/>
+        </p:nvSpPr>
+        <p:spPr>
+          <a:xfrm>
+            <a:off x="1371600" y="1965960"/>
+            <a:ext cx="4434840" cy="1417320"/>
+          </a:xfrm>
+          <a:prstGeom prst="rect">
+            <a:avLst/>
+          </a:prstGeom>
+          <a:noFill/>
+        </p:spPr>
+        <p:txBody>
+          <a:bodyPr wrap="square" anchor="t" lIns="0" rIns="0" tIns="0" bIns="0">
+            <a:spAutoFit/>
+          </a:bodyPr>
+          <a:lstStyle/>
+          <a:p>
+            <a:pPr algn="l">
+              <a:lnSpc>
+                <a:spcPct val="128000"/>
+              </a:lnSpc>
+            </a:pPr>
+            <a:r>
+              <a:rPr sz="1200" b="0">
+                <a:solidFill>
+                  <a:srgbClr val="1C2A33"/>
                 </a:solidFill>
                 <a:latin typeface="楷体"/>
                 <a:ea typeface="楷体"/>
                 <a:cs typeface="楷体"/>
               </a:rPr>
-              <a:t>1</a:t>
-            </a:r>
-          </a:p>
-        </p:txBody>
-      </p:sp>
-      <p:sp>
-        <p:nvSpPr>
-          <p:cNvPr id="9" name="TextBox 8"/>
-          <p:cNvSpPr txBox="1"/>
-          <p:nvPr/>
-        </p:nvSpPr>
-        <p:spPr>
-          <a:xfrm>
-            <a:off x="822960" y="3749040"/>
-            <a:ext cx="2087803" cy="548640"/>
-          </a:xfrm>
-          <a:prstGeom prst="rect">
-            <a:avLst/>
-          </a:prstGeom>
-          <a:noFill/>
-        </p:spPr>
-        <p:txBody>
-          <a:bodyPr wrap="square" anchor="t" lIns="0" rIns="0" tIns="0" bIns="0">
-            <a:spAutoFit/>
-          </a:bodyPr>
-          <a:lstStyle/>
-          <a:p>
-            <a:pPr algn="ctr"/>
-            <a:r>
-              <a:rPr sz="1800" b="1">
-                <a:solidFill>
-                  <a:srgbClr val="B23A2A"/>
-                </a:solidFill>
-                <a:latin typeface="微软雅黑"/>
-                <a:ea typeface="微软雅黑"/>
-                <a:cs typeface="微软雅黑"/>
-              </a:rPr>
-              <a:t>语言能力</a:t>
-            </a:r>
-          </a:p>
-        </p:txBody>
-      </p:sp>
-      <p:sp>
-        <p:nvSpPr>
-          <p:cNvPr id="10" name="TextBox 9"/>
-          <p:cNvSpPr txBox="1"/>
-          <p:nvPr/>
-        </p:nvSpPr>
-        <p:spPr>
-          <a:xfrm>
-            <a:off x="841248" y="4343400"/>
-            <a:ext cx="2051227" cy="1188720"/>
-          </a:xfrm>
-          <a:prstGeom prst="rect">
-            <a:avLst/>
-          </a:prstGeom>
-          <a:noFill/>
-        </p:spPr>
-        <p:txBody>
-          <a:bodyPr wrap="square" anchor="t" lIns="0" rIns="0" tIns="0" bIns="0">
-            <a:spAutoFit/>
-          </a:bodyPr>
-          <a:lstStyle/>
-          <a:p>
-            <a:pPr algn="ctr">
-              <a:lnSpc>
-                <a:spcPct val="145000"/>
-              </a:lnSpc>
-            </a:pPr>
-            <a:r>
-              <a:rPr sz="1300" b="0">
-                <a:solidFill>
-                  <a:srgbClr val="1C2A33"/>
-                </a:solidFill>
-                <a:latin typeface="楷体"/>
-                <a:ea typeface="楷体"/>
-                <a:cs typeface="楷体"/>
-              </a:rPr>
-              <a:t>选取 2–3 个典型事件，写一篇 600 字以内的人物通讯，做到真实·典型·有新闻感。</a:t>
-            </a:r>
-          </a:p>
-        </p:txBody>
-      </p:sp>
-      <p:sp>
-        <p:nvSpPr>
-          <p:cNvPr id="11" name="Rounded Rectangle 10"/>
+              <a:t>语言能力：能选取2-3个典型事件，写一篇600字以内的人物通讯，做到真实·典型·有新闻感。</a:t>
+            </a:r>
+          </a:p>
+        </p:txBody>
+      </p:sp>
+      <p:sp>
+        <p:nvSpPr>
+          <p:cNvPr id="10" name="Rounded Rectangle 9"/>
           <p:cNvSpPr/>
           <p:nvPr/>
         </p:nvSpPr>
         <p:spPr>
           <a:xfrm>
-            <a:off x="3459403" y="2377440"/>
-            <a:ext cx="2453563" cy="3291840"/>
+            <a:off x="6263640" y="1417320"/>
+            <a:ext cx="5349240" cy="2057400"/>
           </a:xfrm>
           <a:prstGeom prst="roundRect">
             <a:avLst/>
@@ -3891,9 +3794,9 @@
           <a:solidFill>
             <a:srgbClr val="FFFFFF"/>
           </a:solidFill>
-          <a:ln w="20320">
+          <a:ln w="22860">
             <a:solidFill>
-              <a:srgbClr val="2E7D6B"/>
+              <a:srgbClr val="B23A2A"/>
             </a:solidFill>
           </a:ln>
           <a:effectLst/>
@@ -3922,20 +3825,20 @@
       </p:sp>
       <p:sp>
         <p:nvSpPr>
-          <p:cNvPr id="12" name="Oval 11"/>
+          <p:cNvPr id="11" name="Oval 10"/>
           <p:cNvSpPr/>
           <p:nvPr/>
         </p:nvSpPr>
         <p:spPr>
           <a:xfrm>
-            <a:off x="4274705" y="2697480"/>
-            <a:ext cx="822960" cy="822960"/>
+            <a:off x="6428232" y="1581912"/>
+            <a:ext cx="457200" cy="457200"/>
           </a:xfrm>
           <a:prstGeom prst="ellipse">
             <a:avLst/>
           </a:prstGeom>
           <a:solidFill>
-            <a:srgbClr val="2E7D6B"/>
+            <a:srgbClr val="B23A2A"/>
           </a:solidFill>
           <a:ln>
             <a:noFill/>
@@ -3966,14 +3869,14 @@
       </p:sp>
       <p:sp>
         <p:nvSpPr>
-          <p:cNvPr id="13" name="TextBox 12"/>
+          <p:cNvPr id="12" name="TextBox 11"/>
           <p:cNvSpPr txBox="1"/>
           <p:nvPr/>
         </p:nvSpPr>
         <p:spPr>
           <a:xfrm>
-            <a:off x="4274705" y="2880360"/>
-            <a:ext cx="822960" cy="457200"/>
+            <a:off x="6428232" y="1636776"/>
+            <a:ext cx="457200" cy="384048"/>
           </a:xfrm>
           <a:prstGeom prst="rect">
             <a:avLst/>
@@ -3988,107 +3891,111 @@
           <a:p>
             <a:pPr algn="ctr"/>
             <a:r>
-              <a:rPr sz="2400" b="1">
+              <a:rPr sz="1600" b="1">
                 <a:solidFill>
                   <a:srgbClr val="FFFFFF"/>
+                </a:solidFill>
+                <a:latin typeface="微软雅黑"/>
+                <a:ea typeface="微软雅黑"/>
+                <a:cs typeface="微软雅黑"/>
+              </a:rPr>
+              <a:t>2</a:t>
+            </a:r>
+          </a:p>
+        </p:txBody>
+      </p:sp>
+      <p:sp>
+        <p:nvSpPr>
+          <p:cNvPr id="13" name="TextBox 12"/>
+          <p:cNvSpPr txBox="1"/>
+          <p:nvPr/>
+        </p:nvSpPr>
+        <p:spPr>
+          <a:xfrm>
+            <a:off x="6995160" y="1527048"/>
+            <a:ext cx="4434840" cy="457200"/>
+          </a:xfrm>
+          <a:prstGeom prst="rect">
+            <a:avLst/>
+          </a:prstGeom>
+          <a:noFill/>
+        </p:spPr>
+        <p:txBody>
+          <a:bodyPr wrap="square" anchor="t" lIns="0" rIns="0" tIns="0" bIns="0">
+            <a:spAutoFit/>
+          </a:bodyPr>
+          <a:lstStyle/>
+          <a:p>
+            <a:pPr algn="l">
+              <a:lnSpc>
+                <a:spcPct val="110000"/>
+              </a:lnSpc>
+            </a:pPr>
+            <a:r>
+              <a:rPr sz="1600" b="1">
+                <a:solidFill>
+                  <a:srgbClr val="1C2A33"/>
+                </a:solidFill>
+                <a:latin typeface="微软雅黑"/>
+                <a:ea typeface="微软雅黑"/>
+                <a:cs typeface="微软雅黑"/>
+              </a:rPr>
+              <a:t>目标</a:t>
+            </a:r>
+          </a:p>
+        </p:txBody>
+      </p:sp>
+      <p:sp>
+        <p:nvSpPr>
+          <p:cNvPr id="14" name="TextBox 13"/>
+          <p:cNvSpPr txBox="1"/>
+          <p:nvPr/>
+        </p:nvSpPr>
+        <p:spPr>
+          <a:xfrm>
+            <a:off x="6995160" y="1965960"/>
+            <a:ext cx="4434840" cy="1417320"/>
+          </a:xfrm>
+          <a:prstGeom prst="rect">
+            <a:avLst/>
+          </a:prstGeom>
+          <a:noFill/>
+        </p:spPr>
+        <p:txBody>
+          <a:bodyPr wrap="square" anchor="t" lIns="0" rIns="0" tIns="0" bIns="0">
+            <a:spAutoFit/>
+          </a:bodyPr>
+          <a:lstStyle/>
+          <a:p>
+            <a:pPr algn="l">
+              <a:lnSpc>
+                <a:spcPct val="128000"/>
+              </a:lnSpc>
+            </a:pPr>
+            <a:r>
+              <a:rPr sz="1200" b="0">
+                <a:solidFill>
+                  <a:srgbClr val="1C2A33"/>
                 </a:solidFill>
                 <a:latin typeface="楷体"/>
                 <a:ea typeface="楷体"/>
                 <a:cs typeface="楷体"/>
               </a:rPr>
-              <a:t>2</a:t>
-            </a:r>
-          </a:p>
-        </p:txBody>
-      </p:sp>
-      <p:sp>
-        <p:nvSpPr>
-          <p:cNvPr id="14" name="TextBox 13"/>
-          <p:cNvSpPr txBox="1"/>
-          <p:nvPr/>
-        </p:nvSpPr>
-        <p:spPr>
-          <a:xfrm>
-            <a:off x="3642283" y="3749040"/>
-            <a:ext cx="2087803" cy="548640"/>
-          </a:xfrm>
-          <a:prstGeom prst="rect">
-            <a:avLst/>
-          </a:prstGeom>
-          <a:noFill/>
-        </p:spPr>
-        <p:txBody>
-          <a:bodyPr wrap="square" anchor="t" lIns="0" rIns="0" tIns="0" bIns="0">
-            <a:spAutoFit/>
-          </a:bodyPr>
-          <a:lstStyle/>
-          <a:p>
-            <a:pPr algn="ctr"/>
-            <a:r>
-              <a:rPr sz="1800" b="1">
-                <a:solidFill>
-                  <a:srgbClr val="2E7D6B"/>
-                </a:solidFill>
-                <a:latin typeface="微软雅黑"/>
-                <a:ea typeface="微软雅黑"/>
-                <a:cs typeface="微软雅黑"/>
-              </a:rPr>
-              <a:t>文化意识</a:t>
-            </a:r>
-          </a:p>
-        </p:txBody>
-      </p:sp>
-      <p:sp>
-        <p:nvSpPr>
-          <p:cNvPr id="15" name="TextBox 14"/>
-          <p:cNvSpPr txBox="1"/>
-          <p:nvPr/>
-        </p:nvSpPr>
-        <p:spPr>
-          <a:xfrm>
-            <a:off x="3660571" y="4343400"/>
-            <a:ext cx="2051227" cy="1188720"/>
-          </a:xfrm>
-          <a:prstGeom prst="rect">
-            <a:avLst/>
-          </a:prstGeom>
-          <a:noFill/>
-        </p:spPr>
-        <p:txBody>
-          <a:bodyPr wrap="square" anchor="t" lIns="0" rIns="0" tIns="0" bIns="0">
-            <a:spAutoFit/>
-          </a:bodyPr>
-          <a:lstStyle/>
-          <a:p>
-            <a:pPr algn="ctr">
-              <a:lnSpc>
-                <a:spcPct val="145000"/>
-              </a:lnSpc>
-            </a:pPr>
-            <a:r>
-              <a:rPr sz="1300" b="0">
-                <a:solidFill>
-                  <a:srgbClr val="1C2A33"/>
-                </a:solidFill>
-                <a:latin typeface="楷体"/>
-                <a:ea typeface="楷体"/>
-                <a:cs typeface="楷体"/>
-              </a:rPr>
-              <a:t>写身边的劳动者，深化对"劳动光荣"的体认，培养关注普通人的人文情怀。</a:t>
-            </a:r>
-          </a:p>
-        </p:txBody>
-      </p:sp>
-      <p:sp>
-        <p:nvSpPr>
-          <p:cNvPr id="16" name="Rounded Rectangle 15"/>
+              <a:t>文化意识：通过写身边的劳动者，深化对「劳动光荣」的体认，培养关注普通人的人文情怀。</a:t>
+            </a:r>
+          </a:p>
+        </p:txBody>
+      </p:sp>
+      <p:sp>
+        <p:nvSpPr>
+          <p:cNvPr id="15" name="Rounded Rectangle 14"/>
           <p:cNvSpPr/>
           <p:nvPr/>
         </p:nvSpPr>
         <p:spPr>
           <a:xfrm>
-            <a:off x="6278727" y="2377440"/>
-            <a:ext cx="2453563" cy="3291840"/>
+            <a:off x="640080" y="3703320"/>
+            <a:ext cx="5349240" cy="2057400"/>
           </a:xfrm>
           <a:prstGeom prst="roundRect">
             <a:avLst/>
@@ -4096,9 +4003,9 @@
           <a:solidFill>
             <a:srgbClr val="FFFFFF"/>
           </a:solidFill>
-          <a:ln w="20320">
+          <a:ln w="22860">
             <a:solidFill>
-              <a:srgbClr val="C8A86B"/>
+              <a:srgbClr val="B23A2A"/>
             </a:solidFill>
           </a:ln>
           <a:effectLst/>
@@ -4127,20 +4034,20 @@
       </p:sp>
       <p:sp>
         <p:nvSpPr>
-          <p:cNvPr id="17" name="Oval 16"/>
+          <p:cNvPr id="16" name="Oval 15"/>
           <p:cNvSpPr/>
           <p:nvPr/>
         </p:nvSpPr>
         <p:spPr>
           <a:xfrm>
-            <a:off x="7094029" y="2697480"/>
-            <a:ext cx="822960" cy="822960"/>
+            <a:off x="804672" y="3867912"/>
+            <a:ext cx="457200" cy="457200"/>
           </a:xfrm>
           <a:prstGeom prst="ellipse">
             <a:avLst/>
           </a:prstGeom>
           <a:solidFill>
-            <a:srgbClr val="C8A86B"/>
+            <a:srgbClr val="B23A2A"/>
           </a:solidFill>
           <a:ln>
             <a:noFill/>
@@ -4171,14 +4078,14 @@
       </p:sp>
       <p:sp>
         <p:nvSpPr>
-          <p:cNvPr id="18" name="TextBox 17"/>
+          <p:cNvPr id="17" name="TextBox 16"/>
           <p:cNvSpPr txBox="1"/>
           <p:nvPr/>
         </p:nvSpPr>
         <p:spPr>
           <a:xfrm>
-            <a:off x="7094029" y="2880360"/>
-            <a:ext cx="822960" cy="457200"/>
+            <a:off x="804672" y="3922776"/>
+            <a:ext cx="457200" cy="384048"/>
           </a:xfrm>
           <a:prstGeom prst="rect">
             <a:avLst/>
@@ -4193,107 +4100,111 @@
           <a:p>
             <a:pPr algn="ctr"/>
             <a:r>
-              <a:rPr sz="2400" b="1">
+              <a:rPr sz="1600" b="1">
                 <a:solidFill>
                   <a:srgbClr val="FFFFFF"/>
+                </a:solidFill>
+                <a:latin typeface="微软雅黑"/>
+                <a:ea typeface="微软雅黑"/>
+                <a:cs typeface="微软雅黑"/>
+              </a:rPr>
+              <a:t>3</a:t>
+            </a:r>
+          </a:p>
+        </p:txBody>
+      </p:sp>
+      <p:sp>
+        <p:nvSpPr>
+          <p:cNvPr id="18" name="TextBox 17"/>
+          <p:cNvSpPr txBox="1"/>
+          <p:nvPr/>
+        </p:nvSpPr>
+        <p:spPr>
+          <a:xfrm>
+            <a:off x="1371600" y="3813048"/>
+            <a:ext cx="4434840" cy="457200"/>
+          </a:xfrm>
+          <a:prstGeom prst="rect">
+            <a:avLst/>
+          </a:prstGeom>
+          <a:noFill/>
+        </p:spPr>
+        <p:txBody>
+          <a:bodyPr wrap="square" anchor="t" lIns="0" rIns="0" tIns="0" bIns="0">
+            <a:spAutoFit/>
+          </a:bodyPr>
+          <a:lstStyle/>
+          <a:p>
+            <a:pPr algn="l">
+              <a:lnSpc>
+                <a:spcPct val="110000"/>
+              </a:lnSpc>
+            </a:pPr>
+            <a:r>
+              <a:rPr sz="1600" b="1">
+                <a:solidFill>
+                  <a:srgbClr val="1C2A33"/>
+                </a:solidFill>
+                <a:latin typeface="微软雅黑"/>
+                <a:ea typeface="微软雅黑"/>
+                <a:cs typeface="微软雅黑"/>
+              </a:rPr>
+              <a:t>目标</a:t>
+            </a:r>
+          </a:p>
+        </p:txBody>
+      </p:sp>
+      <p:sp>
+        <p:nvSpPr>
+          <p:cNvPr id="19" name="TextBox 18"/>
+          <p:cNvSpPr txBox="1"/>
+          <p:nvPr/>
+        </p:nvSpPr>
+        <p:spPr>
+          <a:xfrm>
+            <a:off x="1371600" y="4251960"/>
+            <a:ext cx="4434840" cy="1417320"/>
+          </a:xfrm>
+          <a:prstGeom prst="rect">
+            <a:avLst/>
+          </a:prstGeom>
+          <a:noFill/>
+        </p:spPr>
+        <p:txBody>
+          <a:bodyPr wrap="square" anchor="t" lIns="0" rIns="0" tIns="0" bIns="0">
+            <a:spAutoFit/>
+          </a:bodyPr>
+          <a:lstStyle/>
+          <a:p>
+            <a:pPr algn="l">
+              <a:lnSpc>
+                <a:spcPct val="128000"/>
+              </a:lnSpc>
+            </a:pPr>
+            <a:r>
+              <a:rPr sz="1200" b="0">
+                <a:solidFill>
+                  <a:srgbClr val="1C2A33"/>
                 </a:solidFill>
                 <a:latin typeface="楷体"/>
                 <a:ea typeface="楷体"/>
                 <a:cs typeface="楷体"/>
               </a:rPr>
-              <a:t>3</a:t>
-            </a:r>
-          </a:p>
-        </p:txBody>
-      </p:sp>
-      <p:sp>
-        <p:nvSpPr>
-          <p:cNvPr id="19" name="TextBox 18"/>
-          <p:cNvSpPr txBox="1"/>
-          <p:nvPr/>
-        </p:nvSpPr>
-        <p:spPr>
-          <a:xfrm>
-            <a:off x="6461607" y="3749040"/>
-            <a:ext cx="2087803" cy="548640"/>
-          </a:xfrm>
-          <a:prstGeom prst="rect">
-            <a:avLst/>
-          </a:prstGeom>
-          <a:noFill/>
-        </p:spPr>
-        <p:txBody>
-          <a:bodyPr wrap="square" anchor="t" lIns="0" rIns="0" tIns="0" bIns="0">
-            <a:spAutoFit/>
-          </a:bodyPr>
-          <a:lstStyle/>
-          <a:p>
-            <a:pPr algn="ctr"/>
-            <a:r>
-              <a:rPr sz="1800" b="1">
-                <a:solidFill>
-                  <a:srgbClr val="C8A86B"/>
-                </a:solidFill>
-                <a:latin typeface="微软雅黑"/>
-                <a:ea typeface="微软雅黑"/>
-                <a:cs typeface="微软雅黑"/>
-              </a:rPr>
-              <a:t>思维品质</a:t>
-            </a:r>
-          </a:p>
-        </p:txBody>
-      </p:sp>
-      <p:sp>
-        <p:nvSpPr>
-          <p:cNvPr id="20" name="TextBox 19"/>
-          <p:cNvSpPr txBox="1"/>
-          <p:nvPr/>
-        </p:nvSpPr>
-        <p:spPr>
-          <a:xfrm>
-            <a:off x="6479895" y="4343400"/>
-            <a:ext cx="2051227" cy="1188720"/>
-          </a:xfrm>
-          <a:prstGeom prst="rect">
-            <a:avLst/>
-          </a:prstGeom>
-          <a:noFill/>
-        </p:spPr>
-        <p:txBody>
-          <a:bodyPr wrap="square" anchor="t" lIns="0" rIns="0" tIns="0" bIns="0">
-            <a:spAutoFit/>
-          </a:bodyPr>
-          <a:lstStyle/>
-          <a:p>
-            <a:pPr algn="ctr">
-              <a:lnSpc>
-                <a:spcPct val="145000"/>
-              </a:lnSpc>
-            </a:pPr>
-            <a:r>
-              <a:rPr sz="1300" b="0">
-                <a:solidFill>
-                  <a:srgbClr val="1C2A33"/>
-                </a:solidFill>
-                <a:latin typeface="楷体"/>
-                <a:ea typeface="楷体"/>
-                <a:cs typeface="楷体"/>
-              </a:rPr>
-              <a:t>在"选材→剪裁→成文"中，培养信息筛选与结构组织的实用写作思维。</a:t>
-            </a:r>
-          </a:p>
-        </p:txBody>
-      </p:sp>
-      <p:sp>
-        <p:nvSpPr>
-          <p:cNvPr id="21" name="Rounded Rectangle 20"/>
+              <a:t>思维品质：在「选材→剪裁→成文」的过程中，培养信息筛选与结构组织的实用写作思维能力。</a:t>
+            </a:r>
+          </a:p>
+        </p:txBody>
+      </p:sp>
+      <p:sp>
+        <p:nvSpPr>
+          <p:cNvPr id="20" name="Rounded Rectangle 19"/>
           <p:cNvSpPr/>
           <p:nvPr/>
         </p:nvSpPr>
         <p:spPr>
           <a:xfrm>
-            <a:off x="9098051" y="2377440"/>
-            <a:ext cx="2453563" cy="3291840"/>
+            <a:off x="6263640" y="3703320"/>
+            <a:ext cx="5349240" cy="2057400"/>
           </a:xfrm>
           <a:prstGeom prst="roundRect">
             <a:avLst/>
@@ -4301,9 +4212,9 @@
           <a:solidFill>
             <a:srgbClr val="FFFFFF"/>
           </a:solidFill>
-          <a:ln w="20320">
+          <a:ln w="22860">
             <a:solidFill>
-              <a:srgbClr val="6B6258"/>
+              <a:srgbClr val="B23A2A"/>
             </a:solidFill>
           </a:ln>
           <a:effectLst/>
@@ -4332,20 +4243,20 @@
       </p:sp>
       <p:sp>
         <p:nvSpPr>
-          <p:cNvPr id="22" name="Oval 21"/>
+          <p:cNvPr id="21" name="Oval 20"/>
           <p:cNvSpPr/>
           <p:nvPr/>
         </p:nvSpPr>
         <p:spPr>
           <a:xfrm>
-            <a:off x="9913353" y="2697480"/>
-            <a:ext cx="822960" cy="822960"/>
+            <a:off x="6428232" y="3867912"/>
+            <a:ext cx="457200" cy="457200"/>
           </a:xfrm>
           <a:prstGeom prst="ellipse">
             <a:avLst/>
           </a:prstGeom>
           <a:solidFill>
-            <a:srgbClr val="6B6258"/>
+            <a:srgbClr val="B23A2A"/>
           </a:solidFill>
           <a:ln>
             <a:noFill/>
@@ -4376,14 +4287,14 @@
       </p:sp>
       <p:sp>
         <p:nvSpPr>
-          <p:cNvPr id="23" name="TextBox 22"/>
+          <p:cNvPr id="22" name="TextBox 21"/>
           <p:cNvSpPr txBox="1"/>
           <p:nvPr/>
         </p:nvSpPr>
         <p:spPr>
           <a:xfrm>
-            <a:off x="9913353" y="2880360"/>
-            <a:ext cx="822960" cy="457200"/>
+            <a:off x="6428232" y="3922776"/>
+            <a:ext cx="457200" cy="384048"/>
           </a:xfrm>
           <a:prstGeom prst="rect">
             <a:avLst/>
@@ -4398,52 +4309,97 @@
           <a:p>
             <a:pPr algn="ctr"/>
             <a:r>
-              <a:rPr sz="2400" b="1">
+              <a:rPr sz="1600" b="1">
                 <a:solidFill>
                   <a:srgbClr val="FFFFFF"/>
+                </a:solidFill>
+                <a:latin typeface="微软雅黑"/>
+                <a:ea typeface="微软雅黑"/>
+                <a:cs typeface="微软雅黑"/>
+              </a:rPr>
+              <a:t>4</a:t>
+            </a:r>
+          </a:p>
+        </p:txBody>
+      </p:sp>
+      <p:sp>
+        <p:nvSpPr>
+          <p:cNvPr id="23" name="TextBox 22"/>
+          <p:cNvSpPr txBox="1"/>
+          <p:nvPr/>
+        </p:nvSpPr>
+        <p:spPr>
+          <a:xfrm>
+            <a:off x="6995160" y="3813048"/>
+            <a:ext cx="4434840" cy="457200"/>
+          </a:xfrm>
+          <a:prstGeom prst="rect">
+            <a:avLst/>
+          </a:prstGeom>
+          <a:noFill/>
+        </p:spPr>
+        <p:txBody>
+          <a:bodyPr wrap="square" anchor="t" lIns="0" rIns="0" tIns="0" bIns="0">
+            <a:spAutoFit/>
+          </a:bodyPr>
+          <a:lstStyle/>
+          <a:p>
+            <a:pPr algn="l">
+              <a:lnSpc>
+                <a:spcPct val="110000"/>
+              </a:lnSpc>
+            </a:pPr>
+            <a:r>
+              <a:rPr sz="1600" b="1">
+                <a:solidFill>
+                  <a:srgbClr val="1C2A33"/>
+                </a:solidFill>
+                <a:latin typeface="微软雅黑"/>
+                <a:ea typeface="微软雅黑"/>
+                <a:cs typeface="微软雅黑"/>
+              </a:rPr>
+              <a:t>目标</a:t>
+            </a:r>
+          </a:p>
+        </p:txBody>
+      </p:sp>
+      <p:sp>
+        <p:nvSpPr>
+          <p:cNvPr id="24" name="TextBox 23"/>
+          <p:cNvSpPr txBox="1"/>
+          <p:nvPr/>
+        </p:nvSpPr>
+        <p:spPr>
+          <a:xfrm>
+            <a:off x="6995160" y="4251960"/>
+            <a:ext cx="4434840" cy="1417320"/>
+          </a:xfrm>
+          <a:prstGeom prst="rect">
+            <a:avLst/>
+          </a:prstGeom>
+          <a:noFill/>
+        </p:spPr>
+        <p:txBody>
+          <a:bodyPr wrap="square" anchor="t" lIns="0" rIns="0" tIns="0" bIns="0">
+            <a:spAutoFit/>
+          </a:bodyPr>
+          <a:lstStyle/>
+          <a:p>
+            <a:pPr algn="l">
+              <a:lnSpc>
+                <a:spcPct val="128000"/>
+              </a:lnSpc>
+            </a:pPr>
+            <a:r>
+              <a:rPr sz="1200" b="0">
+                <a:solidFill>
+                  <a:srgbClr val="1C2A33"/>
                 </a:solidFill>
                 <a:latin typeface="楷体"/>
                 <a:ea typeface="楷体"/>
                 <a:cs typeface="楷体"/>
               </a:rPr>
-              <a:t>4</a:t>
-            </a:r>
-          </a:p>
-        </p:txBody>
-      </p:sp>
-      <p:sp>
-        <p:nvSpPr>
-          <p:cNvPr id="24" name="TextBox 23"/>
-          <p:cNvSpPr txBox="1"/>
-          <p:nvPr/>
-        </p:nvSpPr>
-        <p:spPr>
-          <a:xfrm>
-            <a:off x="9280931" y="3749040"/>
-            <a:ext cx="2087803" cy="548640"/>
-          </a:xfrm>
-          <a:prstGeom prst="rect">
-            <a:avLst/>
-          </a:prstGeom>
-          <a:noFill/>
-        </p:spPr>
-        <p:txBody>
-          <a:bodyPr wrap="square" anchor="t" lIns="0" rIns="0" tIns="0" bIns="0">
-            <a:spAutoFit/>
-          </a:bodyPr>
-          <a:lstStyle/>
-          <a:p>
-            <a:pPr algn="ctr"/>
-            <a:r>
-              <a:rPr sz="1800" b="1">
-                <a:solidFill>
-                  <a:srgbClr val="6B6258"/>
-                </a:solidFill>
-                <a:latin typeface="微软雅黑"/>
-                <a:ea typeface="微软雅黑"/>
-                <a:cs typeface="微软雅黑"/>
-              </a:rPr>
-              <a:t>学习能力</a:t>
+              <a:t>学习能力：掌握「选典型事件→定结构线索→写新闻语言」的通讯写作三步法，能独立完成一篇通讯。</a:t>
             </a:r>
           </a:p>
         </p:txBody>
@@ -4451,47 +4407,6 @@
       <p:sp>
         <p:nvSpPr>
           <p:cNvPr id="25" name="TextBox 24"/>
-          <p:cNvSpPr txBox="1"/>
-          <p:nvPr/>
-        </p:nvSpPr>
-        <p:spPr>
-          <a:xfrm>
-            <a:off x="9299219" y="4343400"/>
-            <a:ext cx="2051227" cy="1188720"/>
-          </a:xfrm>
-          <a:prstGeom prst="rect">
-            <a:avLst/>
-          </a:prstGeom>
-          <a:noFill/>
-        </p:spPr>
-        <p:txBody>
-          <a:bodyPr wrap="square" anchor="t" lIns="0" rIns="0" tIns="0" bIns="0">
-            <a:spAutoFit/>
-          </a:bodyPr>
-          <a:lstStyle/>
-          <a:p>
-            <a:pPr algn="ctr">
-              <a:lnSpc>
-                <a:spcPct val="145000"/>
-              </a:lnSpc>
-            </a:pPr>
-            <a:r>
-              <a:rPr sz="1300" b="0">
-                <a:solidFill>
-                  <a:srgbClr val="1C2A33"/>
-                </a:solidFill>
-                <a:latin typeface="楷体"/>
-                <a:ea typeface="楷体"/>
-                <a:cs typeface="楷体"/>
-              </a:rPr>
-              <a:t>掌握"选典型事件→定结构线索→写新闻语言"的通讯写作三步法。</a:t>
-            </a:r>
-          </a:p>
-        </p:txBody>
-      </p:sp>
-      <p:sp>
-        <p:nvSpPr>
-          <p:cNvPr id="26" name="TextBox 25"/>
           <p:cNvSpPr txBox="1"/>
           <p:nvPr/>
         </p:nvSpPr>
@@ -4618,13 +4533,13 @@
             <a:r>
               <a:rPr sz="1300" b="1">
                 <a:solidFill>
-                  <a:srgbClr val="B23A2A"/>
+                  <a:srgbClr val="2E7D6B"/>
                 </a:solidFill>
                 <a:latin typeface="微软雅黑"/>
                 <a:ea typeface="微软雅黑"/>
                 <a:cs typeface="微软雅黑"/>
               </a:rPr>
-              <a:t>知人论世 · 从读到写</a:t>
+              <a:t>课文背景</a:t>
             </a:r>
           </a:p>
         </p:txBody>
@@ -4644,7 +4559,7 @@
             <a:avLst/>
           </a:prstGeom>
           <a:solidFill>
-            <a:srgbClr val="B23A2A"/>
+            <a:srgbClr val="2E7D6B"/>
           </a:solidFill>
           <a:ln>
             <a:noFill/>
@@ -4681,49 +4596,8 @@
         </p:nvSpPr>
         <p:spPr>
           <a:xfrm>
-            <a:off x="640080" y="1783080"/>
-            <a:ext cx="5227167" cy="548640"/>
-          </a:xfrm>
-          <a:prstGeom prst="rect">
-            <a:avLst/>
-          </a:prstGeom>
-          <a:noFill/>
-        </p:spPr>
-        <p:txBody>
-          <a:bodyPr wrap="square" anchor="t" lIns="0" rIns="0" tIns="0" bIns="0">
-            <a:spAutoFit/>
-          </a:bodyPr>
-          <a:lstStyle/>
-          <a:p>
-            <a:pPr algn="l">
-              <a:spcAft>
-                <a:spcPts val="600"/>
-              </a:spcAft>
-            </a:pPr>
-            <a:r>
-              <a:rPr sz="2000" b="1">
-                <a:solidFill>
-                  <a:srgbClr val="B23A2A"/>
-                </a:solidFill>
-                <a:latin typeface="楷体"/>
-                <a:ea typeface="楷体"/>
-                <a:cs typeface="楷体"/>
-              </a:rPr>
-              <a:t>为什么写"人物通讯"</a:t>
-            </a:r>
-          </a:p>
-        </p:txBody>
-      </p:sp>
-      <p:sp>
-        <p:nvSpPr>
-          <p:cNvPr id="6" name="TextBox 5"/>
-          <p:cNvSpPr txBox="1"/>
-          <p:nvPr/>
-        </p:nvSpPr>
-        <p:spPr>
-          <a:xfrm>
-            <a:off x="640080" y="2423160"/>
-            <a:ext cx="5227167" cy="4206240"/>
+            <a:off x="640080" y="1508760"/>
+            <a:ext cx="6766560" cy="4572000"/>
           </a:xfrm>
           <a:prstGeom prst="rect">
             <a:avLst/>
@@ -4741,11 +4615,11 @@
                 <a:spcPct val="150000"/>
               </a:lnSpc>
               <a:spcAft>
-                <a:spcPts val="800"/>
+                <a:spcPts val="600"/>
               </a:spcAft>
             </a:pPr>
             <a:r>
-              <a:rPr sz="1450" b="0">
+              <a:rPr sz="1600" b="0">
                 <a:solidFill>
                   <a:srgbClr val="1C2A33"/>
                 </a:solidFill>
@@ -4753,95 +4627,14 @@
                 <a:ea typeface="楷体"/>
                 <a:cs typeface="楷体"/>
               </a:rPr>
-              <a:t>前三课读了三篇人物通讯，第五课做了访谈——</a:t>
-            </a:r>
-          </a:p>
-          <a:p>
-            <a:pPr algn="l">
-              <a:lnSpc>
-                <a:spcPct val="150000"/>
-              </a:lnSpc>
-              <a:spcAft>
-                <a:spcPts val="800"/>
-              </a:spcAft>
-            </a:pPr>
-            <a:r>
-              <a:rPr sz="1500" b="1">
-                <a:solidFill>
-                  <a:srgbClr val="B23A2A"/>
-                </a:solidFill>
-                <a:latin typeface="楷体"/>
-                <a:ea typeface="楷体"/>
-                <a:cs typeface="楷体"/>
-              </a:rPr>
-              <a:t>本课把"读到的、问到的"变成"写出的"。</a:t>
-            </a:r>
-          </a:p>
-          <a:p>
-            <a:pPr algn="l">
-              <a:lnSpc>
-                <a:spcPct val="150000"/>
-              </a:lnSpc>
-              <a:spcAft>
-                <a:spcPts val="1000"/>
-              </a:spcAft>
-            </a:pPr>
-            <a:r>
-              <a:rPr sz="1350" b="0">
-                <a:solidFill>
-                  <a:srgbClr val="6B6258"/>
-                </a:solidFill>
-                <a:latin typeface="楷体"/>
-                <a:ea typeface="楷体"/>
-                <a:cs typeface="楷体"/>
-              </a:rPr>
-              <a:t>依据《普通高中语文课程标准》"实用性阅读与交流"：写作须真实·得体·清晰。</a:t>
-            </a:r>
-          </a:p>
-          <a:p>
-            <a:pPr algn="l">
-              <a:lnSpc>
-                <a:spcPct val="140000"/>
-              </a:lnSpc>
-              <a:spcAft>
-                <a:spcPts val="300"/>
-              </a:spcAft>
-            </a:pPr>
-            <a:r>
-              <a:rPr sz="1400" b="0">
-                <a:solidFill>
-                  <a:srgbClr val="1C2A33"/>
-                </a:solidFill>
-                <a:latin typeface="楷体"/>
-                <a:ea typeface="楷体"/>
-                <a:cs typeface="楷体"/>
-              </a:rPr>
-              <a:t>通讯 ≠ 记叙文：不可虚构；</a:t>
-            </a:r>
-          </a:p>
-          <a:p>
-            <a:pPr algn="l">
-              <a:lnSpc>
-                <a:spcPct val="140000"/>
-              </a:lnSpc>
-            </a:pPr>
-            <a:r>
-              <a:rPr sz="1400" b="0">
-                <a:solidFill>
-                  <a:srgbClr val="1C2A33"/>
-                </a:solidFill>
-                <a:latin typeface="楷体"/>
-                <a:ea typeface="楷体"/>
-                <a:cs typeface="楷体"/>
-              </a:rPr>
-              <a:t>通讯 ≠ 表扬稿：以事写人，不空喊评价。</a:t>
+              <a:t>本课为第二单元第六课时，单元学习任务要求「学写人物通讯」。前三课时阅读了三篇人物通讯（袁隆平·张秉贵·钟扬）和一篇新闻评论，第五课时进行了访谈实践，已积累通讯文体认知和素材。本课将阅读与口语所得转化为写作能力：核心是「选材典型化→结构清晰化→语言新闻化」三步法。通讯写作不同于记叙文——要求真实（不可虚构）、典型（选取代表事件）、有新闻感（简洁·客观·有时间地点）。教材建议写身边的劳动者，可结合第五课时的访谈素材。</a:t>
             </a:r>
           </a:p>
         </p:txBody>
       </p:sp>
       <p:pic>
         <p:nvPicPr>
-          <p:cNvPr id="7" name="Picture 6" descr="typewriter.jpg"/>
+          <p:cNvPr id="6" name="Picture 5" descr="typewriter.jpg"/>
           <p:cNvPicPr>
             <a:picLocks noChangeAspect="1"/>
           </p:cNvPicPr>
@@ -4849,15 +4642,15 @@
         </p:nvPicPr>
         <p:blipFill>
           <a:blip r:embed="rId2"/>
-          <a:srcRect t="17200" b="17200"/>
+          <a:srcRect l="5860" r="5860"/>
           <a:stretch>
             <a:fillRect/>
           </a:stretch>
         </p:blipFill>
         <p:spPr>
           <a:xfrm>
-            <a:off x="6324447" y="1783080"/>
-            <a:ext cx="5227167" cy="2286000"/>
+            <a:off x="8046720" y="1508760"/>
+            <a:ext cx="4114800" cy="3108960"/>
           </a:xfrm>
           <a:prstGeom prst="rect">
             <a:avLst/>
@@ -4866,14 +4659,14 @@
       </p:pic>
       <p:sp>
         <p:nvSpPr>
-          <p:cNvPr id="8" name="TextBox 7"/>
+          <p:cNvPr id="7" name="TextBox 6"/>
           <p:cNvSpPr txBox="1"/>
           <p:nvPr/>
         </p:nvSpPr>
         <p:spPr>
           <a:xfrm>
-            <a:off x="6324447" y="4160520"/>
-            <a:ext cx="5227167" cy="365760"/>
+            <a:off x="8046720" y="4663440"/>
+            <a:ext cx="4114800" cy="365760"/>
           </a:xfrm>
           <a:prstGeom prst="rect">
             <a:avLst/>
@@ -4896,196 +4689,14 @@
                 <a:ea typeface="微软雅黑"/>
                 <a:cs typeface="微软雅黑"/>
               </a:rPr>
-              <a:t>经典打字机（CC BY 4.0）· 写作工具的见证</a:t>
-            </a:r>
-          </a:p>
-        </p:txBody>
-      </p:sp>
-      <p:sp>
-        <p:nvSpPr>
-          <p:cNvPr id="9" name="Rounded Rectangle 8"/>
-          <p:cNvSpPr/>
-          <p:nvPr/>
-        </p:nvSpPr>
-        <p:spPr>
-          <a:xfrm>
-            <a:off x="6324447" y="4572000"/>
-            <a:ext cx="5227167" cy="2011680"/>
-          </a:xfrm>
-          <a:prstGeom prst="roundRect">
-            <a:avLst/>
-          </a:prstGeom>
-          <a:solidFill>
-            <a:srgbClr val="1C2A33"/>
-          </a:solidFill>
-          <a:effectLst/>
-        </p:spPr>
-        <p:style>
-          <a:lnRef idx="1">
-            <a:schemeClr val="accent1"/>
-          </a:lnRef>
-          <a:fillRef idx="3">
-            <a:schemeClr val="accent1"/>
-          </a:fillRef>
-          <a:effectRef idx="2">
-            <a:schemeClr val="accent1"/>
-          </a:effectRef>
-          <a:fontRef idx="minor">
-            <a:schemeClr val="lt1"/>
-          </a:fontRef>
-        </p:style>
-        <p:txBody>
-          <a:bodyPr rtlCol="0" anchor="ctr"/>
-          <a:lstStyle/>
-          <a:p>
-            <a:pPr algn="ctr"/>
-          </a:p>
-        </p:txBody>
-      </p:sp>
-      <p:sp>
-        <p:nvSpPr>
-          <p:cNvPr id="10" name="TextBox 9"/>
-          <p:cNvSpPr txBox="1"/>
-          <p:nvPr/>
-        </p:nvSpPr>
-        <p:spPr>
-          <a:xfrm>
-            <a:off x="6598767" y="4709160"/>
-            <a:ext cx="4678527" cy="457200"/>
-          </a:xfrm>
-          <a:prstGeom prst="rect">
-            <a:avLst/>
-          </a:prstGeom>
-          <a:noFill/>
-        </p:spPr>
-        <p:txBody>
-          <a:bodyPr wrap="square" anchor="t" lIns="0" rIns="0" tIns="0" bIns="0">
-            <a:spAutoFit/>
-          </a:bodyPr>
-          <a:lstStyle/>
-          <a:p>
-            <a:pPr algn="l"/>
-            <a:r>
-              <a:rPr sz="1600" b="1">
-                <a:solidFill>
-                  <a:srgbClr val="C8A86B"/>
-                </a:solidFill>
-                <a:latin typeface="楷体"/>
-                <a:ea typeface="楷体"/>
-                <a:cs typeface="楷体"/>
-              </a:rPr>
-              <a:t>通讯四大特点</a:t>
-            </a:r>
-          </a:p>
-        </p:txBody>
-      </p:sp>
-      <p:sp>
-        <p:nvSpPr>
-          <p:cNvPr id="11" name="TextBox 10"/>
-          <p:cNvSpPr txBox="1"/>
-          <p:nvPr/>
-        </p:nvSpPr>
-        <p:spPr>
-          <a:xfrm>
-            <a:off x="6598767" y="5212080"/>
-            <a:ext cx="4678527" cy="1280160"/>
-          </a:xfrm>
-          <a:prstGeom prst="rect">
-            <a:avLst/>
-          </a:prstGeom>
-          <a:noFill/>
-        </p:spPr>
-        <p:txBody>
-          <a:bodyPr wrap="square" anchor="t" lIns="0" rIns="0" tIns="0" bIns="0">
-            <a:spAutoFit/>
-          </a:bodyPr>
-          <a:lstStyle/>
-          <a:p>
-            <a:pPr algn="l">
-              <a:lnSpc>
-                <a:spcPct val="145000"/>
-              </a:lnSpc>
-              <a:spcAft>
-                <a:spcPts val="300"/>
-              </a:spcAft>
-            </a:pPr>
-            <a:r>
-              <a:rPr sz="1350" b="0">
-                <a:solidFill>
-                  <a:srgbClr val="FFFFFF"/>
-                </a:solidFill>
-                <a:latin typeface="楷体"/>
-                <a:ea typeface="楷体"/>
-                <a:cs typeface="楷体"/>
-              </a:rPr>
-              <a:t>· 严格的真实性（不可虚构）</a:t>
-            </a:r>
-          </a:p>
-          <a:p>
-            <a:pPr algn="l">
-              <a:lnSpc>
-                <a:spcPct val="145000"/>
-              </a:lnSpc>
-              <a:spcAft>
-                <a:spcPts val="300"/>
-              </a:spcAft>
-            </a:pPr>
-            <a:r>
-              <a:rPr sz="1350" b="0">
-                <a:solidFill>
-                  <a:srgbClr val="FFFFFF"/>
-                </a:solidFill>
-                <a:latin typeface="楷体"/>
-                <a:ea typeface="楷体"/>
-                <a:cs typeface="楷体"/>
-              </a:rPr>
-              <a:t>· 报道的客观性（让事实说话）</a:t>
-            </a:r>
-          </a:p>
-          <a:p>
-            <a:pPr algn="l">
-              <a:lnSpc>
-                <a:spcPct val="145000"/>
-              </a:lnSpc>
-              <a:spcAft>
-                <a:spcPts val="300"/>
-              </a:spcAft>
-            </a:pPr>
-            <a:r>
-              <a:rPr sz="1350" b="0">
-                <a:solidFill>
-                  <a:srgbClr val="FFFFFF"/>
-                </a:solidFill>
-                <a:latin typeface="楷体"/>
-                <a:ea typeface="楷体"/>
-                <a:cs typeface="楷体"/>
-              </a:rPr>
-              <a:t>· 较强的时间性（何时何地）</a:t>
-            </a:r>
-          </a:p>
-          <a:p>
-            <a:pPr algn="l">
-              <a:lnSpc>
-                <a:spcPct val="145000"/>
-              </a:lnSpc>
-            </a:pPr>
-            <a:r>
-              <a:rPr sz="1350" b="0">
-                <a:solidFill>
-                  <a:srgbClr val="FFFFFF"/>
-                </a:solidFill>
-                <a:latin typeface="楷体"/>
-                <a:ea typeface="楷体"/>
-                <a:cs typeface="楷体"/>
-              </a:rPr>
-              <a:t>· 描写的形象性（细节取胜）</a:t>
-            </a:r>
-          </a:p>
-        </p:txBody>
-      </p:sp>
-      <p:sp>
-        <p:nvSpPr>
-          <p:cNvPr id="12" name="TextBox 11"/>
+              <a:t>资料图（自由授权，复用 typewriter.jpg）</a:t>
+            </a:r>
+          </a:p>
+        </p:txBody>
+      </p:sp>
+      <p:sp>
+        <p:nvSpPr>
+          <p:cNvPr id="8" name="TextBox 7"/>
           <p:cNvSpPr txBox="1"/>
           <p:nvPr/>
         </p:nvSpPr>
@@ -5218,7 +4829,7 @@
                 <a:ea typeface="微软雅黑"/>
                 <a:cs typeface="微软雅黑"/>
               </a:rPr>
-              <a:t>重点 · 通讯写作三步法</a:t>
+              <a:t>学习重点</a:t>
             </a:r>
           </a:p>
         </p:txBody>
@@ -5269,381 +4880,14 @@
       </p:sp>
       <p:sp>
         <p:nvSpPr>
-          <p:cNvPr id="5" name="TextBox 4"/>
-          <p:cNvSpPr txBox="1"/>
-          <p:nvPr/>
-        </p:nvSpPr>
-        <p:spPr>
-          <a:xfrm>
-            <a:off x="640080" y="1325880"/>
-            <a:ext cx="10058400" cy="548640"/>
-          </a:xfrm>
-          <a:prstGeom prst="rect">
-            <a:avLst/>
-          </a:prstGeom>
-          <a:noFill/>
-        </p:spPr>
-        <p:txBody>
-          <a:bodyPr wrap="square" anchor="t" lIns="0" rIns="0" tIns="0" bIns="0">
-            <a:spAutoFit/>
-          </a:bodyPr>
-          <a:lstStyle/>
-          <a:p>
-            <a:pPr algn="l"/>
-            <a:r>
-              <a:rPr sz="2600" b="1">
-                <a:solidFill>
-                  <a:srgbClr val="1C2A33"/>
-                </a:solidFill>
-                <a:latin typeface="楷体"/>
-                <a:ea typeface="楷体"/>
-                <a:cs typeface="楷体"/>
-              </a:rPr>
-              <a:t>选材 → 结构 → 语言</a:t>
-            </a:r>
-          </a:p>
-        </p:txBody>
-      </p:sp>
-      <p:sp>
-        <p:nvSpPr>
-          <p:cNvPr id="6" name="Rounded Rectangle 5"/>
+          <p:cNvPr id="5" name="Rounded Rectangle 4"/>
           <p:cNvSpPr/>
           <p:nvPr/>
         </p:nvSpPr>
         <p:spPr>
           <a:xfrm>
-            <a:off x="640080" y="2194560"/>
-            <a:ext cx="3393338" cy="3840480"/>
-          </a:xfrm>
-          <a:prstGeom prst="roundRect">
-            <a:avLst/>
-          </a:prstGeom>
-          <a:solidFill>
-            <a:srgbClr val="FFFFFF"/>
-          </a:solidFill>
-          <a:ln w="22860">
-            <a:solidFill>
-              <a:srgbClr val="B23A2A"/>
-            </a:solidFill>
-          </a:ln>
-          <a:effectLst/>
-        </p:spPr>
-        <p:style>
-          <a:lnRef idx="1">
-            <a:schemeClr val="accent1"/>
-          </a:lnRef>
-          <a:fillRef idx="3">
-            <a:schemeClr val="accent1"/>
-          </a:fillRef>
-          <a:effectRef idx="2">
-            <a:schemeClr val="accent1"/>
-          </a:effectRef>
-          <a:fontRef idx="minor">
-            <a:schemeClr val="lt1"/>
-          </a:fontRef>
-        </p:style>
-        <p:txBody>
-          <a:bodyPr rtlCol="0" anchor="ctr"/>
-          <a:lstStyle/>
-          <a:p>
-            <a:pPr algn="ctr"/>
-          </a:p>
-        </p:txBody>
-      </p:sp>
-      <p:sp>
-        <p:nvSpPr>
-          <p:cNvPr id="7" name="TextBox 6"/>
-          <p:cNvSpPr txBox="1"/>
-          <p:nvPr/>
-        </p:nvSpPr>
-        <p:spPr>
-          <a:xfrm>
-            <a:off x="914400" y="2468880"/>
-            <a:ext cx="2844698" cy="548640"/>
-          </a:xfrm>
-          <a:prstGeom prst="rect">
-            <a:avLst/>
-          </a:prstGeom>
-          <a:noFill/>
-        </p:spPr>
-        <p:txBody>
-          <a:bodyPr wrap="square" anchor="t" lIns="0" rIns="0" tIns="0" bIns="0">
-            <a:spAutoFit/>
-          </a:bodyPr>
-          <a:lstStyle/>
-          <a:p>
-            <a:pPr algn="l"/>
-            <a:r>
-              <a:rPr sz="2200" b="1">
-                <a:solidFill>
-                  <a:srgbClr val="B23A2A"/>
-                </a:solidFill>
-                <a:latin typeface="楷体"/>
-                <a:ea typeface="楷体"/>
-                <a:cs typeface="楷体"/>
-              </a:rPr>
-              <a:t>① 选材</a:t>
-            </a:r>
-          </a:p>
-        </p:txBody>
-      </p:sp>
-      <p:sp>
-        <p:nvSpPr>
-          <p:cNvPr id="8" name="TextBox 7"/>
-          <p:cNvSpPr txBox="1"/>
-          <p:nvPr/>
-        </p:nvSpPr>
-        <p:spPr>
-          <a:xfrm>
-            <a:off x="914400" y="3200400"/>
-            <a:ext cx="2844698" cy="914400"/>
-          </a:xfrm>
-          <a:prstGeom prst="rect">
-            <a:avLst/>
-          </a:prstGeom>
-          <a:noFill/>
-        </p:spPr>
-        <p:txBody>
-          <a:bodyPr wrap="square" anchor="t" lIns="0" rIns="0" tIns="0" bIns="0">
-            <a:spAutoFit/>
-          </a:bodyPr>
-          <a:lstStyle/>
-          <a:p>
-            <a:pPr algn="l">
-              <a:lnSpc>
-                <a:spcPct val="145000"/>
-              </a:lnSpc>
-            </a:pPr>
-            <a:r>
-              <a:rPr sz="1500" b="1">
-                <a:solidFill>
-                  <a:srgbClr val="1C2A33"/>
-                </a:solidFill>
-                <a:latin typeface="楷体"/>
-                <a:ea typeface="楷体"/>
-                <a:cs typeface="楷体"/>
-              </a:rPr>
-              <a:t>选 2–3 个典型事件。</a:t>
-            </a:r>
-          </a:p>
-        </p:txBody>
-      </p:sp>
-      <p:sp>
-        <p:nvSpPr>
-          <p:cNvPr id="9" name="TextBox 8"/>
-          <p:cNvSpPr txBox="1"/>
-          <p:nvPr/>
-        </p:nvSpPr>
-        <p:spPr>
-          <a:xfrm>
-            <a:off x="914400" y="4297680"/>
-            <a:ext cx="2844698" cy="1554480"/>
-          </a:xfrm>
-          <a:prstGeom prst="rect">
-            <a:avLst/>
-          </a:prstGeom>
-          <a:noFill/>
-        </p:spPr>
-        <p:txBody>
-          <a:bodyPr wrap="square" anchor="t" lIns="0" rIns="0" tIns="0" bIns="0">
-            <a:spAutoFit/>
-          </a:bodyPr>
-          <a:lstStyle/>
-          <a:p>
-            <a:pPr algn="l">
-              <a:lnSpc>
-                <a:spcPct val="150000"/>
-              </a:lnSpc>
-            </a:pPr>
-            <a:r>
-              <a:rPr sz="1350" b="0">
-                <a:solidFill>
-                  <a:srgbClr val="6B6258"/>
-                </a:solidFill>
-                <a:latin typeface="楷体"/>
-                <a:ea typeface="楷体"/>
-                <a:cs typeface="楷体"/>
-              </a:rPr>
-              <a:t>检测：删掉它，人物形象会不会变？不变 = 不典型。</a:t>
-            </a:r>
-          </a:p>
-        </p:txBody>
-      </p:sp>
-      <p:sp>
-        <p:nvSpPr>
-          <p:cNvPr id="10" name="Rounded Rectangle 9"/>
-          <p:cNvSpPr/>
-          <p:nvPr/>
-        </p:nvSpPr>
-        <p:spPr>
-          <a:xfrm>
-            <a:off x="4399178" y="2194560"/>
-            <a:ext cx="3393338" cy="3840480"/>
-          </a:xfrm>
-          <a:prstGeom prst="roundRect">
-            <a:avLst/>
-          </a:prstGeom>
-          <a:solidFill>
-            <a:srgbClr val="FFFFFF"/>
-          </a:solidFill>
-          <a:ln w="22860">
-            <a:solidFill>
-              <a:srgbClr val="2E7D6B"/>
-            </a:solidFill>
-          </a:ln>
-          <a:effectLst/>
-        </p:spPr>
-        <p:style>
-          <a:lnRef idx="1">
-            <a:schemeClr val="accent1"/>
-          </a:lnRef>
-          <a:fillRef idx="3">
-            <a:schemeClr val="accent1"/>
-          </a:fillRef>
-          <a:effectRef idx="2">
-            <a:schemeClr val="accent1"/>
-          </a:effectRef>
-          <a:fontRef idx="minor">
-            <a:schemeClr val="lt1"/>
-          </a:fontRef>
-        </p:style>
-        <p:txBody>
-          <a:bodyPr rtlCol="0" anchor="ctr"/>
-          <a:lstStyle/>
-          <a:p>
-            <a:pPr algn="ctr"/>
-          </a:p>
-        </p:txBody>
-      </p:sp>
-      <p:sp>
-        <p:nvSpPr>
-          <p:cNvPr id="11" name="TextBox 10"/>
-          <p:cNvSpPr txBox="1"/>
-          <p:nvPr/>
-        </p:nvSpPr>
-        <p:spPr>
-          <a:xfrm>
-            <a:off x="4673498" y="2468880"/>
-            <a:ext cx="2844698" cy="548640"/>
-          </a:xfrm>
-          <a:prstGeom prst="rect">
-            <a:avLst/>
-          </a:prstGeom>
-          <a:noFill/>
-        </p:spPr>
-        <p:txBody>
-          <a:bodyPr wrap="square" anchor="t" lIns="0" rIns="0" tIns="0" bIns="0">
-            <a:spAutoFit/>
-          </a:bodyPr>
-          <a:lstStyle/>
-          <a:p>
-            <a:pPr algn="l"/>
-            <a:r>
-              <a:rPr sz="2200" b="1">
-                <a:solidFill>
-                  <a:srgbClr val="2E7D6B"/>
-                </a:solidFill>
-                <a:latin typeface="楷体"/>
-                <a:ea typeface="楷体"/>
-                <a:cs typeface="楷体"/>
-              </a:rPr>
-              <a:t>② 结构</a:t>
-            </a:r>
-          </a:p>
-        </p:txBody>
-      </p:sp>
-      <p:sp>
-        <p:nvSpPr>
-          <p:cNvPr id="12" name="TextBox 11"/>
-          <p:cNvSpPr txBox="1"/>
-          <p:nvPr/>
-        </p:nvSpPr>
-        <p:spPr>
-          <a:xfrm>
-            <a:off x="4673498" y="3200400"/>
-            <a:ext cx="2844698" cy="914400"/>
-          </a:xfrm>
-          <a:prstGeom prst="rect">
-            <a:avLst/>
-          </a:prstGeom>
-          <a:noFill/>
-        </p:spPr>
-        <p:txBody>
-          <a:bodyPr wrap="square" anchor="t" lIns="0" rIns="0" tIns="0" bIns="0">
-            <a:spAutoFit/>
-          </a:bodyPr>
-          <a:lstStyle/>
-          <a:p>
-            <a:pPr algn="l">
-              <a:lnSpc>
-                <a:spcPct val="145000"/>
-              </a:lnSpc>
-            </a:pPr>
-            <a:r>
-              <a:rPr sz="1500" b="1">
-                <a:solidFill>
-                  <a:srgbClr val="1C2A33"/>
-                </a:solidFill>
-                <a:latin typeface="楷体"/>
-                <a:ea typeface="楷体"/>
-                <a:cs typeface="楷体"/>
-              </a:rPr>
-              <a:t>三选一：时间线 / 细节聚焦 / 时间跨度。</a:t>
-            </a:r>
-          </a:p>
-        </p:txBody>
-      </p:sp>
-      <p:sp>
-        <p:nvSpPr>
-          <p:cNvPr id="13" name="TextBox 12"/>
-          <p:cNvSpPr txBox="1"/>
-          <p:nvPr/>
-        </p:nvSpPr>
-        <p:spPr>
-          <a:xfrm>
-            <a:off x="4673498" y="4297680"/>
-            <a:ext cx="2844698" cy="1554480"/>
-          </a:xfrm>
-          <a:prstGeom prst="rect">
-            <a:avLst/>
-          </a:prstGeom>
-          <a:noFill/>
-        </p:spPr>
-        <p:txBody>
-          <a:bodyPr wrap="square" anchor="t" lIns="0" rIns="0" tIns="0" bIns="0">
-            <a:spAutoFit/>
-          </a:bodyPr>
-          <a:lstStyle/>
-          <a:p>
-            <a:pPr algn="l">
-              <a:lnSpc>
-                <a:spcPct val="150000"/>
-              </a:lnSpc>
-            </a:pPr>
-            <a:r>
-              <a:rPr sz="1350" b="0">
-                <a:solidFill>
-                  <a:srgbClr val="6B6258"/>
-                </a:solidFill>
-                <a:latin typeface="楷体"/>
-                <a:ea typeface="楷体"/>
-                <a:cs typeface="楷体"/>
-              </a:rPr>
-              <a:t>先定线索，再动笔，不东拉西扯。</a:t>
-            </a:r>
-          </a:p>
-        </p:txBody>
-      </p:sp>
-      <p:sp>
-        <p:nvSpPr>
-          <p:cNvPr id="14" name="Rounded Rectangle 13"/>
-          <p:cNvSpPr/>
-          <p:nvPr/>
-        </p:nvSpPr>
-        <p:spPr>
-          <a:xfrm>
-            <a:off x="8158276" y="2194560"/>
-            <a:ext cx="3393338" cy="3840480"/>
+            <a:off x="640080" y="1371600"/>
+            <a:ext cx="10911535" cy="1597152"/>
           </a:xfrm>
           <a:prstGeom prst="roundRect">
             <a:avLst/>
@@ -5682,14 +4926,14 @@
       </p:sp>
       <p:sp>
         <p:nvSpPr>
-          <p:cNvPr id="15" name="TextBox 14"/>
+          <p:cNvPr id="6" name="TextBox 5"/>
           <p:cNvSpPr txBox="1"/>
           <p:nvPr/>
         </p:nvSpPr>
         <p:spPr>
           <a:xfrm>
-            <a:off x="8432596" y="2468880"/>
-            <a:ext cx="2844698" cy="548640"/>
+            <a:off x="1371600" y="1481328"/>
+            <a:ext cx="9997135" cy="457200"/>
           </a:xfrm>
           <a:prstGeom prst="rect">
             <a:avLst/>
@@ -5702,31 +4946,122 @@
           </a:bodyPr>
           <a:lstStyle/>
           <a:p>
-            <a:pPr algn="l"/>
-            <a:r>
-              <a:rPr sz="2200" b="1">
-                <a:solidFill>
-                  <a:srgbClr val="C8A86B"/>
+            <a:pPr algn="l">
+              <a:lnSpc>
+                <a:spcPct val="110000"/>
+              </a:lnSpc>
+            </a:pPr>
+            <a:r>
+              <a:rPr sz="1600" b="1">
+                <a:solidFill>
+                  <a:srgbClr val="1C2A33"/>
+                </a:solidFill>
+                <a:latin typeface="微软雅黑"/>
+                <a:ea typeface="微软雅黑"/>
+                <a:cs typeface="微软雅黑"/>
+              </a:rPr>
+              <a:t/>
+            </a:r>
+          </a:p>
+        </p:txBody>
+      </p:sp>
+      <p:sp>
+        <p:nvSpPr>
+          <p:cNvPr id="7" name="TextBox 6"/>
+          <p:cNvSpPr txBox="1"/>
+          <p:nvPr/>
+        </p:nvSpPr>
+        <p:spPr>
+          <a:xfrm>
+            <a:off x="1371600" y="1920240"/>
+            <a:ext cx="9997135" cy="957072"/>
+          </a:xfrm>
+          <a:prstGeom prst="rect">
+            <a:avLst/>
+          </a:prstGeom>
+          <a:noFill/>
+        </p:spPr>
+        <p:txBody>
+          <a:bodyPr wrap="square" anchor="t" lIns="0" rIns="0" tIns="0" bIns="0">
+            <a:spAutoFit/>
+          </a:bodyPr>
+          <a:lstStyle/>
+          <a:p>
+            <a:pPr algn="l">
+              <a:lnSpc>
+                <a:spcPct val="128000"/>
+              </a:lnSpc>
+            </a:pPr>
+            <a:r>
+              <a:rPr sz="1200" b="0">
+                <a:solidFill>
+                  <a:srgbClr val="1C2A33"/>
                 </a:solidFill>
                 <a:latin typeface="楷体"/>
                 <a:ea typeface="楷体"/>
                 <a:cs typeface="楷体"/>
               </a:rPr>
-              <a:t>③ 语言</a:t>
-            </a:r>
-          </a:p>
-        </p:txBody>
-      </p:sp>
-      <p:sp>
-        <p:nvSpPr>
-          <p:cNvPr id="16" name="TextBox 15"/>
+              <a:t>① 选材典型化：不写流水账，选2-3个能体现人物精神的关键事件（如张秉贵选「一抓准」不选「每天上班」）。</a:t>
+            </a:r>
+          </a:p>
+        </p:txBody>
+      </p:sp>
+      <p:sp>
+        <p:nvSpPr>
+          <p:cNvPr id="8" name="Rounded Rectangle 7"/>
+          <p:cNvSpPr/>
+          <p:nvPr/>
+        </p:nvSpPr>
+        <p:spPr>
+          <a:xfrm>
+            <a:off x="640080" y="3078480"/>
+            <a:ext cx="10911535" cy="1597152"/>
+          </a:xfrm>
+          <a:prstGeom prst="roundRect">
+            <a:avLst/>
+          </a:prstGeom>
+          <a:solidFill>
+            <a:srgbClr val="FFFFFF"/>
+          </a:solidFill>
+          <a:ln w="22860">
+            <a:solidFill>
+              <a:srgbClr val="C8A86B"/>
+            </a:solidFill>
+          </a:ln>
+          <a:effectLst/>
+        </p:spPr>
+        <p:style>
+          <a:lnRef idx="1">
+            <a:schemeClr val="accent1"/>
+          </a:lnRef>
+          <a:fillRef idx="3">
+            <a:schemeClr val="accent1"/>
+          </a:fillRef>
+          <a:effectRef idx="2">
+            <a:schemeClr val="accent1"/>
+          </a:effectRef>
+          <a:fontRef idx="minor">
+            <a:schemeClr val="lt1"/>
+          </a:fontRef>
+        </p:style>
+        <p:txBody>
+          <a:bodyPr rtlCol="0" anchor="ctr"/>
+          <a:lstStyle/>
+          <a:p>
+            <a:pPr algn="ctr"/>
+          </a:p>
+        </p:txBody>
+      </p:sp>
+      <p:sp>
+        <p:nvSpPr>
+          <p:cNvPr id="9" name="TextBox 8"/>
           <p:cNvSpPr txBox="1"/>
           <p:nvPr/>
         </p:nvSpPr>
         <p:spPr>
           <a:xfrm>
-            <a:off x="8432596" y="3200400"/>
-            <a:ext cx="2844698" cy="914400"/>
+            <a:off x="1371600" y="3188208"/>
+            <a:ext cx="9997135" cy="457200"/>
           </a:xfrm>
           <a:prstGeom prst="rect">
             <a:avLst/>
@@ -5741,11 +5076,52 @@
           <a:p>
             <a:pPr algn="l">
               <a:lnSpc>
-                <a:spcPct val="145000"/>
+                <a:spcPct val="110000"/>
               </a:lnSpc>
             </a:pPr>
             <a:r>
-              <a:rPr sz="1500" b="1">
+              <a:rPr sz="1600" b="1">
+                <a:solidFill>
+                  <a:srgbClr val="1C2A33"/>
+                </a:solidFill>
+                <a:latin typeface="微软雅黑"/>
+                <a:ea typeface="微软雅黑"/>
+                <a:cs typeface="微软雅黑"/>
+              </a:rPr>
+              <a:t/>
+            </a:r>
+          </a:p>
+        </p:txBody>
+      </p:sp>
+      <p:sp>
+        <p:nvSpPr>
+          <p:cNvPr id="10" name="TextBox 9"/>
+          <p:cNvSpPr txBox="1"/>
+          <p:nvPr/>
+        </p:nvSpPr>
+        <p:spPr>
+          <a:xfrm>
+            <a:off x="1371600" y="3627120"/>
+            <a:ext cx="9997135" cy="957072"/>
+          </a:xfrm>
+          <a:prstGeom prst="rect">
+            <a:avLst/>
+          </a:prstGeom>
+          <a:noFill/>
+        </p:spPr>
+        <p:txBody>
+          <a:bodyPr wrap="square" anchor="t" lIns="0" rIns="0" tIns="0" bIns="0">
+            <a:spAutoFit/>
+          </a:bodyPr>
+          <a:lstStyle/>
+          <a:p>
+            <a:pPr algn="l">
+              <a:lnSpc>
+                <a:spcPct val="128000"/>
+              </a:lnSpc>
+            </a:pPr>
+            <a:r>
+              <a:rPr sz="1200" b="0">
                 <a:solidFill>
                   <a:srgbClr val="1C2A33"/>
                 </a:solidFill>
@@ -5753,21 +5129,67 @@
                 <a:ea typeface="楷体"/>
                 <a:cs typeface="楷体"/>
               </a:rPr>
-              <a:t>简洁客观：动词优先于形容词。</a:t>
-            </a:r>
-          </a:p>
-        </p:txBody>
-      </p:sp>
-      <p:sp>
-        <p:nvSpPr>
-          <p:cNvPr id="17" name="TextBox 16"/>
+              <a:t>② 结构清晰化：可用时间线（袁隆平式）或细节聚焦（张秉贵式）或时间跨度（钟扬式）三种结构。</a:t>
+            </a:r>
+          </a:p>
+        </p:txBody>
+      </p:sp>
+      <p:sp>
+        <p:nvSpPr>
+          <p:cNvPr id="11" name="Rounded Rectangle 10"/>
+          <p:cNvSpPr/>
+          <p:nvPr/>
+        </p:nvSpPr>
+        <p:spPr>
+          <a:xfrm>
+            <a:off x="640080" y="4785360"/>
+            <a:ext cx="10911535" cy="1597152"/>
+          </a:xfrm>
+          <a:prstGeom prst="roundRect">
+            <a:avLst/>
+          </a:prstGeom>
+          <a:solidFill>
+            <a:srgbClr val="FFFFFF"/>
+          </a:solidFill>
+          <a:ln w="22860">
+            <a:solidFill>
+              <a:srgbClr val="C8A86B"/>
+            </a:solidFill>
+          </a:ln>
+          <a:effectLst/>
+        </p:spPr>
+        <p:style>
+          <a:lnRef idx="1">
+            <a:schemeClr val="accent1"/>
+          </a:lnRef>
+          <a:fillRef idx="3">
+            <a:schemeClr val="accent1"/>
+          </a:fillRef>
+          <a:effectRef idx="2">
+            <a:schemeClr val="accent1"/>
+          </a:effectRef>
+          <a:fontRef idx="minor">
+            <a:schemeClr val="lt1"/>
+          </a:fontRef>
+        </p:style>
+        <p:txBody>
+          <a:bodyPr rtlCol="0" anchor="ctr"/>
+          <a:lstStyle/>
+          <a:p>
+            <a:pPr algn="ctr"/>
+          </a:p>
+        </p:txBody>
+      </p:sp>
+      <p:sp>
+        <p:nvSpPr>
+          <p:cNvPr id="12" name="TextBox 11"/>
           <p:cNvSpPr txBox="1"/>
           <p:nvPr/>
         </p:nvSpPr>
         <p:spPr>
           <a:xfrm>
-            <a:off x="8432596" y="4297680"/>
-            <a:ext cx="2844698" cy="1554480"/>
+            <a:off x="1371600" y="4895088"/>
+            <a:ext cx="9997135" cy="457200"/>
           </a:xfrm>
           <a:prstGeom prst="rect">
             <a:avLst/>
@@ -5782,26 +5204,67 @@
           <a:p>
             <a:pPr algn="l">
               <a:lnSpc>
-                <a:spcPct val="150000"/>
+                <a:spcPct val="110000"/>
               </a:lnSpc>
             </a:pPr>
             <a:r>
-              <a:rPr sz="1350" b="0">
-                <a:solidFill>
-                  <a:srgbClr val="6B6258"/>
+              <a:rPr sz="1600" b="1">
+                <a:solidFill>
+                  <a:srgbClr val="1C2A33"/>
+                </a:solidFill>
+                <a:latin typeface="微软雅黑"/>
+                <a:ea typeface="微软雅黑"/>
+                <a:cs typeface="微软雅黑"/>
+              </a:rPr>
+              <a:t/>
+            </a:r>
+          </a:p>
+        </p:txBody>
+      </p:sp>
+      <p:sp>
+        <p:nvSpPr>
+          <p:cNvPr id="13" name="TextBox 12"/>
+          <p:cNvSpPr txBox="1"/>
+          <p:nvPr/>
+        </p:nvSpPr>
+        <p:spPr>
+          <a:xfrm>
+            <a:off x="1371600" y="5334000"/>
+            <a:ext cx="9997135" cy="957072"/>
+          </a:xfrm>
+          <a:prstGeom prst="rect">
+            <a:avLst/>
+          </a:prstGeom>
+          <a:noFill/>
+        </p:spPr>
+        <p:txBody>
+          <a:bodyPr wrap="square" anchor="t" lIns="0" rIns="0" tIns="0" bIns="0">
+            <a:spAutoFit/>
+          </a:bodyPr>
+          <a:lstStyle/>
+          <a:p>
+            <a:pPr algn="l">
+              <a:lnSpc>
+                <a:spcPct val="128000"/>
+              </a:lnSpc>
+            </a:pPr>
+            <a:r>
+              <a:rPr sz="1200" b="0">
+                <a:solidFill>
+                  <a:srgbClr val="1C2A33"/>
                 </a:solidFill>
                 <a:latin typeface="楷体"/>
                 <a:ea typeface="楷体"/>
                 <a:cs typeface="楷体"/>
               </a:rPr>
-              <a:t>有数据、有言行描写，用新闻句式。</a:t>
-            </a:r>
-          </a:p>
-        </p:txBody>
-      </p:sp>
-      <p:sp>
-        <p:nvSpPr>
-          <p:cNvPr id="18" name="TextBox 17"/>
+              <a:t>③ 语言新闻化：简洁客观（少用形容词多用动词和数据）·有人物描写（言行细节）·有新闻句式（时间地点+事件）。</a:t>
+            </a:r>
+          </a:p>
+        </p:txBody>
+      </p:sp>
+      <p:sp>
+        <p:nvSpPr>
+          <p:cNvPr id="14" name="TextBox 13"/>
           <p:cNvSpPr txBox="1"/>
           <p:nvPr/>
         </p:nvSpPr>
@@ -5928,13 +5391,13 @@
             <a:r>
               <a:rPr sz="1300" b="1">
                 <a:solidFill>
-                  <a:srgbClr val="B23A2A"/>
+                  <a:srgbClr val="2E7D6B"/>
                 </a:solidFill>
                 <a:latin typeface="微软雅黑"/>
                 <a:ea typeface="微软雅黑"/>
                 <a:cs typeface="微软雅黑"/>
               </a:rPr>
-              <a:t>重点 · 三种结构借鉴</a:t>
+              <a:t>学习路径</a:t>
             </a:r>
           </a:p>
         </p:txBody>
@@ -5949,363 +5412,6 @@
           <a:xfrm>
             <a:off x="640080" y="1097280"/>
             <a:ext cx="822960" cy="30480"/>
-          </a:xfrm>
-          <a:prstGeom prst="rect">
-            <a:avLst/>
-          </a:prstGeom>
-          <a:solidFill>
-            <a:srgbClr val="B23A2A"/>
-          </a:solidFill>
-          <a:ln>
-            <a:noFill/>
-          </a:ln>
-          <a:effectLst/>
-        </p:spPr>
-        <p:style>
-          <a:lnRef idx="1">
-            <a:schemeClr val="accent1"/>
-          </a:lnRef>
-          <a:fillRef idx="3">
-            <a:schemeClr val="accent1"/>
-          </a:fillRef>
-          <a:effectRef idx="2">
-            <a:schemeClr val="accent1"/>
-          </a:effectRef>
-          <a:fontRef idx="minor">
-            <a:schemeClr val="lt1"/>
-          </a:fontRef>
-        </p:style>
-        <p:txBody>
-          <a:bodyPr rtlCol="0" anchor="ctr"/>
-          <a:lstStyle/>
-          <a:p>
-            <a:pPr algn="ctr"/>
-          </a:p>
-        </p:txBody>
-      </p:sp>
-      <p:sp>
-        <p:nvSpPr>
-          <p:cNvPr id="5" name="TextBox 4"/>
-          <p:cNvSpPr txBox="1"/>
-          <p:nvPr/>
-        </p:nvSpPr>
-        <p:spPr>
-          <a:xfrm>
-            <a:off x="640080" y="1325880"/>
-            <a:ext cx="10515600" cy="548640"/>
-          </a:xfrm>
-          <a:prstGeom prst="rect">
-            <a:avLst/>
-          </a:prstGeom>
-          <a:noFill/>
-        </p:spPr>
-        <p:txBody>
-          <a:bodyPr wrap="square" anchor="t" lIns="0" rIns="0" tIns="0" bIns="0">
-            <a:spAutoFit/>
-          </a:bodyPr>
-          <a:lstStyle/>
-          <a:p>
-            <a:pPr algn="l"/>
-            <a:r>
-              <a:rPr sz="2400" b="1">
-                <a:solidFill>
-                  <a:srgbClr val="1C2A33"/>
-                </a:solidFill>
-                <a:latin typeface="楷体"/>
-                <a:ea typeface="楷体"/>
-                <a:cs typeface="楷体"/>
-              </a:rPr>
-              <a:t>向单元课文学"怎么搭骨架"</a:t>
-            </a:r>
-          </a:p>
-        </p:txBody>
-      </p:sp>
-      <p:sp>
-        <p:nvSpPr>
-          <p:cNvPr id="6" name="Rounded Rectangle 5"/>
-          <p:cNvSpPr/>
-          <p:nvPr/>
-        </p:nvSpPr>
-        <p:spPr>
-          <a:xfrm>
-            <a:off x="640080" y="2194560"/>
-            <a:ext cx="3393338" cy="3840480"/>
-          </a:xfrm>
-          <a:prstGeom prst="roundRect">
-            <a:avLst/>
-          </a:prstGeom>
-          <a:solidFill>
-            <a:srgbClr val="FFFFFF"/>
-          </a:solidFill>
-          <a:ln w="20320">
-            <a:solidFill>
-              <a:srgbClr val="B23A2A"/>
-            </a:solidFill>
-          </a:ln>
-          <a:effectLst/>
-        </p:spPr>
-        <p:style>
-          <a:lnRef idx="1">
-            <a:schemeClr val="accent1"/>
-          </a:lnRef>
-          <a:fillRef idx="3">
-            <a:schemeClr val="accent1"/>
-          </a:fillRef>
-          <a:effectRef idx="2">
-            <a:schemeClr val="accent1"/>
-          </a:effectRef>
-          <a:fontRef idx="minor">
-            <a:schemeClr val="lt1"/>
-          </a:fontRef>
-        </p:style>
-        <p:txBody>
-          <a:bodyPr rtlCol="0" anchor="ctr"/>
-          <a:lstStyle/>
-          <a:p>
-            <a:pPr algn="ctr"/>
-          </a:p>
-        </p:txBody>
-      </p:sp>
-      <p:sp>
-        <p:nvSpPr>
-          <p:cNvPr id="7" name="Rectangle 6"/>
-          <p:cNvSpPr/>
-          <p:nvPr/>
-        </p:nvSpPr>
-        <p:spPr>
-          <a:xfrm>
-            <a:off x="640080" y="2194560"/>
-            <a:ext cx="3393338" cy="548640"/>
-          </a:xfrm>
-          <a:prstGeom prst="rect">
-            <a:avLst/>
-          </a:prstGeom>
-          <a:solidFill>
-            <a:srgbClr val="B23A2A"/>
-          </a:solidFill>
-          <a:ln>
-            <a:noFill/>
-          </a:ln>
-          <a:effectLst/>
-        </p:spPr>
-        <p:style>
-          <a:lnRef idx="1">
-            <a:schemeClr val="accent1"/>
-          </a:lnRef>
-          <a:fillRef idx="3">
-            <a:schemeClr val="accent1"/>
-          </a:fillRef>
-          <a:effectRef idx="2">
-            <a:schemeClr val="accent1"/>
-          </a:effectRef>
-          <a:fontRef idx="minor">
-            <a:schemeClr val="lt1"/>
-          </a:fontRef>
-        </p:style>
-        <p:txBody>
-          <a:bodyPr rtlCol="0" anchor="ctr"/>
-          <a:lstStyle/>
-          <a:p>
-            <a:pPr algn="ctr"/>
-          </a:p>
-        </p:txBody>
-      </p:sp>
-      <p:sp>
-        <p:nvSpPr>
-          <p:cNvPr id="8" name="TextBox 7"/>
-          <p:cNvSpPr txBox="1"/>
-          <p:nvPr/>
-        </p:nvSpPr>
-        <p:spPr>
-          <a:xfrm>
-            <a:off x="640080" y="2304288"/>
-            <a:ext cx="3393338" cy="365760"/>
-          </a:xfrm>
-          <a:prstGeom prst="rect">
-            <a:avLst/>
-          </a:prstGeom>
-          <a:noFill/>
-        </p:spPr>
-        <p:txBody>
-          <a:bodyPr wrap="square" anchor="t" lIns="0" rIns="0" tIns="0" bIns="0">
-            <a:spAutoFit/>
-          </a:bodyPr>
-          <a:lstStyle/>
-          <a:p>
-            <a:pPr algn="ctr"/>
-            <a:r>
-              <a:rPr sz="1500" b="1">
-                <a:solidFill>
-                  <a:srgbClr val="FFFFFF"/>
-                </a:solidFill>
-                <a:latin typeface="微软雅黑"/>
-                <a:ea typeface="微软雅黑"/>
-                <a:cs typeface="微软雅黑"/>
-              </a:rPr>
-              <a:t>时间线（袁隆平式）</a:t>
-            </a:r>
-          </a:p>
-        </p:txBody>
-      </p:sp>
-      <p:sp>
-        <p:nvSpPr>
-          <p:cNvPr id="9" name="TextBox 8"/>
-          <p:cNvSpPr txBox="1"/>
-          <p:nvPr/>
-        </p:nvSpPr>
-        <p:spPr>
-          <a:xfrm>
-            <a:off x="914400" y="2971800"/>
-            <a:ext cx="2844698" cy="2011680"/>
-          </a:xfrm>
-          <a:prstGeom prst="rect">
-            <a:avLst/>
-          </a:prstGeom>
-          <a:noFill/>
-        </p:spPr>
-        <p:txBody>
-          <a:bodyPr wrap="square" anchor="t" lIns="0" rIns="0" tIns="0" bIns="0">
-            <a:spAutoFit/>
-          </a:bodyPr>
-          <a:lstStyle/>
-          <a:p>
-            <a:pPr algn="l">
-              <a:lnSpc>
-                <a:spcPct val="155000"/>
-              </a:lnSpc>
-            </a:pPr>
-            <a:r>
-              <a:rPr sz="1400" b="0">
-                <a:solidFill>
-                  <a:srgbClr val="1C2A33"/>
-                </a:solidFill>
-                <a:latin typeface="楷体"/>
-                <a:ea typeface="楷体"/>
-                <a:cs typeface="楷体"/>
-              </a:rPr>
-              <a:t>按研究历程展开：从发现天然杂交稻到三系配套，时间推进即精神推进。</a:t>
-            </a:r>
-          </a:p>
-        </p:txBody>
-      </p:sp>
-      <p:sp>
-        <p:nvSpPr>
-          <p:cNvPr id="10" name="TextBox 9"/>
-          <p:cNvSpPr txBox="1"/>
-          <p:nvPr/>
-        </p:nvSpPr>
-        <p:spPr>
-          <a:xfrm>
-            <a:off x="914400" y="5074920"/>
-            <a:ext cx="2844698" cy="822960"/>
-          </a:xfrm>
-          <a:prstGeom prst="rect">
-            <a:avLst/>
-          </a:prstGeom>
-          <a:noFill/>
-        </p:spPr>
-        <p:txBody>
-          <a:bodyPr wrap="square" anchor="t" lIns="0" rIns="0" tIns="0" bIns="0">
-            <a:spAutoFit/>
-          </a:bodyPr>
-          <a:lstStyle/>
-          <a:p>
-            <a:pPr algn="l">
-              <a:lnSpc>
-                <a:spcPct val="145000"/>
-              </a:lnSpc>
-              <a:spcAft>
-                <a:spcPts val="400"/>
-              </a:spcAft>
-            </a:pPr>
-            <a:r>
-              <a:rPr sz="1300" b="0">
-                <a:solidFill>
-                  <a:srgbClr val="6B6258"/>
-                </a:solidFill>
-                <a:latin typeface="楷体"/>
-                <a:ea typeface="楷体"/>
-                <a:cs typeface="楷体"/>
-              </a:rPr>
-              <a:t>适合：有清晰经历脉络的人。</a:t>
-            </a:r>
-          </a:p>
-          <a:p>
-            <a:pPr algn="l">
-              <a:lnSpc>
-                <a:spcPct val="140000"/>
-              </a:lnSpc>
-            </a:pPr>
-            <a:r>
-              <a:rPr sz="1250" b="1">
-                <a:solidFill>
-                  <a:srgbClr val="B23A2A"/>
-                </a:solidFill>
-                <a:latin typeface="楷体"/>
-                <a:ea typeface="楷体"/>
-                <a:cs typeface="楷体"/>
-              </a:rPr>
-              <a:t>典型≠大事：小事能体现精神也是典型。</a:t>
-            </a:r>
-          </a:p>
-        </p:txBody>
-      </p:sp>
-      <p:sp>
-        <p:nvSpPr>
-          <p:cNvPr id="11" name="Rounded Rectangle 10"/>
-          <p:cNvSpPr/>
-          <p:nvPr/>
-        </p:nvSpPr>
-        <p:spPr>
-          <a:xfrm>
-            <a:off x="4399178" y="2194560"/>
-            <a:ext cx="3393338" cy="3840480"/>
-          </a:xfrm>
-          <a:prstGeom prst="roundRect">
-            <a:avLst/>
-          </a:prstGeom>
-          <a:solidFill>
-            <a:srgbClr val="FFFFFF"/>
-          </a:solidFill>
-          <a:ln w="20320">
-            <a:solidFill>
-              <a:srgbClr val="2E7D6B"/>
-            </a:solidFill>
-          </a:ln>
-          <a:effectLst/>
-        </p:spPr>
-        <p:style>
-          <a:lnRef idx="1">
-            <a:schemeClr val="accent1"/>
-          </a:lnRef>
-          <a:fillRef idx="3">
-            <a:schemeClr val="accent1"/>
-          </a:fillRef>
-          <a:effectRef idx="2">
-            <a:schemeClr val="accent1"/>
-          </a:effectRef>
-          <a:fontRef idx="minor">
-            <a:schemeClr val="lt1"/>
-          </a:fontRef>
-        </p:style>
-        <p:txBody>
-          <a:bodyPr rtlCol="0" anchor="ctr"/>
-          <a:lstStyle/>
-          <a:p>
-            <a:pPr algn="ctr"/>
-          </a:p>
-        </p:txBody>
-      </p:sp>
-      <p:sp>
-        <p:nvSpPr>
-          <p:cNvPr id="12" name="Rectangle 11"/>
-          <p:cNvSpPr/>
-          <p:nvPr/>
-        </p:nvSpPr>
-        <p:spPr>
-          <a:xfrm>
-            <a:off x="4399178" y="2194560"/>
-            <a:ext cx="3393338" cy="548640"/>
           </a:xfrm>
           <a:prstGeom prst="rect">
             <a:avLst/>
@@ -6342,154 +5448,14 @@
       </p:sp>
       <p:sp>
         <p:nvSpPr>
-          <p:cNvPr id="13" name="TextBox 12"/>
-          <p:cNvSpPr txBox="1"/>
-          <p:nvPr/>
-        </p:nvSpPr>
-        <p:spPr>
-          <a:xfrm>
-            <a:off x="4399178" y="2304288"/>
-            <a:ext cx="3393338" cy="365760"/>
-          </a:xfrm>
-          <a:prstGeom prst="rect">
-            <a:avLst/>
-          </a:prstGeom>
-          <a:noFill/>
-        </p:spPr>
-        <p:txBody>
-          <a:bodyPr wrap="square" anchor="t" lIns="0" rIns="0" tIns="0" bIns="0">
-            <a:spAutoFit/>
-          </a:bodyPr>
-          <a:lstStyle/>
-          <a:p>
-            <a:pPr algn="ctr"/>
-            <a:r>
-              <a:rPr sz="1500" b="1">
-                <a:solidFill>
-                  <a:srgbClr val="FFFFFF"/>
-                </a:solidFill>
-                <a:latin typeface="微软雅黑"/>
-                <a:ea typeface="微软雅黑"/>
-                <a:cs typeface="微软雅黑"/>
-              </a:rPr>
-              <a:t>细节聚焦（张秉贵式）</a:t>
-            </a:r>
-          </a:p>
-        </p:txBody>
-      </p:sp>
-      <p:sp>
-        <p:nvSpPr>
-          <p:cNvPr id="14" name="TextBox 13"/>
-          <p:cNvSpPr txBox="1"/>
-          <p:nvPr/>
-        </p:nvSpPr>
-        <p:spPr>
-          <a:xfrm>
-            <a:off x="4673498" y="2971800"/>
-            <a:ext cx="2844698" cy="2011680"/>
-          </a:xfrm>
-          <a:prstGeom prst="rect">
-            <a:avLst/>
-          </a:prstGeom>
-          <a:noFill/>
-        </p:spPr>
-        <p:txBody>
-          <a:bodyPr wrap="square" anchor="t" lIns="0" rIns="0" tIns="0" bIns="0">
-            <a:spAutoFit/>
-          </a:bodyPr>
-          <a:lstStyle/>
-          <a:p>
-            <a:pPr algn="l">
-              <a:lnSpc>
-                <a:spcPct val="155000"/>
-              </a:lnSpc>
-            </a:pPr>
-            <a:r>
-              <a:rPr sz="1400" b="0">
-                <a:solidFill>
-                  <a:srgbClr val="1C2A33"/>
-                </a:solidFill>
-                <a:latin typeface="楷体"/>
-                <a:ea typeface="楷体"/>
-                <a:cs typeface="楷体"/>
-              </a:rPr>
-              <a:t>抓招牌细节："一抓准""一口清"，一个动作写活一个人。</a:t>
-            </a:r>
-          </a:p>
-        </p:txBody>
-      </p:sp>
-      <p:sp>
-        <p:nvSpPr>
-          <p:cNvPr id="15" name="TextBox 14"/>
-          <p:cNvSpPr txBox="1"/>
-          <p:nvPr/>
-        </p:nvSpPr>
-        <p:spPr>
-          <a:xfrm>
-            <a:off x="4673498" y="5074920"/>
-            <a:ext cx="2844698" cy="822960"/>
-          </a:xfrm>
-          <a:prstGeom prst="rect">
-            <a:avLst/>
-          </a:prstGeom>
-          <a:noFill/>
-        </p:spPr>
-        <p:txBody>
-          <a:bodyPr wrap="square" anchor="t" lIns="0" rIns="0" tIns="0" bIns="0">
-            <a:spAutoFit/>
-          </a:bodyPr>
-          <a:lstStyle/>
-          <a:p>
-            <a:pPr algn="l">
-              <a:lnSpc>
-                <a:spcPct val="145000"/>
-              </a:lnSpc>
-              <a:spcAft>
-                <a:spcPts val="400"/>
-              </a:spcAft>
-            </a:pPr>
-            <a:r>
-              <a:rPr sz="1300" b="0">
-                <a:solidFill>
-                  <a:srgbClr val="6B6258"/>
-                </a:solidFill>
-                <a:latin typeface="楷体"/>
-                <a:ea typeface="楷体"/>
-                <a:cs typeface="楷体"/>
-              </a:rPr>
-              <a:t>适合：有标志性言行的人。</a:t>
-            </a:r>
-          </a:p>
-          <a:p>
-            <a:pPr algn="l">
-              <a:lnSpc>
-                <a:spcPct val="140000"/>
-              </a:lnSpc>
-            </a:pPr>
-            <a:r>
-              <a:rPr sz="1250" b="1">
-                <a:solidFill>
-                  <a:srgbClr val="2E7D6B"/>
-                </a:solidFill>
-                <a:latin typeface="楷体"/>
-                <a:ea typeface="楷体"/>
-                <a:cs typeface="楷体"/>
-              </a:rPr>
-              <a:t>典型≠大事：小事能体现精神也是典型。</a:t>
-            </a:r>
-          </a:p>
-        </p:txBody>
-      </p:sp>
-      <p:sp>
-        <p:nvSpPr>
-          <p:cNvPr id="16" name="Rounded Rectangle 15"/>
+          <p:cNvPr id="5" name="Rounded Rectangle 4"/>
           <p:cNvSpPr/>
           <p:nvPr/>
         </p:nvSpPr>
         <p:spPr>
           <a:xfrm>
-            <a:off x="8158276" y="2194560"/>
-            <a:ext cx="3393338" cy="3840480"/>
+            <a:off x="640080" y="1371600"/>
+            <a:ext cx="10911535" cy="685800"/>
           </a:xfrm>
           <a:prstGeom prst="roundRect">
             <a:avLst/>
@@ -6497,9 +5463,9 @@
           <a:solidFill>
             <a:srgbClr val="FFFFFF"/>
           </a:solidFill>
-          <a:ln w="20320">
+          <a:ln w="22860">
             <a:solidFill>
-              <a:srgbClr val="C8A86B"/>
+              <a:srgbClr val="2E7D6B"/>
             </a:solidFill>
           </a:ln>
           <a:effectLst/>
@@ -6528,20 +5494,20 @@
       </p:sp>
       <p:sp>
         <p:nvSpPr>
-          <p:cNvPr id="17" name="Rectangle 16"/>
+          <p:cNvPr id="6" name="Oval 5"/>
           <p:cNvSpPr/>
           <p:nvPr/>
         </p:nvSpPr>
         <p:spPr>
           <a:xfrm>
-            <a:off x="8158276" y="2194560"/>
-            <a:ext cx="3393338" cy="548640"/>
-          </a:xfrm>
-          <a:prstGeom prst="rect">
+            <a:off x="804672" y="1536192"/>
+            <a:ext cx="457200" cy="457200"/>
+          </a:xfrm>
+          <a:prstGeom prst="ellipse">
             <a:avLst/>
           </a:prstGeom>
           <a:solidFill>
-            <a:srgbClr val="C8A86B"/>
+            <a:srgbClr val="2E7D6B"/>
           </a:solidFill>
           <a:ln>
             <a:noFill/>
@@ -6572,14 +5538,14 @@
       </p:sp>
       <p:sp>
         <p:nvSpPr>
-          <p:cNvPr id="18" name="TextBox 17"/>
+          <p:cNvPr id="7" name="TextBox 6"/>
           <p:cNvSpPr txBox="1"/>
           <p:nvPr/>
         </p:nvSpPr>
         <p:spPr>
           <a:xfrm>
-            <a:off x="8158276" y="2304288"/>
-            <a:ext cx="3393338" cy="365760"/>
+            <a:off x="804672" y="1591056"/>
+            <a:ext cx="457200" cy="384048"/>
           </a:xfrm>
           <a:prstGeom prst="rect">
             <a:avLst/>
@@ -6594,7 +5560,7 @@
           <a:p>
             <a:pPr algn="ctr"/>
             <a:r>
-              <a:rPr sz="1500" b="1">
+              <a:rPr sz="1600" b="1">
                 <a:solidFill>
                   <a:srgbClr val="FFFFFF"/>
                 </a:solidFill>
@@ -6602,21 +5568,21 @@
                 <a:ea typeface="微软雅黑"/>
                 <a:cs typeface="微软雅黑"/>
               </a:rPr>
-              <a:t>时间跨度（钟扬式）</a:t>
-            </a:r>
-          </a:p>
-        </p:txBody>
-      </p:sp>
-      <p:sp>
-        <p:nvSpPr>
-          <p:cNvPr id="19" name="TextBox 18"/>
+              <a:t>1</a:t>
+            </a:r>
+          </a:p>
+        </p:txBody>
+      </p:sp>
+      <p:sp>
+        <p:nvSpPr>
+          <p:cNvPr id="8" name="TextBox 7"/>
           <p:cNvSpPr txBox="1"/>
           <p:nvPr/>
         </p:nvSpPr>
         <p:spPr>
           <a:xfrm>
-            <a:off x="8432596" y="2971800"/>
-            <a:ext cx="2844698" cy="2011680"/>
+            <a:off x="1371600" y="1481328"/>
+            <a:ext cx="9997135" cy="484632"/>
           </a:xfrm>
           <a:prstGeom prst="rect">
             <a:avLst/>
@@ -6631,33 +5597,123 @@
           <a:p>
             <a:pPr algn="l">
               <a:lnSpc>
-                <a:spcPct val="155000"/>
+                <a:spcPct val="110000"/>
               </a:lnSpc>
             </a:pPr>
             <a:r>
-              <a:rPr sz="1400" b="0">
+              <a:rPr sz="1600" b="1">
                 <a:solidFill>
                   <a:srgbClr val="1C2A33"/>
                 </a:solidFill>
-                <a:latin typeface="楷体"/>
-                <a:ea typeface="楷体"/>
-                <a:cs typeface="楷体"/>
+                <a:latin typeface="微软雅黑"/>
+                <a:ea typeface="微软雅黑"/>
+                <a:cs typeface="微软雅黑"/>
               </a:rPr>
-              <a:t>用多年坚守体现精神：16年西藏采种、4000万颗种子。</a:t>
-            </a:r>
-          </a:p>
-        </p:txBody>
-      </p:sp>
-      <p:sp>
-        <p:nvSpPr>
-          <p:cNvPr id="20" name="TextBox 19"/>
+              <a:t>Step 1 导入</a:t>
+            </a:r>
+          </a:p>
+        </p:txBody>
+      </p:sp>
+      <p:sp>
+        <p:nvSpPr>
+          <p:cNvPr id="9" name="Rounded Rectangle 8"/>
+          <p:cNvSpPr/>
+          <p:nvPr/>
+        </p:nvSpPr>
+        <p:spPr>
+          <a:xfrm>
+            <a:off x="640080" y="2194560"/>
+            <a:ext cx="10911535" cy="685800"/>
+          </a:xfrm>
+          <a:prstGeom prst="roundRect">
+            <a:avLst/>
+          </a:prstGeom>
+          <a:solidFill>
+            <a:srgbClr val="FFFFFF"/>
+          </a:solidFill>
+          <a:ln w="22860">
+            <a:solidFill>
+              <a:srgbClr val="2E7D6B"/>
+            </a:solidFill>
+          </a:ln>
+          <a:effectLst/>
+        </p:spPr>
+        <p:style>
+          <a:lnRef idx="1">
+            <a:schemeClr val="accent1"/>
+          </a:lnRef>
+          <a:fillRef idx="3">
+            <a:schemeClr val="accent1"/>
+          </a:fillRef>
+          <a:effectRef idx="2">
+            <a:schemeClr val="accent1"/>
+          </a:effectRef>
+          <a:fontRef idx="minor">
+            <a:schemeClr val="lt1"/>
+          </a:fontRef>
+        </p:style>
+        <p:txBody>
+          <a:bodyPr rtlCol="0" anchor="ctr"/>
+          <a:lstStyle/>
+          <a:p>
+            <a:pPr algn="ctr"/>
+          </a:p>
+        </p:txBody>
+      </p:sp>
+      <p:sp>
+        <p:nvSpPr>
+          <p:cNvPr id="10" name="Oval 9"/>
+          <p:cNvSpPr/>
+          <p:nvPr/>
+        </p:nvSpPr>
+        <p:spPr>
+          <a:xfrm>
+            <a:off x="804672" y="2359152"/>
+            <a:ext cx="457200" cy="457200"/>
+          </a:xfrm>
+          <a:prstGeom prst="ellipse">
+            <a:avLst/>
+          </a:prstGeom>
+          <a:solidFill>
+            <a:srgbClr val="2E7D6B"/>
+          </a:solidFill>
+          <a:ln>
+            <a:noFill/>
+          </a:ln>
+          <a:effectLst/>
+        </p:spPr>
+        <p:style>
+          <a:lnRef idx="1">
+            <a:schemeClr val="accent1"/>
+          </a:lnRef>
+          <a:fillRef idx="3">
+            <a:schemeClr val="accent1"/>
+          </a:fillRef>
+          <a:effectRef idx="2">
+            <a:schemeClr val="accent1"/>
+          </a:effectRef>
+          <a:fontRef idx="minor">
+            <a:schemeClr val="lt1"/>
+          </a:fontRef>
+        </p:style>
+        <p:txBody>
+          <a:bodyPr rtlCol="0" anchor="ctr"/>
+          <a:lstStyle/>
+          <a:p>
+            <a:pPr algn="ctr"/>
+          </a:p>
+        </p:txBody>
+      </p:sp>
+      <p:sp>
+        <p:nvSpPr>
+          <p:cNvPr id="11" name="TextBox 10"/>
           <p:cNvSpPr txBox="1"/>
           <p:nvPr/>
         </p:nvSpPr>
         <p:spPr>
           <a:xfrm>
-            <a:off x="8432596" y="5074920"/>
-            <a:ext cx="2844698" cy="822960"/>
+            <a:off x="804672" y="2414016"/>
+            <a:ext cx="457200" cy="384048"/>
           </a:xfrm>
           <a:prstGeom prst="rect">
             <a:avLst/>
@@ -6670,49 +5726,737 @@
           </a:bodyPr>
           <a:lstStyle/>
           <a:p>
+            <a:pPr algn="ctr"/>
+            <a:r>
+              <a:rPr sz="1600" b="1">
+                <a:solidFill>
+                  <a:srgbClr val="FFFFFF"/>
+                </a:solidFill>
+                <a:latin typeface="微软雅黑"/>
+                <a:ea typeface="微软雅黑"/>
+                <a:cs typeface="微软雅黑"/>
+              </a:rPr>
+              <a:t>2</a:t>
+            </a:r>
+          </a:p>
+        </p:txBody>
+      </p:sp>
+      <p:sp>
+        <p:nvSpPr>
+          <p:cNvPr id="12" name="TextBox 11"/>
+          <p:cNvSpPr txBox="1"/>
+          <p:nvPr/>
+        </p:nvSpPr>
+        <p:spPr>
+          <a:xfrm>
+            <a:off x="1371600" y="2304288"/>
+            <a:ext cx="9997135" cy="484632"/>
+          </a:xfrm>
+          <a:prstGeom prst="rect">
+            <a:avLst/>
+          </a:prstGeom>
+          <a:noFill/>
+        </p:spPr>
+        <p:txBody>
+          <a:bodyPr wrap="square" anchor="t" lIns="0" rIns="0" tIns="0" bIns="0">
+            <a:spAutoFit/>
+          </a:bodyPr>
+          <a:lstStyle/>
+          <a:p>
             <a:pPr algn="l">
               <a:lnSpc>
-                <a:spcPct val="145000"/>
+                <a:spcPct val="110000"/>
               </a:lnSpc>
-              <a:spcAft>
-                <a:spcPts val="400"/>
-              </a:spcAft>
             </a:pPr>
             <a:r>
-              <a:rPr sz="1300" b="0">
-                <a:solidFill>
-                  <a:srgbClr val="6B6258"/>
-                </a:solidFill>
-                <a:latin typeface="楷体"/>
-                <a:ea typeface="楷体"/>
-                <a:cs typeface="楷体"/>
+              <a:rPr sz="1400" b="1">
+                <a:solidFill>
+                  <a:srgbClr val="1C2A33"/>
+                </a:solidFill>
+                <a:latin typeface="微软雅黑"/>
+                <a:ea typeface="微软雅黑"/>
+                <a:cs typeface="微软雅黑"/>
               </a:rPr>
-              <a:t>适合：长期奉献、用数据震撼的人。</a:t>
-            </a:r>
-          </a:p>
+              <a:t>Step 2 写作三步法讲解</a:t>
+            </a:r>
+          </a:p>
+        </p:txBody>
+      </p:sp>
+      <p:sp>
+        <p:nvSpPr>
+          <p:cNvPr id="13" name="Rounded Rectangle 12"/>
+          <p:cNvSpPr/>
+          <p:nvPr/>
+        </p:nvSpPr>
+        <p:spPr>
+          <a:xfrm>
+            <a:off x="640080" y="3017520"/>
+            <a:ext cx="10911535" cy="685800"/>
+          </a:xfrm>
+          <a:prstGeom prst="roundRect">
+            <a:avLst/>
+          </a:prstGeom>
+          <a:solidFill>
+            <a:srgbClr val="FFFFFF"/>
+          </a:solidFill>
+          <a:ln w="22860">
+            <a:solidFill>
+              <a:srgbClr val="2E7D6B"/>
+            </a:solidFill>
+          </a:ln>
+          <a:effectLst/>
+        </p:spPr>
+        <p:style>
+          <a:lnRef idx="1">
+            <a:schemeClr val="accent1"/>
+          </a:lnRef>
+          <a:fillRef idx="3">
+            <a:schemeClr val="accent1"/>
+          </a:fillRef>
+          <a:effectRef idx="2">
+            <a:schemeClr val="accent1"/>
+          </a:effectRef>
+          <a:fontRef idx="minor">
+            <a:schemeClr val="lt1"/>
+          </a:fontRef>
+        </p:style>
+        <p:txBody>
+          <a:bodyPr rtlCol="0" anchor="ctr"/>
+          <a:lstStyle/>
+          <a:p>
+            <a:pPr algn="ctr"/>
+          </a:p>
+        </p:txBody>
+      </p:sp>
+      <p:sp>
+        <p:nvSpPr>
+          <p:cNvPr id="14" name="Oval 13"/>
+          <p:cNvSpPr/>
+          <p:nvPr/>
+        </p:nvSpPr>
+        <p:spPr>
+          <a:xfrm>
+            <a:off x="804672" y="3182112"/>
+            <a:ext cx="457200" cy="457200"/>
+          </a:xfrm>
+          <a:prstGeom prst="ellipse">
+            <a:avLst/>
+          </a:prstGeom>
+          <a:solidFill>
+            <a:srgbClr val="2E7D6B"/>
+          </a:solidFill>
+          <a:ln>
+            <a:noFill/>
+          </a:ln>
+          <a:effectLst/>
+        </p:spPr>
+        <p:style>
+          <a:lnRef idx="1">
+            <a:schemeClr val="accent1"/>
+          </a:lnRef>
+          <a:fillRef idx="3">
+            <a:schemeClr val="accent1"/>
+          </a:fillRef>
+          <a:effectRef idx="2">
+            <a:schemeClr val="accent1"/>
+          </a:effectRef>
+          <a:fontRef idx="minor">
+            <a:schemeClr val="lt1"/>
+          </a:fontRef>
+        </p:style>
+        <p:txBody>
+          <a:bodyPr rtlCol="0" anchor="ctr"/>
+          <a:lstStyle/>
+          <a:p>
+            <a:pPr algn="ctr"/>
+          </a:p>
+        </p:txBody>
+      </p:sp>
+      <p:sp>
+        <p:nvSpPr>
+          <p:cNvPr id="15" name="TextBox 14"/>
+          <p:cNvSpPr txBox="1"/>
+          <p:nvPr/>
+        </p:nvSpPr>
+        <p:spPr>
+          <a:xfrm>
+            <a:off x="804672" y="3236976"/>
+            <a:ext cx="457200" cy="384048"/>
+          </a:xfrm>
+          <a:prstGeom prst="rect">
+            <a:avLst/>
+          </a:prstGeom>
+          <a:noFill/>
+        </p:spPr>
+        <p:txBody>
+          <a:bodyPr wrap="square" anchor="t" lIns="0" rIns="0" tIns="0" bIns="0">
+            <a:spAutoFit/>
+          </a:bodyPr>
+          <a:lstStyle/>
+          <a:p>
+            <a:pPr algn="ctr"/>
+            <a:r>
+              <a:rPr sz="1600" b="1">
+                <a:solidFill>
+                  <a:srgbClr val="FFFFFF"/>
+                </a:solidFill>
+                <a:latin typeface="微软雅黑"/>
+                <a:ea typeface="微软雅黑"/>
+                <a:cs typeface="微软雅黑"/>
+              </a:rPr>
+              <a:t>3</a:t>
+            </a:r>
+          </a:p>
+        </p:txBody>
+      </p:sp>
+      <p:sp>
+        <p:nvSpPr>
+          <p:cNvPr id="16" name="TextBox 15"/>
+          <p:cNvSpPr txBox="1"/>
+          <p:nvPr/>
+        </p:nvSpPr>
+        <p:spPr>
+          <a:xfrm>
+            <a:off x="1371600" y="3127248"/>
+            <a:ext cx="9997135" cy="484632"/>
+          </a:xfrm>
+          <a:prstGeom prst="rect">
+            <a:avLst/>
+          </a:prstGeom>
+          <a:noFill/>
+        </p:spPr>
+        <p:txBody>
+          <a:bodyPr wrap="square" anchor="t" lIns="0" rIns="0" tIns="0" bIns="0">
+            <a:spAutoFit/>
+          </a:bodyPr>
+          <a:lstStyle/>
           <a:p>
             <a:pPr algn="l">
               <a:lnSpc>
-                <a:spcPct val="140000"/>
+                <a:spcPct val="110000"/>
               </a:lnSpc>
             </a:pPr>
             <a:r>
-              <a:rPr sz="1250" b="1">
-                <a:solidFill>
-                  <a:srgbClr val="C8A86B"/>
-                </a:solidFill>
-                <a:latin typeface="楷体"/>
-                <a:ea typeface="楷体"/>
-                <a:cs typeface="楷体"/>
+              <a:rPr sz="1600" b="1">
+                <a:solidFill>
+                  <a:srgbClr val="1C2A33"/>
+                </a:solidFill>
+                <a:latin typeface="微软雅黑"/>
+                <a:ea typeface="微软雅黑"/>
+                <a:cs typeface="微软雅黑"/>
               </a:rPr>
-              <a:t>典型≠大事：小事能体现精神也是典型。</a:t>
-            </a:r>
-          </a:p>
-        </p:txBody>
-      </p:sp>
-      <p:sp>
-        <p:nvSpPr>
-          <p:cNvPr id="21" name="TextBox 20"/>
+              <a:t>Step 3 选材练习</a:t>
+            </a:r>
+          </a:p>
+        </p:txBody>
+      </p:sp>
+      <p:sp>
+        <p:nvSpPr>
+          <p:cNvPr id="17" name="Rounded Rectangle 16"/>
+          <p:cNvSpPr/>
+          <p:nvPr/>
+        </p:nvSpPr>
+        <p:spPr>
+          <a:xfrm>
+            <a:off x="640080" y="3840480"/>
+            <a:ext cx="10911535" cy="685800"/>
+          </a:xfrm>
+          <a:prstGeom prst="roundRect">
+            <a:avLst/>
+          </a:prstGeom>
+          <a:solidFill>
+            <a:srgbClr val="FFFFFF"/>
+          </a:solidFill>
+          <a:ln w="22860">
+            <a:solidFill>
+              <a:srgbClr val="2E7D6B"/>
+            </a:solidFill>
+          </a:ln>
+          <a:effectLst/>
+        </p:spPr>
+        <p:style>
+          <a:lnRef idx="1">
+            <a:schemeClr val="accent1"/>
+          </a:lnRef>
+          <a:fillRef idx="3">
+            <a:schemeClr val="accent1"/>
+          </a:fillRef>
+          <a:effectRef idx="2">
+            <a:schemeClr val="accent1"/>
+          </a:effectRef>
+          <a:fontRef idx="minor">
+            <a:schemeClr val="lt1"/>
+          </a:fontRef>
+        </p:style>
+        <p:txBody>
+          <a:bodyPr rtlCol="0" anchor="ctr"/>
+          <a:lstStyle/>
+          <a:p>
+            <a:pPr algn="ctr"/>
+          </a:p>
+        </p:txBody>
+      </p:sp>
+      <p:sp>
+        <p:nvSpPr>
+          <p:cNvPr id="18" name="Oval 17"/>
+          <p:cNvSpPr/>
+          <p:nvPr/>
+        </p:nvSpPr>
+        <p:spPr>
+          <a:xfrm>
+            <a:off x="804672" y="4005072"/>
+            <a:ext cx="457200" cy="457200"/>
+          </a:xfrm>
+          <a:prstGeom prst="ellipse">
+            <a:avLst/>
+          </a:prstGeom>
+          <a:solidFill>
+            <a:srgbClr val="2E7D6B"/>
+          </a:solidFill>
+          <a:ln>
+            <a:noFill/>
+          </a:ln>
+          <a:effectLst/>
+        </p:spPr>
+        <p:style>
+          <a:lnRef idx="1">
+            <a:schemeClr val="accent1"/>
+          </a:lnRef>
+          <a:fillRef idx="3">
+            <a:schemeClr val="accent1"/>
+          </a:fillRef>
+          <a:effectRef idx="2">
+            <a:schemeClr val="accent1"/>
+          </a:effectRef>
+          <a:fontRef idx="minor">
+            <a:schemeClr val="lt1"/>
+          </a:fontRef>
+        </p:style>
+        <p:txBody>
+          <a:bodyPr rtlCol="0" anchor="ctr"/>
+          <a:lstStyle/>
+          <a:p>
+            <a:pPr algn="ctr"/>
+          </a:p>
+        </p:txBody>
+      </p:sp>
+      <p:sp>
+        <p:nvSpPr>
+          <p:cNvPr id="19" name="TextBox 18"/>
+          <p:cNvSpPr txBox="1"/>
+          <p:nvPr/>
+        </p:nvSpPr>
+        <p:spPr>
+          <a:xfrm>
+            <a:off x="804672" y="4059936"/>
+            <a:ext cx="457200" cy="384048"/>
+          </a:xfrm>
+          <a:prstGeom prst="rect">
+            <a:avLst/>
+          </a:prstGeom>
+          <a:noFill/>
+        </p:spPr>
+        <p:txBody>
+          <a:bodyPr wrap="square" anchor="t" lIns="0" rIns="0" tIns="0" bIns="0">
+            <a:spAutoFit/>
+          </a:bodyPr>
+          <a:lstStyle/>
+          <a:p>
+            <a:pPr algn="ctr"/>
+            <a:r>
+              <a:rPr sz="1600" b="1">
+                <a:solidFill>
+                  <a:srgbClr val="FFFFFF"/>
+                </a:solidFill>
+                <a:latin typeface="微软雅黑"/>
+                <a:ea typeface="微软雅黑"/>
+                <a:cs typeface="微软雅黑"/>
+              </a:rPr>
+              <a:t>4</a:t>
+            </a:r>
+          </a:p>
+        </p:txBody>
+      </p:sp>
+      <p:sp>
+        <p:nvSpPr>
+          <p:cNvPr id="20" name="TextBox 19"/>
+          <p:cNvSpPr txBox="1"/>
+          <p:nvPr/>
+        </p:nvSpPr>
+        <p:spPr>
+          <a:xfrm>
+            <a:off x="1371600" y="3950208"/>
+            <a:ext cx="9997135" cy="484632"/>
+          </a:xfrm>
+          <a:prstGeom prst="rect">
+            <a:avLst/>
+          </a:prstGeom>
+          <a:noFill/>
+        </p:spPr>
+        <p:txBody>
+          <a:bodyPr wrap="square" anchor="t" lIns="0" rIns="0" tIns="0" bIns="0">
+            <a:spAutoFit/>
+          </a:bodyPr>
+          <a:lstStyle/>
+          <a:p>
+            <a:pPr algn="l">
+              <a:lnSpc>
+                <a:spcPct val="110000"/>
+              </a:lnSpc>
+            </a:pPr>
+            <a:r>
+              <a:rPr sz="1600" b="1">
+                <a:solidFill>
+                  <a:srgbClr val="1C2A33"/>
+                </a:solidFill>
+                <a:latin typeface="微软雅黑"/>
+                <a:ea typeface="微软雅黑"/>
+                <a:cs typeface="微软雅黑"/>
+              </a:rPr>
+              <a:t>Step 4 约束写作</a:t>
+            </a:r>
+          </a:p>
+        </p:txBody>
+      </p:sp>
+      <p:sp>
+        <p:nvSpPr>
+          <p:cNvPr id="21" name="Rounded Rectangle 20"/>
+          <p:cNvSpPr/>
+          <p:nvPr/>
+        </p:nvSpPr>
+        <p:spPr>
+          <a:xfrm>
+            <a:off x="640080" y="4663440"/>
+            <a:ext cx="10911535" cy="685800"/>
+          </a:xfrm>
+          <a:prstGeom prst="roundRect">
+            <a:avLst/>
+          </a:prstGeom>
+          <a:solidFill>
+            <a:srgbClr val="FFFFFF"/>
+          </a:solidFill>
+          <a:ln w="22860">
+            <a:solidFill>
+              <a:srgbClr val="2E7D6B"/>
+            </a:solidFill>
+          </a:ln>
+          <a:effectLst/>
+        </p:spPr>
+        <p:style>
+          <a:lnRef idx="1">
+            <a:schemeClr val="accent1"/>
+          </a:lnRef>
+          <a:fillRef idx="3">
+            <a:schemeClr val="accent1"/>
+          </a:fillRef>
+          <a:effectRef idx="2">
+            <a:schemeClr val="accent1"/>
+          </a:effectRef>
+          <a:fontRef idx="minor">
+            <a:schemeClr val="lt1"/>
+          </a:fontRef>
+        </p:style>
+        <p:txBody>
+          <a:bodyPr rtlCol="0" anchor="ctr"/>
+          <a:lstStyle/>
+          <a:p>
+            <a:pPr algn="ctr"/>
+          </a:p>
+        </p:txBody>
+      </p:sp>
+      <p:sp>
+        <p:nvSpPr>
+          <p:cNvPr id="22" name="Oval 21"/>
+          <p:cNvSpPr/>
+          <p:nvPr/>
+        </p:nvSpPr>
+        <p:spPr>
+          <a:xfrm>
+            <a:off x="804672" y="4828032"/>
+            <a:ext cx="457200" cy="457200"/>
+          </a:xfrm>
+          <a:prstGeom prst="ellipse">
+            <a:avLst/>
+          </a:prstGeom>
+          <a:solidFill>
+            <a:srgbClr val="2E7D6B"/>
+          </a:solidFill>
+          <a:ln>
+            <a:noFill/>
+          </a:ln>
+          <a:effectLst/>
+        </p:spPr>
+        <p:style>
+          <a:lnRef idx="1">
+            <a:schemeClr val="accent1"/>
+          </a:lnRef>
+          <a:fillRef idx="3">
+            <a:schemeClr val="accent1"/>
+          </a:fillRef>
+          <a:effectRef idx="2">
+            <a:schemeClr val="accent1"/>
+          </a:effectRef>
+          <a:fontRef idx="minor">
+            <a:schemeClr val="lt1"/>
+          </a:fontRef>
+        </p:style>
+        <p:txBody>
+          <a:bodyPr rtlCol="0" anchor="ctr"/>
+          <a:lstStyle/>
+          <a:p>
+            <a:pPr algn="ctr"/>
+          </a:p>
+        </p:txBody>
+      </p:sp>
+      <p:sp>
+        <p:nvSpPr>
+          <p:cNvPr id="23" name="TextBox 22"/>
+          <p:cNvSpPr txBox="1"/>
+          <p:nvPr/>
+        </p:nvSpPr>
+        <p:spPr>
+          <a:xfrm>
+            <a:off x="804672" y="4882896"/>
+            <a:ext cx="457200" cy="384048"/>
+          </a:xfrm>
+          <a:prstGeom prst="rect">
+            <a:avLst/>
+          </a:prstGeom>
+          <a:noFill/>
+        </p:spPr>
+        <p:txBody>
+          <a:bodyPr wrap="square" anchor="t" lIns="0" rIns="0" tIns="0" bIns="0">
+            <a:spAutoFit/>
+          </a:bodyPr>
+          <a:lstStyle/>
+          <a:p>
+            <a:pPr algn="ctr"/>
+            <a:r>
+              <a:rPr sz="1600" b="1">
+                <a:solidFill>
+                  <a:srgbClr val="FFFFFF"/>
+                </a:solidFill>
+                <a:latin typeface="微软雅黑"/>
+                <a:ea typeface="微软雅黑"/>
+                <a:cs typeface="微软雅黑"/>
+              </a:rPr>
+              <a:t>5</a:t>
+            </a:r>
+          </a:p>
+        </p:txBody>
+      </p:sp>
+      <p:sp>
+        <p:nvSpPr>
+          <p:cNvPr id="24" name="TextBox 23"/>
+          <p:cNvSpPr txBox="1"/>
+          <p:nvPr/>
+        </p:nvSpPr>
+        <p:spPr>
+          <a:xfrm>
+            <a:off x="1371600" y="4773168"/>
+            <a:ext cx="9997135" cy="484632"/>
+          </a:xfrm>
+          <a:prstGeom prst="rect">
+            <a:avLst/>
+          </a:prstGeom>
+          <a:noFill/>
+        </p:spPr>
+        <p:txBody>
+          <a:bodyPr wrap="square" anchor="t" lIns="0" rIns="0" tIns="0" bIns="0">
+            <a:spAutoFit/>
+          </a:bodyPr>
+          <a:lstStyle/>
+          <a:p>
+            <a:pPr algn="l">
+              <a:lnSpc>
+                <a:spcPct val="110000"/>
+              </a:lnSpc>
+            </a:pPr>
+            <a:r>
+              <a:rPr sz="1600" b="1">
+                <a:solidFill>
+                  <a:srgbClr val="1C2A33"/>
+                </a:solidFill>
+                <a:latin typeface="微软雅黑"/>
+                <a:ea typeface="微软雅黑"/>
+                <a:cs typeface="微软雅黑"/>
+              </a:rPr>
+              <a:t>Step 5 小组互评</a:t>
+            </a:r>
+          </a:p>
+        </p:txBody>
+      </p:sp>
+      <p:sp>
+        <p:nvSpPr>
+          <p:cNvPr id="25" name="Rounded Rectangle 24"/>
+          <p:cNvSpPr/>
+          <p:nvPr/>
+        </p:nvSpPr>
+        <p:spPr>
+          <a:xfrm>
+            <a:off x="640080" y="5486400"/>
+            <a:ext cx="10911535" cy="685800"/>
+          </a:xfrm>
+          <a:prstGeom prst="roundRect">
+            <a:avLst/>
+          </a:prstGeom>
+          <a:solidFill>
+            <a:srgbClr val="FFFFFF"/>
+          </a:solidFill>
+          <a:ln w="22860">
+            <a:solidFill>
+              <a:srgbClr val="2E7D6B"/>
+            </a:solidFill>
+          </a:ln>
+          <a:effectLst/>
+        </p:spPr>
+        <p:style>
+          <a:lnRef idx="1">
+            <a:schemeClr val="accent1"/>
+          </a:lnRef>
+          <a:fillRef idx="3">
+            <a:schemeClr val="accent1"/>
+          </a:fillRef>
+          <a:effectRef idx="2">
+            <a:schemeClr val="accent1"/>
+          </a:effectRef>
+          <a:fontRef idx="minor">
+            <a:schemeClr val="lt1"/>
+          </a:fontRef>
+        </p:style>
+        <p:txBody>
+          <a:bodyPr rtlCol="0" anchor="ctr"/>
+          <a:lstStyle/>
+          <a:p>
+            <a:pPr algn="ctr"/>
+          </a:p>
+        </p:txBody>
+      </p:sp>
+      <p:sp>
+        <p:nvSpPr>
+          <p:cNvPr id="26" name="Oval 25"/>
+          <p:cNvSpPr/>
+          <p:nvPr/>
+        </p:nvSpPr>
+        <p:spPr>
+          <a:xfrm>
+            <a:off x="804672" y="5650992"/>
+            <a:ext cx="457200" cy="457200"/>
+          </a:xfrm>
+          <a:prstGeom prst="ellipse">
+            <a:avLst/>
+          </a:prstGeom>
+          <a:solidFill>
+            <a:srgbClr val="2E7D6B"/>
+          </a:solidFill>
+          <a:ln>
+            <a:noFill/>
+          </a:ln>
+          <a:effectLst/>
+        </p:spPr>
+        <p:style>
+          <a:lnRef idx="1">
+            <a:schemeClr val="accent1"/>
+          </a:lnRef>
+          <a:fillRef idx="3">
+            <a:schemeClr val="accent1"/>
+          </a:fillRef>
+          <a:effectRef idx="2">
+            <a:schemeClr val="accent1"/>
+          </a:effectRef>
+          <a:fontRef idx="minor">
+            <a:schemeClr val="lt1"/>
+          </a:fontRef>
+        </p:style>
+        <p:txBody>
+          <a:bodyPr rtlCol="0" anchor="ctr"/>
+          <a:lstStyle/>
+          <a:p>
+            <a:pPr algn="ctr"/>
+          </a:p>
+        </p:txBody>
+      </p:sp>
+      <p:sp>
+        <p:nvSpPr>
+          <p:cNvPr id="27" name="TextBox 26"/>
+          <p:cNvSpPr txBox="1"/>
+          <p:nvPr/>
+        </p:nvSpPr>
+        <p:spPr>
+          <a:xfrm>
+            <a:off x="804672" y="5705856"/>
+            <a:ext cx="457200" cy="384048"/>
+          </a:xfrm>
+          <a:prstGeom prst="rect">
+            <a:avLst/>
+          </a:prstGeom>
+          <a:noFill/>
+        </p:spPr>
+        <p:txBody>
+          <a:bodyPr wrap="square" anchor="t" lIns="0" rIns="0" tIns="0" bIns="0">
+            <a:spAutoFit/>
+          </a:bodyPr>
+          <a:lstStyle/>
+          <a:p>
+            <a:pPr algn="ctr"/>
+            <a:r>
+              <a:rPr sz="1600" b="1">
+                <a:solidFill>
+                  <a:srgbClr val="FFFFFF"/>
+                </a:solidFill>
+                <a:latin typeface="微软雅黑"/>
+                <a:ea typeface="微软雅黑"/>
+                <a:cs typeface="微软雅黑"/>
+              </a:rPr>
+              <a:t>6</a:t>
+            </a:r>
+          </a:p>
+        </p:txBody>
+      </p:sp>
+      <p:sp>
+        <p:nvSpPr>
+          <p:cNvPr id="28" name="TextBox 27"/>
+          <p:cNvSpPr txBox="1"/>
+          <p:nvPr/>
+        </p:nvSpPr>
+        <p:spPr>
+          <a:xfrm>
+            <a:off x="1371600" y="5596128"/>
+            <a:ext cx="9997135" cy="484632"/>
+          </a:xfrm>
+          <a:prstGeom prst="rect">
+            <a:avLst/>
+          </a:prstGeom>
+          <a:noFill/>
+        </p:spPr>
+        <p:txBody>
+          <a:bodyPr wrap="square" anchor="t" lIns="0" rIns="0" tIns="0" bIns="0">
+            <a:spAutoFit/>
+          </a:bodyPr>
+          <a:lstStyle/>
+          <a:p>
+            <a:pPr algn="l">
+              <a:lnSpc>
+                <a:spcPct val="110000"/>
+              </a:lnSpc>
+            </a:pPr>
+            <a:r>
+              <a:rPr sz="1600" b="1">
+                <a:solidFill>
+                  <a:srgbClr val="1C2A33"/>
+                </a:solidFill>
+                <a:latin typeface="微软雅黑"/>
+                <a:ea typeface="微软雅黑"/>
+                <a:cs typeface="微软雅黑"/>
+              </a:rPr>
+              <a:t>Step 6 小结+作业</a:t>
+            </a:r>
+          </a:p>
+        </p:txBody>
+      </p:sp>
+      <p:sp>
+        <p:nvSpPr>
+          <p:cNvPr id="29" name="TextBox 28"/>
           <p:cNvSpPr txBox="1"/>
           <p:nvPr/>
         </p:nvSpPr>
@@ -6845,7 +6589,7 @@
                 <a:ea typeface="微软雅黑"/>
                 <a:cs typeface="微软雅黑"/>
               </a:rPr>
-              <a:t>难点 · 怎么破</a:t>
+              <a:t>易混易错</a:t>
             </a:r>
           </a:p>
         </p:txBody>
@@ -6896,51 +6640,14 @@
       </p:sp>
       <p:sp>
         <p:nvSpPr>
-          <p:cNvPr id="5" name="TextBox 4"/>
-          <p:cNvSpPr txBox="1"/>
-          <p:nvPr/>
-        </p:nvSpPr>
-        <p:spPr>
-          <a:xfrm>
-            <a:off x="640080" y="1325880"/>
-            <a:ext cx="10058400" cy="548640"/>
-          </a:xfrm>
-          <a:prstGeom prst="rect">
-            <a:avLst/>
-          </a:prstGeom>
-          <a:noFill/>
-        </p:spPr>
-        <p:txBody>
-          <a:bodyPr wrap="square" anchor="t" lIns="0" rIns="0" tIns="0" bIns="0">
-            <a:spAutoFit/>
-          </a:bodyPr>
-          <a:lstStyle/>
-          <a:p>
-            <a:pPr algn="l"/>
-            <a:r>
-              <a:rPr sz="2600" b="1">
-                <a:solidFill>
-                  <a:srgbClr val="1C2A33"/>
-                </a:solidFill>
-                <a:latin typeface="楷体"/>
-                <a:ea typeface="楷体"/>
-                <a:cs typeface="楷体"/>
-              </a:rPr>
-              <a:t>三个易卡住的地方</a:t>
-            </a:r>
-          </a:p>
-        </p:txBody>
-      </p:sp>
-      <p:sp>
-        <p:nvSpPr>
-          <p:cNvPr id="6" name="Rounded Rectangle 5"/>
+          <p:cNvPr id="5" name="Rounded Rectangle 4"/>
           <p:cNvSpPr/>
           <p:nvPr/>
         </p:nvSpPr>
         <p:spPr>
           <a:xfrm>
-            <a:off x="640080" y="2194560"/>
-            <a:ext cx="3393338" cy="3840480"/>
+            <a:off x="640080" y="1417320"/>
+            <a:ext cx="5349240" cy="2057400"/>
           </a:xfrm>
           <a:prstGeom prst="roundRect">
             <a:avLst/>
@@ -6948,7 +6655,7 @@
           <a:solidFill>
             <a:srgbClr val="FFFFFF"/>
           </a:solidFill>
-          <a:ln w="20320">
+          <a:ln w="22860">
             <a:solidFill>
               <a:srgbClr val="B23A2A"/>
             </a:solidFill>
@@ -6979,14 +6686,14 @@
       </p:sp>
       <p:sp>
         <p:nvSpPr>
-          <p:cNvPr id="7" name="Oval 6"/>
+          <p:cNvPr id="6" name="Oval 5"/>
           <p:cNvSpPr/>
           <p:nvPr/>
         </p:nvSpPr>
         <p:spPr>
           <a:xfrm>
-            <a:off x="868680" y="2423160"/>
-            <a:ext cx="548640" cy="548640"/>
+            <a:off x="804672" y="1581912"/>
+            <a:ext cx="457200" cy="457200"/>
           </a:xfrm>
           <a:prstGeom prst="ellipse">
             <a:avLst/>
@@ -7023,14 +6730,14 @@
       </p:sp>
       <p:sp>
         <p:nvSpPr>
-          <p:cNvPr id="8" name="TextBox 7"/>
+          <p:cNvPr id="7" name="TextBox 6"/>
           <p:cNvSpPr txBox="1"/>
           <p:nvPr/>
         </p:nvSpPr>
         <p:spPr>
           <a:xfrm>
-            <a:off x="868680" y="2496312"/>
-            <a:ext cx="548640" cy="411480"/>
+            <a:off x="804672" y="1636776"/>
+            <a:ext cx="457200" cy="384048"/>
           </a:xfrm>
           <a:prstGeom prst="rect">
             <a:avLst/>
@@ -7045,7 +6752,7 @@
           <a:p>
             <a:pPr algn="ctr"/>
             <a:r>
-              <a:rPr sz="2000" b="1">
+              <a:rPr sz="1600" b="1">
                 <a:solidFill>
                   <a:srgbClr val="FFFFFF"/>
                 </a:solidFill>
@@ -7053,21 +6760,21 @@
                 <a:ea typeface="微软雅黑"/>
                 <a:cs typeface="微软雅黑"/>
               </a:rPr>
-              <a:t>1</a:t>
-            </a:r>
-          </a:p>
-        </p:txBody>
-      </p:sp>
-      <p:sp>
-        <p:nvSpPr>
-          <p:cNvPr id="9" name="TextBox 8"/>
+              <a:t>!</a:t>
+            </a:r>
+          </a:p>
+        </p:txBody>
+      </p:sp>
+      <p:sp>
+        <p:nvSpPr>
+          <p:cNvPr id="8" name="TextBox 7"/>
           <p:cNvSpPr txBox="1"/>
           <p:nvPr/>
         </p:nvSpPr>
         <p:spPr>
           <a:xfrm>
-            <a:off x="1554480" y="2450592"/>
-            <a:ext cx="2296058" cy="731520"/>
+            <a:off x="1371600" y="1527048"/>
+            <a:ext cx="4434840" cy="457200"/>
           </a:xfrm>
           <a:prstGeom prst="rect">
             <a:avLst/>
@@ -7082,11 +6789,52 @@
           <a:p>
             <a:pPr algn="l">
               <a:lnSpc>
-                <a:spcPct val="130000"/>
+                <a:spcPct val="110000"/>
               </a:lnSpc>
             </a:pPr>
             <a:r>
-              <a:rPr sz="1650" b="1">
+              <a:rPr sz="1600" b="1">
+                <a:solidFill>
+                  <a:srgbClr val="1C2A33"/>
+                </a:solidFill>
+                <a:latin typeface="微软雅黑"/>
+                <a:ea typeface="微软雅黑"/>
+                <a:cs typeface="微软雅黑"/>
+              </a:rPr>
+              <a:t/>
+            </a:r>
+          </a:p>
+        </p:txBody>
+      </p:sp>
+      <p:sp>
+        <p:nvSpPr>
+          <p:cNvPr id="9" name="TextBox 8"/>
+          <p:cNvSpPr txBox="1"/>
+          <p:nvPr/>
+        </p:nvSpPr>
+        <p:spPr>
+          <a:xfrm>
+            <a:off x="1371600" y="1965960"/>
+            <a:ext cx="4434840" cy="1417320"/>
+          </a:xfrm>
+          <a:prstGeom prst="rect">
+            <a:avLst/>
+          </a:prstGeom>
+          <a:noFill/>
+        </p:spPr>
+        <p:txBody>
+          <a:bodyPr wrap="square" anchor="t" lIns="0" rIns="0" tIns="0" bIns="0">
+            <a:spAutoFit/>
+          </a:bodyPr>
+          <a:lstStyle/>
+          <a:p>
+            <a:pPr algn="l">
+              <a:lnSpc>
+                <a:spcPct val="128000"/>
+              </a:lnSpc>
+            </a:pPr>
+            <a:r>
+              <a:rPr sz="1100" b="0">
                 <a:solidFill>
                   <a:srgbClr val="1C2A33"/>
                 </a:solidFill>
@@ -7094,62 +6842,21 @@
                 <a:ea typeface="楷体"/>
                 <a:cs typeface="楷体"/>
               </a:rPr>
-              <a:t>表扬稿 → 通讯</a:t>
-            </a:r>
-          </a:p>
-        </p:txBody>
-      </p:sp>
-      <p:sp>
-        <p:nvSpPr>
-          <p:cNvPr id="10" name="TextBox 9"/>
-          <p:cNvSpPr txBox="1"/>
-          <p:nvPr/>
-        </p:nvSpPr>
-        <p:spPr>
-          <a:xfrm>
-            <a:off x="914400" y="3246120"/>
-            <a:ext cx="2844698" cy="2651760"/>
-          </a:xfrm>
-          <a:prstGeom prst="rect">
-            <a:avLst/>
-          </a:prstGeom>
-          <a:noFill/>
-        </p:spPr>
-        <p:txBody>
-          <a:bodyPr wrap="square" anchor="t" lIns="0" rIns="0" tIns="0" bIns="0">
-            <a:spAutoFit/>
-          </a:bodyPr>
-          <a:lstStyle/>
-          <a:p>
-            <a:pPr algn="l">
-              <a:lnSpc>
-                <a:spcPct val="150000"/>
-              </a:lnSpc>
-            </a:pPr>
-            <a:r>
-              <a:rPr sz="1400" b="0">
-                <a:solidFill>
-                  <a:srgbClr val="1C2A33"/>
-                </a:solidFill>
-                <a:latin typeface="楷体"/>
-                <a:ea typeface="楷体"/>
-                <a:cs typeface="楷体"/>
-              </a:rPr>
-              <a:t>习惯写"他是个好人，因为……"。→ 改"以事写人"：不说好，让事件自己说明好。</a:t>
-            </a:r>
-          </a:p>
-        </p:txBody>
-      </p:sp>
-      <p:sp>
-        <p:nvSpPr>
-          <p:cNvPr id="11" name="Rounded Rectangle 10"/>
+              <a:t>① 从「表扬稿」到「通讯」的转换。原因：学生习惯写「他是一个好人，因为……」，需引导「以事写人」——不说「好」而让事件自己说明「好」。</a:t>
+            </a:r>
+          </a:p>
+        </p:txBody>
+      </p:sp>
+      <p:sp>
+        <p:nvSpPr>
+          <p:cNvPr id="10" name="Rounded Rectangle 9"/>
           <p:cNvSpPr/>
           <p:nvPr/>
         </p:nvSpPr>
         <p:spPr>
           <a:xfrm>
-            <a:off x="4399178" y="2194560"/>
-            <a:ext cx="3393338" cy="3840480"/>
+            <a:off x="6263640" y="1417320"/>
+            <a:ext cx="5349240" cy="2057400"/>
           </a:xfrm>
           <a:prstGeom prst="roundRect">
             <a:avLst/>
@@ -7157,9 +6864,9 @@
           <a:solidFill>
             <a:srgbClr val="FFFFFF"/>
           </a:solidFill>
-          <a:ln w="20320">
+          <a:ln w="22860">
             <a:solidFill>
-              <a:srgbClr val="2E7D6B"/>
+              <a:srgbClr val="B23A2A"/>
             </a:solidFill>
           </a:ln>
           <a:effectLst/>
@@ -7188,20 +6895,20 @@
       </p:sp>
       <p:sp>
         <p:nvSpPr>
-          <p:cNvPr id="12" name="Oval 11"/>
+          <p:cNvPr id="11" name="Oval 10"/>
           <p:cNvSpPr/>
           <p:nvPr/>
         </p:nvSpPr>
         <p:spPr>
           <a:xfrm>
-            <a:off x="4627778" y="2423160"/>
-            <a:ext cx="548640" cy="548640"/>
+            <a:off x="6428232" y="1581912"/>
+            <a:ext cx="457200" cy="457200"/>
           </a:xfrm>
           <a:prstGeom prst="ellipse">
             <a:avLst/>
           </a:prstGeom>
           <a:solidFill>
-            <a:srgbClr val="2E7D6B"/>
+            <a:srgbClr val="B23A2A"/>
           </a:solidFill>
           <a:ln>
             <a:noFill/>
@@ -7232,14 +6939,14 @@
       </p:sp>
       <p:sp>
         <p:nvSpPr>
-          <p:cNvPr id="13" name="TextBox 12"/>
+          <p:cNvPr id="12" name="TextBox 11"/>
           <p:cNvSpPr txBox="1"/>
           <p:nvPr/>
         </p:nvSpPr>
         <p:spPr>
           <a:xfrm>
-            <a:off x="4627778" y="2496312"/>
-            <a:ext cx="548640" cy="411480"/>
+            <a:off x="6428232" y="1636776"/>
+            <a:ext cx="457200" cy="384048"/>
           </a:xfrm>
           <a:prstGeom prst="rect">
             <a:avLst/>
@@ -7254,7 +6961,7 @@
           <a:p>
             <a:pPr algn="ctr"/>
             <a:r>
-              <a:rPr sz="2000" b="1">
+              <a:rPr sz="1600" b="1">
                 <a:solidFill>
                   <a:srgbClr val="FFFFFF"/>
                 </a:solidFill>
@@ -7262,21 +6969,21 @@
                 <a:ea typeface="微软雅黑"/>
                 <a:cs typeface="微软雅黑"/>
               </a:rPr>
-              <a:t>2</a:t>
-            </a:r>
-          </a:p>
-        </p:txBody>
-      </p:sp>
-      <p:sp>
-        <p:nvSpPr>
-          <p:cNvPr id="14" name="TextBox 13"/>
+              <a:t>!</a:t>
+            </a:r>
+          </a:p>
+        </p:txBody>
+      </p:sp>
+      <p:sp>
+        <p:nvSpPr>
+          <p:cNvPr id="13" name="TextBox 12"/>
           <p:cNvSpPr txBox="1"/>
           <p:nvPr/>
         </p:nvSpPr>
         <p:spPr>
           <a:xfrm>
-            <a:off x="5313578" y="2450592"/>
-            <a:ext cx="2296058" cy="731520"/>
+            <a:off x="6995160" y="1527048"/>
+            <a:ext cx="4434840" cy="457200"/>
           </a:xfrm>
           <a:prstGeom prst="rect">
             <a:avLst/>
@@ -7291,11 +6998,52 @@
           <a:p>
             <a:pPr algn="l">
               <a:lnSpc>
-                <a:spcPct val="130000"/>
+                <a:spcPct val="110000"/>
               </a:lnSpc>
             </a:pPr>
             <a:r>
-              <a:rPr sz="1650" b="1">
+              <a:rPr sz="1600" b="1">
+                <a:solidFill>
+                  <a:srgbClr val="1C2A33"/>
+                </a:solidFill>
+                <a:latin typeface="微软雅黑"/>
+                <a:ea typeface="微软雅黑"/>
+                <a:cs typeface="微软雅黑"/>
+              </a:rPr>
+              <a:t/>
+            </a:r>
+          </a:p>
+        </p:txBody>
+      </p:sp>
+      <p:sp>
+        <p:nvSpPr>
+          <p:cNvPr id="14" name="TextBox 13"/>
+          <p:cNvSpPr txBox="1"/>
+          <p:nvPr/>
+        </p:nvSpPr>
+        <p:spPr>
+          <a:xfrm>
+            <a:off x="6995160" y="1965960"/>
+            <a:ext cx="4434840" cy="1417320"/>
+          </a:xfrm>
+          <a:prstGeom prst="rect">
+            <a:avLst/>
+          </a:prstGeom>
+          <a:noFill/>
+        </p:spPr>
+        <p:txBody>
+          <a:bodyPr wrap="square" anchor="t" lIns="0" rIns="0" tIns="0" bIns="0">
+            <a:spAutoFit/>
+          </a:bodyPr>
+          <a:lstStyle/>
+          <a:p>
+            <a:pPr algn="l">
+              <a:lnSpc>
+                <a:spcPct val="128000"/>
+              </a:lnSpc>
+            </a:pPr>
+            <a:r>
+              <a:rPr sz="1200" b="0">
                 <a:solidFill>
                   <a:srgbClr val="1C2A33"/>
                 </a:solidFill>
@@ -7303,62 +7051,21 @@
                 <a:ea typeface="楷体"/>
                 <a:cs typeface="楷体"/>
               </a:rPr>
-              <a:t>典型事件难选</a:t>
-            </a:r>
-          </a:p>
-        </p:txBody>
-      </p:sp>
-      <p:sp>
-        <p:nvSpPr>
-          <p:cNvPr id="15" name="TextBox 14"/>
-          <p:cNvSpPr txBox="1"/>
-          <p:nvPr/>
-        </p:nvSpPr>
-        <p:spPr>
-          <a:xfrm>
-            <a:off x="4673498" y="3246120"/>
-            <a:ext cx="2844698" cy="2651760"/>
-          </a:xfrm>
-          <a:prstGeom prst="rect">
-            <a:avLst/>
-          </a:prstGeom>
-          <a:noFill/>
-        </p:spPr>
-        <p:txBody>
-          <a:bodyPr wrap="square" anchor="t" lIns="0" rIns="0" tIns="0" bIns="0">
-            <a:spAutoFit/>
-          </a:bodyPr>
-          <a:lstStyle/>
-          <a:p>
-            <a:pPr algn="l">
-              <a:lnSpc>
-                <a:spcPct val="150000"/>
-              </a:lnSpc>
-            </a:pPr>
-            <a:r>
-              <a:rPr sz="1400" b="0">
-                <a:solidFill>
-                  <a:srgbClr val="1C2A33"/>
-                </a:solidFill>
-                <a:latin typeface="楷体"/>
-                <a:ea typeface="楷体"/>
-                <a:cs typeface="楷体"/>
-              </a:rPr>
-              <a:t>分不清"日常事件"和"典型事件"。→ 用检测尺：删掉它，人物形象变不变？</a:t>
-            </a:r>
-          </a:p>
-        </p:txBody>
-      </p:sp>
-      <p:sp>
-        <p:nvSpPr>
-          <p:cNvPr id="16" name="Rounded Rectangle 15"/>
+              <a:t>② 典型事件的选取。原因：学生分不清「日常事件」和「典型事件」，需用「删掉这件事人物形象会不会变」来检测。</a:t>
+            </a:r>
+          </a:p>
+        </p:txBody>
+      </p:sp>
+      <p:sp>
+        <p:nvSpPr>
+          <p:cNvPr id="15" name="Rounded Rectangle 14"/>
           <p:cNvSpPr/>
           <p:nvPr/>
         </p:nvSpPr>
         <p:spPr>
           <a:xfrm>
-            <a:off x="8158276" y="2194560"/>
-            <a:ext cx="3393338" cy="3840480"/>
+            <a:off x="640080" y="3703320"/>
+            <a:ext cx="5349240" cy="2057400"/>
           </a:xfrm>
           <a:prstGeom prst="roundRect">
             <a:avLst/>
@@ -7366,9 +7073,9 @@
           <a:solidFill>
             <a:srgbClr val="FFFFFF"/>
           </a:solidFill>
-          <a:ln w="20320">
+          <a:ln w="22860">
             <a:solidFill>
-              <a:srgbClr val="C8A86B"/>
+              <a:srgbClr val="B23A2A"/>
             </a:solidFill>
           </a:ln>
           <a:effectLst/>
@@ -7397,20 +7104,20 @@
       </p:sp>
       <p:sp>
         <p:nvSpPr>
-          <p:cNvPr id="17" name="Oval 16"/>
+          <p:cNvPr id="16" name="Oval 15"/>
           <p:cNvSpPr/>
           <p:nvPr/>
         </p:nvSpPr>
         <p:spPr>
           <a:xfrm>
-            <a:off x="8386876" y="2423160"/>
-            <a:ext cx="548640" cy="548640"/>
+            <a:off x="804672" y="3867912"/>
+            <a:ext cx="457200" cy="457200"/>
           </a:xfrm>
           <a:prstGeom prst="ellipse">
             <a:avLst/>
           </a:prstGeom>
           <a:solidFill>
-            <a:srgbClr val="C8A86B"/>
+            <a:srgbClr val="B23A2A"/>
           </a:solidFill>
           <a:ln>
             <a:noFill/>
@@ -7441,14 +7148,14 @@
       </p:sp>
       <p:sp>
         <p:nvSpPr>
-          <p:cNvPr id="18" name="TextBox 17"/>
+          <p:cNvPr id="17" name="TextBox 16"/>
           <p:cNvSpPr txBox="1"/>
           <p:nvPr/>
         </p:nvSpPr>
         <p:spPr>
           <a:xfrm>
-            <a:off x="8386876" y="2496312"/>
-            <a:ext cx="548640" cy="411480"/>
+            <a:off x="804672" y="3922776"/>
+            <a:ext cx="457200" cy="384048"/>
           </a:xfrm>
           <a:prstGeom prst="rect">
             <a:avLst/>
@@ -7463,7 +7170,7 @@
           <a:p>
             <a:pPr algn="ctr"/>
             <a:r>
-              <a:rPr sz="2000" b="1">
+              <a:rPr sz="1600" b="1">
                 <a:solidFill>
                   <a:srgbClr val="FFFFFF"/>
                 </a:solidFill>
@@ -7471,21 +7178,21 @@
                 <a:ea typeface="微软雅黑"/>
                 <a:cs typeface="微软雅黑"/>
               </a:rPr>
-              <a:t>3</a:t>
-            </a:r>
-          </a:p>
-        </p:txBody>
-      </p:sp>
-      <p:sp>
-        <p:nvSpPr>
-          <p:cNvPr id="19" name="TextBox 18"/>
+              <a:t>!</a:t>
+            </a:r>
+          </a:p>
+        </p:txBody>
+      </p:sp>
+      <p:sp>
+        <p:nvSpPr>
+          <p:cNvPr id="18" name="TextBox 17"/>
           <p:cNvSpPr txBox="1"/>
           <p:nvPr/>
         </p:nvSpPr>
         <p:spPr>
           <a:xfrm>
-            <a:off x="9072676" y="2450592"/>
-            <a:ext cx="2296058" cy="731520"/>
+            <a:off x="1371600" y="3813048"/>
+            <a:ext cx="4434840" cy="457200"/>
           </a:xfrm>
           <a:prstGeom prst="rect">
             <a:avLst/>
@@ -7500,11 +7207,52 @@
           <a:p>
             <a:pPr algn="l">
               <a:lnSpc>
-                <a:spcPct val="130000"/>
+                <a:spcPct val="110000"/>
               </a:lnSpc>
             </a:pPr>
             <a:r>
-              <a:rPr sz="1650" b="1">
+              <a:rPr sz="1600" b="1">
+                <a:solidFill>
+                  <a:srgbClr val="1C2A33"/>
+                </a:solidFill>
+                <a:latin typeface="微软雅黑"/>
+                <a:ea typeface="微软雅黑"/>
+                <a:cs typeface="微软雅黑"/>
+              </a:rPr>
+              <a:t/>
+            </a:r>
+          </a:p>
+        </p:txBody>
+      </p:sp>
+      <p:sp>
+        <p:nvSpPr>
+          <p:cNvPr id="19" name="TextBox 18"/>
+          <p:cNvSpPr txBox="1"/>
+          <p:nvPr/>
+        </p:nvSpPr>
+        <p:spPr>
+          <a:xfrm>
+            <a:off x="1371600" y="4251960"/>
+            <a:ext cx="4434840" cy="1417320"/>
+          </a:xfrm>
+          <a:prstGeom prst="rect">
+            <a:avLst/>
+          </a:prstGeom>
+          <a:noFill/>
+        </p:spPr>
+        <p:txBody>
+          <a:bodyPr wrap="square" anchor="t" lIns="0" rIns="0" tIns="0" bIns="0">
+            <a:spAutoFit/>
+          </a:bodyPr>
+          <a:lstStyle/>
+          <a:p>
+            <a:pPr algn="l">
+              <a:lnSpc>
+                <a:spcPct val="128000"/>
+              </a:lnSpc>
+            </a:pPr>
+            <a:r>
+              <a:rPr sz="1200" b="0">
                 <a:solidFill>
                   <a:srgbClr val="1C2A33"/>
                 </a:solidFill>
@@ -7512,7 +7260,7 @@
                 <a:ea typeface="楷体"/>
                 <a:cs typeface="楷体"/>
               </a:rPr>
-              <a:t>真实性守不住</a:t>
+              <a:t>③ 真实性的坚守。原因：学生写不出细节时倾向「编一个」，需强调通讯不可虚构，可以补充采访。</a:t>
             </a:r>
           </a:p>
         </p:txBody>
@@ -7520,47 +7268,6 @@
       <p:sp>
         <p:nvSpPr>
           <p:cNvPr id="20" name="TextBox 19"/>
-          <p:cNvSpPr txBox="1"/>
-          <p:nvPr/>
-        </p:nvSpPr>
-        <p:spPr>
-          <a:xfrm>
-            <a:off x="8432596" y="3246120"/>
-            <a:ext cx="2844698" cy="2651760"/>
-          </a:xfrm>
-          <a:prstGeom prst="rect">
-            <a:avLst/>
-          </a:prstGeom>
-          <a:noFill/>
-        </p:spPr>
-        <p:txBody>
-          <a:bodyPr wrap="square" anchor="t" lIns="0" rIns="0" tIns="0" bIns="0">
-            <a:spAutoFit/>
-          </a:bodyPr>
-          <a:lstStyle/>
-          <a:p>
-            <a:pPr algn="l">
-              <a:lnSpc>
-                <a:spcPct val="150000"/>
-              </a:lnSpc>
-            </a:pPr>
-            <a:r>
-              <a:rPr sz="1400" b="0">
-                <a:solidFill>
-                  <a:srgbClr val="1C2A33"/>
-                </a:solidFill>
-                <a:latin typeface="楷体"/>
-                <a:ea typeface="楷体"/>
-                <a:cs typeface="楷体"/>
-              </a:rPr>
-              <a:t>写不出细节就"编一个"。→ 通讯不可虚构；缺细节就回去补采访，不靠想象。</a:t>
-            </a:r>
-          </a:p>
-        </p:txBody>
-      </p:sp>
-      <p:sp>
-        <p:nvSpPr>
-          <p:cNvPr id="21" name="TextBox 20"/>
           <p:cNvSpPr txBox="1"/>
           <p:nvPr/>
         </p:nvSpPr>
@@ -7687,13 +7394,13 @@
             <a:r>
               <a:rPr sz="1300" b="1">
                 <a:solidFill>
-                  <a:srgbClr val="B23A2A"/>
+                  <a:srgbClr val="C8A86B"/>
                 </a:solidFill>
                 <a:latin typeface="微软雅黑"/>
                 <a:ea typeface="微软雅黑"/>
                 <a:cs typeface="微软雅黑"/>
               </a:rPr>
-              <a:t>探究 · 招牌招式</a:t>
+              <a:t>要点板书</a:t>
             </a:r>
           </a:p>
         </p:txBody>
@@ -7713,7 +7420,7 @@
             <a:avLst/>
           </a:prstGeom>
           <a:solidFill>
-            <a:srgbClr val="B23A2A"/>
+            <a:srgbClr val="C8A86B"/>
           </a:solidFill>
           <a:ln>
             <a:noFill/>
@@ -7744,51 +7451,14 @@
       </p:sp>
       <p:sp>
         <p:nvSpPr>
-          <p:cNvPr id="5" name="TextBox 4"/>
-          <p:cNvSpPr txBox="1"/>
-          <p:nvPr/>
-        </p:nvSpPr>
-        <p:spPr>
-          <a:xfrm>
-            <a:off x="640080" y="1280160"/>
-            <a:ext cx="10515600" cy="640080"/>
-          </a:xfrm>
-          <a:prstGeom prst="rect">
-            <a:avLst/>
-          </a:prstGeom>
-          <a:noFill/>
-        </p:spPr>
-        <p:txBody>
-          <a:bodyPr wrap="square" anchor="t" lIns="0" rIns="0" tIns="0" bIns="0">
-            <a:spAutoFit/>
-          </a:bodyPr>
-          <a:lstStyle/>
-          <a:p>
-            <a:pPr algn="l"/>
-            <a:r>
-              <a:rPr sz="2500" b="1">
-                <a:solidFill>
-                  <a:srgbClr val="1C2A33"/>
-                </a:solidFill>
-                <a:latin typeface="楷体"/>
-                <a:ea typeface="楷体"/>
-                <a:cs typeface="楷体"/>
-              </a:rPr>
-              <a:t>对比示范法 + 约束写作法</a:t>
-            </a:r>
-          </a:p>
-        </p:txBody>
-      </p:sp>
-      <p:sp>
-        <p:nvSpPr>
-          <p:cNvPr id="6" name="Rounded Rectangle 5"/>
+          <p:cNvPr id="5" name="Rounded Rectangle 4"/>
           <p:cNvSpPr/>
           <p:nvPr/>
         </p:nvSpPr>
         <p:spPr>
           <a:xfrm>
-            <a:off x="640080" y="2057400"/>
-            <a:ext cx="5227167" cy="2057400"/>
+            <a:off x="640080" y="1417320"/>
+            <a:ext cx="10911535" cy="5394960"/>
           </a:xfrm>
           <a:prstGeom prst="roundRect">
             <a:avLst/>
@@ -7796,9 +7466,9 @@
           <a:solidFill>
             <a:srgbClr val="FFFFFF"/>
           </a:solidFill>
-          <a:ln w="22860">
+          <a:ln w="25400">
             <a:solidFill>
-              <a:srgbClr val="B23A2A"/>
+              <a:srgbClr val="C8A86B"/>
             </a:solidFill>
           </a:ln>
           <a:effectLst/>
@@ -7827,14 +7497,14 @@
       </p:sp>
       <p:sp>
         <p:nvSpPr>
-          <p:cNvPr id="7" name="TextBox 6"/>
+          <p:cNvPr id="6" name="TextBox 5"/>
           <p:cNvSpPr txBox="1"/>
           <p:nvPr/>
         </p:nvSpPr>
         <p:spPr>
           <a:xfrm>
-            <a:off x="914400" y="2212848"/>
-            <a:ext cx="4678527" cy="457200"/>
+            <a:off x="914400" y="1554480"/>
+            <a:ext cx="10362895" cy="5120640"/>
           </a:xfrm>
           <a:prstGeom prst="rect">
             <a:avLst/>
@@ -7847,396 +7517,53 @@
           </a:bodyPr>
           <a:lstStyle/>
           <a:p>
-            <a:pPr algn="l"/>
-            <a:r>
-              <a:rPr sz="1600" b="1">
-                <a:solidFill>
-                  <a:srgbClr val="B23A2A"/>
-                </a:solidFill>
-                <a:latin typeface="楷体"/>
-                <a:ea typeface="楷体"/>
-                <a:cs typeface="楷体"/>
-              </a:rPr>
-              <a:t>① 对比示范法</a:t>
-            </a:r>
-          </a:p>
-        </p:txBody>
-      </p:sp>
-      <p:sp>
-        <p:nvSpPr>
-          <p:cNvPr id="8" name="TextBox 7"/>
-          <p:cNvSpPr txBox="1"/>
-          <p:nvPr/>
-        </p:nvSpPr>
-        <p:spPr>
-          <a:xfrm>
-            <a:off x="914400" y="2697480"/>
-            <a:ext cx="4678527" cy="1371600"/>
-          </a:xfrm>
-          <a:prstGeom prst="rect">
-            <a:avLst/>
-          </a:prstGeom>
-          <a:noFill/>
-        </p:spPr>
-        <p:txBody>
-          <a:bodyPr wrap="square" anchor="t" lIns="0" rIns="0" tIns="0" bIns="0">
-            <a:spAutoFit/>
-          </a:bodyPr>
-          <a:lstStyle/>
-          <a:p>
             <a:pPr algn="l">
               <a:lnSpc>
-                <a:spcPct val="145000"/>
+                <a:spcPct val="110000"/>
               </a:lnSpc>
               <a:spcAft>
-                <a:spcPts val="600"/>
+                <a:spcPts val="100"/>
               </a:spcAft>
             </a:pPr>
             <a:r>
               <a:rPr sz="1300" b="0">
                 <a:solidFill>
                   <a:srgbClr val="1C2A33"/>
-                </a:solidFill>
-                <a:latin typeface="楷体"/>
-                <a:ea typeface="楷体"/>
-                <a:cs typeface="楷体"/>
-              </a:rPr>
-              <a:t>同写一人：A段(表扬稿)"伟大无私……"；B段(通讯)"凌晨四点扫完三条街，弯腰捡碎瓶包好——怕扎到早起的人"。</a:t>
-            </a:r>
-          </a:p>
-          <a:p>
-            <a:pPr algn="l">
-              <a:lnSpc>
-                <a:spcPct val="145000"/>
-              </a:lnSpc>
-            </a:pPr>
-            <a:r>
-              <a:rPr sz="1300" b="0">
-                <a:solidFill>
-                  <a:srgbClr val="6B6258"/>
-                </a:solidFill>
-                <a:latin typeface="楷体"/>
-                <a:ea typeface="楷体"/>
-                <a:cs typeface="楷体"/>
-              </a:rPr>
-              <a:t>B段以事写人，不说好而好自现。</a:t>
-            </a:r>
-          </a:p>
-        </p:txBody>
-      </p:sp>
-      <p:sp>
-        <p:nvSpPr>
-          <p:cNvPr id="9" name="Rounded Rectangle 8"/>
-          <p:cNvSpPr/>
-          <p:nvPr/>
-        </p:nvSpPr>
-        <p:spPr>
-          <a:xfrm>
-            <a:off x="640080" y="4297680"/>
-            <a:ext cx="5227167" cy="2057400"/>
-          </a:xfrm>
-          <a:prstGeom prst="roundRect">
-            <a:avLst/>
-          </a:prstGeom>
-          <a:solidFill>
-            <a:srgbClr val="FFFFFF"/>
-          </a:solidFill>
-          <a:ln w="22860">
-            <a:solidFill>
-              <a:srgbClr val="2E7D6B"/>
-            </a:solidFill>
-          </a:ln>
-          <a:effectLst/>
-        </p:spPr>
-        <p:style>
-          <a:lnRef idx="1">
-            <a:schemeClr val="accent1"/>
-          </a:lnRef>
-          <a:fillRef idx="3">
-            <a:schemeClr val="accent1"/>
-          </a:fillRef>
-          <a:effectRef idx="2">
-            <a:schemeClr val="accent1"/>
-          </a:effectRef>
-          <a:fontRef idx="minor">
-            <a:schemeClr val="lt1"/>
-          </a:fontRef>
-        </p:style>
-        <p:txBody>
-          <a:bodyPr rtlCol="0" anchor="ctr"/>
-          <a:lstStyle/>
-          <a:p>
-            <a:pPr algn="ctr"/>
-          </a:p>
-        </p:txBody>
-      </p:sp>
-      <p:sp>
-        <p:nvSpPr>
-          <p:cNvPr id="10" name="TextBox 9"/>
-          <p:cNvSpPr txBox="1"/>
-          <p:nvPr/>
-        </p:nvSpPr>
-        <p:spPr>
-          <a:xfrm>
-            <a:off x="914400" y="4453128"/>
-            <a:ext cx="4678527" cy="457200"/>
-          </a:xfrm>
-          <a:prstGeom prst="rect">
-            <a:avLst/>
-          </a:prstGeom>
-          <a:noFill/>
-        </p:spPr>
-        <p:txBody>
-          <a:bodyPr wrap="square" anchor="t" lIns="0" rIns="0" tIns="0" bIns="0">
-            <a:spAutoFit/>
-          </a:bodyPr>
-          <a:lstStyle/>
-          <a:p>
-            <a:pPr algn="l"/>
-            <a:r>
-              <a:rPr sz="1600" b="1">
-                <a:solidFill>
-                  <a:srgbClr val="2E7D6B"/>
-                </a:solidFill>
-                <a:latin typeface="楷体"/>
-                <a:ea typeface="楷体"/>
-                <a:cs typeface="楷体"/>
-              </a:rPr>
-              <a:t>② 约束写作法</a:t>
-            </a:r>
-          </a:p>
-        </p:txBody>
-      </p:sp>
-      <p:sp>
-        <p:nvSpPr>
-          <p:cNvPr id="11" name="TextBox 10"/>
-          <p:cNvSpPr txBox="1"/>
-          <p:nvPr/>
-        </p:nvSpPr>
-        <p:spPr>
-          <a:xfrm>
-            <a:off x="914400" y="4937760"/>
-            <a:ext cx="4678527" cy="1371600"/>
-          </a:xfrm>
-          <a:prstGeom prst="rect">
-            <a:avLst/>
-          </a:prstGeom>
-          <a:noFill/>
-        </p:spPr>
-        <p:txBody>
-          <a:bodyPr wrap="square" anchor="t" lIns="0" rIns="0" tIns="0" bIns="0">
-            <a:spAutoFit/>
-          </a:bodyPr>
-          <a:lstStyle/>
-          <a:p>
-            <a:pPr algn="l">
-              <a:lnSpc>
-                <a:spcPct val="150000"/>
-              </a:lnSpc>
-              <a:spcAft>
-                <a:spcPts val="600"/>
-              </a:spcAft>
-            </a:pPr>
-            <a:r>
-              <a:rPr sz="1350" b="0">
-                <a:solidFill>
-                  <a:srgbClr val="1C2A33"/>
-                </a:solidFill>
-                <a:latin typeface="楷体"/>
-                <a:ea typeface="楷体"/>
-                <a:cs typeface="楷体"/>
-              </a:rPr>
-              <a:t>整篇不许出现"伟大·无私·奉献"等评价词——用约束逼出"以事写人"。</a:t>
-            </a:r>
-          </a:p>
-          <a:p>
-            <a:pPr algn="l">
-              <a:lnSpc>
-                <a:spcPct val="145000"/>
-              </a:lnSpc>
-            </a:pPr>
-            <a:r>
-              <a:rPr sz="1350" b="0">
-                <a:solidFill>
-                  <a:srgbClr val="6B6258"/>
-                </a:solidFill>
-                <a:latin typeface="楷体"/>
-                <a:ea typeface="楷体"/>
-                <a:cs typeface="楷体"/>
-              </a:rPr>
-              <a:t>写漏了就划掉，换成具体事件。</a:t>
-            </a:r>
-          </a:p>
-        </p:txBody>
-      </p:sp>
-      <p:pic>
-        <p:nvPicPr>
-          <p:cNvPr id="12" name="Picture 11" descr="ctype.jpg"/>
-          <p:cNvPicPr>
-            <a:picLocks noChangeAspect="1"/>
-          </p:cNvPicPr>
-          <p:nvPr/>
-        </p:nvPicPr>
-        <p:blipFill>
-          <a:blip r:embed="rId2"/>
-          <a:srcRect t="23177" b="23177"/>
-          <a:stretch>
-            <a:fillRect/>
-          </a:stretch>
-        </p:blipFill>
-        <p:spPr>
-          <a:xfrm>
-            <a:off x="6324447" y="2057400"/>
-            <a:ext cx="5227167" cy="2103120"/>
-          </a:xfrm>
-          <a:prstGeom prst="rect">
-            <a:avLst/>
-          </a:prstGeom>
-        </p:spPr>
-      </p:pic>
-      <p:sp>
-        <p:nvSpPr>
-          <p:cNvPr id="13" name="TextBox 12"/>
-          <p:cNvSpPr txBox="1"/>
-          <p:nvPr/>
-        </p:nvSpPr>
-        <p:spPr>
-          <a:xfrm>
-            <a:off x="6324447" y="4251960"/>
-            <a:ext cx="5227167" cy="365760"/>
-          </a:xfrm>
-          <a:prstGeom prst="rect">
-            <a:avLst/>
-          </a:prstGeom>
-          <a:noFill/>
-        </p:spPr>
-        <p:txBody>
-          <a:bodyPr wrap="square" anchor="t" lIns="0" rIns="0" tIns="0" bIns="0">
-            <a:spAutoFit/>
-          </a:bodyPr>
-          <a:lstStyle/>
-          <a:p>
-            <a:pPr algn="ctr"/>
-            <a:r>
-              <a:rPr sz="1100" b="0">
-                <a:solidFill>
-                  <a:srgbClr val="6B6258"/>
                 </a:solidFill>
                 <a:latin typeface="微软雅黑"/>
                 <a:ea typeface="微软雅黑"/>
                 <a:cs typeface="微软雅黑"/>
               </a:rPr>
-              <a:t>中文打字机（CC BY-SA 4.0）· "写作"的实物象征</a:t>
-            </a:r>
-          </a:p>
-        </p:txBody>
-      </p:sp>
-      <p:sp>
-        <p:nvSpPr>
-          <p:cNvPr id="14" name="Rounded Rectangle 13"/>
-          <p:cNvSpPr/>
-          <p:nvPr/>
-        </p:nvSpPr>
-        <p:spPr>
-          <a:xfrm>
-            <a:off x="6324447" y="4617719"/>
-            <a:ext cx="5227167" cy="1737360"/>
-          </a:xfrm>
-          <a:prstGeom prst="roundRect">
-            <a:avLst/>
-          </a:prstGeom>
-          <a:solidFill>
-            <a:srgbClr val="1C2A33"/>
-          </a:solidFill>
-          <a:effectLst/>
-        </p:spPr>
-        <p:style>
-          <a:lnRef idx="1">
-            <a:schemeClr val="accent1"/>
-          </a:lnRef>
-          <a:fillRef idx="3">
-            <a:schemeClr val="accent1"/>
-          </a:fillRef>
-          <a:effectRef idx="2">
-            <a:schemeClr val="accent1"/>
-          </a:effectRef>
-          <a:fontRef idx="minor">
-            <a:schemeClr val="lt1"/>
-          </a:fontRef>
-        </p:style>
-        <p:txBody>
-          <a:bodyPr rtlCol="0" anchor="ctr"/>
-          <a:lstStyle/>
-          <a:p>
-            <a:pPr algn="ctr"/>
-          </a:p>
-        </p:txBody>
-      </p:sp>
-      <p:sp>
-        <p:nvSpPr>
-          <p:cNvPr id="15" name="TextBox 14"/>
-          <p:cNvSpPr txBox="1"/>
-          <p:nvPr/>
-        </p:nvSpPr>
-        <p:spPr>
-          <a:xfrm>
-            <a:off x="6598767" y="4754880"/>
-            <a:ext cx="4678527" cy="1554480"/>
-          </a:xfrm>
-          <a:prstGeom prst="rect">
-            <a:avLst/>
-          </a:prstGeom>
-          <a:noFill/>
-        </p:spPr>
-        <p:txBody>
-          <a:bodyPr wrap="square" anchor="t" lIns="0" rIns="0" tIns="0" bIns="0">
-            <a:spAutoFit/>
-          </a:bodyPr>
-          <a:lstStyle/>
-          <a:p>
-            <a:pPr algn="l">
-              <a:lnSpc>
-                <a:spcPct val="140000"/>
-              </a:lnSpc>
-              <a:spcAft>
-                <a:spcPts val="600"/>
-              </a:spcAft>
-            </a:pPr>
-            <a:r>
-              <a:rPr sz="1300" b="1">
-                <a:solidFill>
-                  <a:srgbClr val="C8A86B"/>
-                </a:solidFill>
-                <a:latin typeface="楷体"/>
-                <a:ea typeface="楷体"/>
-                <a:cs typeface="楷体"/>
-              </a:rPr>
-              <a:t>穆青（新华社原社长，《焦裕禄》作者）：</a:t>
-            </a:r>
-          </a:p>
-          <a:p>
-            <a:pPr algn="l">
-              <a:lnSpc>
-                <a:spcPct val="150000"/>
-              </a:lnSpc>
-            </a:pPr>
-            <a:r>
-              <a:rPr sz="1350" b="0">
-                <a:solidFill>
-                  <a:srgbClr val="FFFFFF"/>
-                </a:solidFill>
-                <a:latin typeface="楷体"/>
-                <a:ea typeface="楷体"/>
-                <a:cs typeface="楷体"/>
-              </a:rPr>
-              <a:t>"获得细节，处理好细节，是记者思想水平与技巧的综合反映。"</a:t>
-            </a:r>
-          </a:p>
-        </p:txBody>
-      </p:sp>
-      <p:sp>
-        <p:nvSpPr>
-          <p:cNvPr id="16" name="TextBox 15"/>
+              <a:t>┌── 学写人物通讯 ──┐
+│ 禁止:伟大·无私·奉献│
+│ →以事写人 │
+│ │
+│ 【表扬稿vs通讯】 │
+│ 表扬稿:空话+评价词 │
+│ 通讯:细节+以事写人 │
+│ │
+│ 【写作三步法】 │
+│ ①选材(2-3个典型) │
+│ ②结构(三选一) │
+│ 时间线/细节聚焦/ │
+│ 时间跨度 │
+│ ③语言(简洁+数据+ │
+│ 言行描写) │
+│ │
+│ 【选材检测】 │
+│ 删掉它→形象变不变? │
+│ 不变=不典型 │
+│ │
+│ 【互评量表】 │
+│ 真实|典型|结构|语言│
+└────────────────────┘</a:t>
+            </a:r>
+          </a:p>
+        </p:txBody>
+      </p:sp>
+      <p:sp>
+        <p:nvSpPr>
+          <p:cNvPr id="7" name="TextBox 6"/>
           <p:cNvSpPr txBox="1"/>
           <p:nvPr/>
         </p:nvSpPr>
@@ -8363,13 +7690,13 @@
             <a:r>
               <a:rPr sz="1300" b="1">
                 <a:solidFill>
-                  <a:srgbClr val="B23A2A"/>
+                  <a:srgbClr val="2E7D6B"/>
                 </a:solidFill>
                 <a:latin typeface="微软雅黑"/>
                 <a:ea typeface="微软雅黑"/>
                 <a:cs typeface="微软雅黑"/>
               </a:rPr>
-              <a:t>板书 · 学写人物通讯</a:t>
+              <a:t>分层作业</a:t>
             </a:r>
           </a:p>
         </p:txBody>
@@ -8389,7 +7716,7 @@
             <a:avLst/>
           </a:prstGeom>
           <a:solidFill>
-            <a:srgbClr val="B23A2A"/>
+            <a:srgbClr val="2E7D6B"/>
           </a:solidFill>
           <a:ln>
             <a:noFill/>
@@ -8426,15 +7753,20 @@
         </p:nvSpPr>
         <p:spPr>
           <a:xfrm>
-            <a:off x="640080" y="1737360"/>
-            <a:ext cx="10911535" cy="502920"/>
+            <a:off x="640080" y="1417320"/>
+            <a:ext cx="10911535" cy="1417320"/>
           </a:xfrm>
           <a:prstGeom prst="roundRect">
             <a:avLst/>
           </a:prstGeom>
           <a:solidFill>
-            <a:srgbClr val="1C2A33"/>
+            <a:srgbClr val="FFFFFF"/>
           </a:solidFill>
+          <a:ln w="22860">
+            <a:solidFill>
+              <a:srgbClr val="2E7D6B"/>
+            </a:solidFill>
+          </a:ln>
           <a:effectLst/>
         </p:spPr>
         <p:style>
@@ -8467,8 +7799,8 @@
         </p:nvSpPr>
         <p:spPr>
           <a:xfrm>
-            <a:off x="914400" y="1810512"/>
-            <a:ext cx="2743200" cy="365760"/>
+            <a:off x="1371600" y="1527048"/>
+            <a:ext cx="9997135" cy="457200"/>
           </a:xfrm>
           <a:prstGeom prst="rect">
             <a:avLst/>
@@ -8481,17 +7813,21 @@
           </a:bodyPr>
           <a:lstStyle/>
           <a:p>
-            <a:pPr algn="l"/>
-            <a:r>
-              <a:rPr sz="1500" b="1">
-                <a:solidFill>
-                  <a:srgbClr val="FFFFFF"/>
+            <a:pPr algn="l">
+              <a:lnSpc>
+                <a:spcPct val="110000"/>
+              </a:lnSpc>
+            </a:pPr>
+            <a:r>
+              <a:rPr sz="1600" b="1">
+                <a:solidFill>
+                  <a:srgbClr val="1C2A33"/>
                 </a:solidFill>
                 <a:latin typeface="微软雅黑"/>
                 <a:ea typeface="微软雅黑"/>
                 <a:cs typeface="微软雅黑"/>
               </a:rPr>
-              <a:t>维度</a:t>
+              <a:t/>
             </a:r>
           </a:p>
         </p:txBody>
@@ -8504,8 +7840,8 @@
         </p:nvSpPr>
         <p:spPr>
           <a:xfrm>
-            <a:off x="3931920" y="1810512"/>
-            <a:ext cx="8046720" cy="365760"/>
+            <a:off x="1371600" y="1965960"/>
+            <a:ext cx="9997135" cy="777240"/>
           </a:xfrm>
           <a:prstGeom prst="rect">
             <a:avLst/>
@@ -8518,17 +7854,21 @@
           </a:bodyPr>
           <a:lstStyle/>
           <a:p>
-            <a:pPr algn="l"/>
-            <a:r>
-              <a:rPr sz="1500" b="1">
-                <a:solidFill>
-                  <a:srgbClr val="C8A86B"/>
-                </a:solidFill>
-                <a:latin typeface="微软雅黑"/>
-                <a:ea typeface="微软雅黑"/>
-                <a:cs typeface="微软雅黑"/>
+            <a:pPr algn="l">
+              <a:lnSpc>
+                <a:spcPct val="128000"/>
+              </a:lnSpc>
+            </a:pPr>
+            <a:r>
+              <a:rPr sz="1100" b="0">
+                <a:solidFill>
+                  <a:srgbClr val="1C2A33"/>
+                </a:solidFill>
+                <a:latin typeface="楷体"/>
+                <a:ea typeface="楷体"/>
+                <a:cs typeface="楷体"/>
               </a:rPr>
-              <a:t>内容</a:t>
+              <a:t>【基础作业】1. 根据互评意见修改人物通讯初稿（600字以内），誊抄在作文本上。2. 在通讯下方标注：你选了哪种结构、哪2-3个典型事件。</a:t>
             </a:r>
           </a:p>
         </p:txBody>
@@ -8541,8 +7881,8 @@
         </p:nvSpPr>
         <p:spPr>
           <a:xfrm>
-            <a:off x="640080" y="2331720"/>
-            <a:ext cx="10911535" cy="530352"/>
+            <a:off x="640080" y="2971800"/>
+            <a:ext cx="10911535" cy="1417320"/>
           </a:xfrm>
           <a:prstGeom prst="roundRect">
             <a:avLst/>
@@ -8550,9 +7890,9 @@
           <a:solidFill>
             <a:srgbClr val="FFFFFF"/>
           </a:solidFill>
-          <a:ln w="10160">
+          <a:ln w="22860">
             <a:solidFill>
-              <a:srgbClr val="6B6258"/>
+              <a:srgbClr val="2E7D6B"/>
             </a:solidFill>
           </a:ln>
           <a:effectLst/>
@@ -8587,8 +7927,8 @@
         </p:nvSpPr>
         <p:spPr>
           <a:xfrm>
-            <a:off x="914400" y="2423160"/>
-            <a:ext cx="2743200" cy="365760"/>
+            <a:off x="1371600" y="3081528"/>
+            <a:ext cx="9997135" cy="457200"/>
           </a:xfrm>
           <a:prstGeom prst="rect">
             <a:avLst/>
@@ -8601,17 +7941,21 @@
           </a:bodyPr>
           <a:lstStyle/>
           <a:p>
-            <a:pPr algn="l"/>
-            <a:r>
-              <a:rPr sz="1400" b="1">
-                <a:solidFill>
-                  <a:srgbClr val="B23A2A"/>
+            <a:pPr algn="l">
+              <a:lnSpc>
+                <a:spcPct val="110000"/>
+              </a:lnSpc>
+            </a:pPr>
+            <a:r>
+              <a:rPr sz="1600" b="1">
+                <a:solidFill>
+                  <a:srgbClr val="1C2A33"/>
                 </a:solidFill>
                 <a:latin typeface="微软雅黑"/>
                 <a:ea typeface="微软雅黑"/>
                 <a:cs typeface="微软雅黑"/>
               </a:rPr>
-              <a:t>写作三步</a:t>
+              <a:t/>
             </a:r>
           </a:p>
         </p:txBody>
@@ -8624,8 +7968,8 @@
         </p:nvSpPr>
         <p:spPr>
           <a:xfrm>
-            <a:off x="3931920" y="2423160"/>
-            <a:ext cx="8046720" cy="365760"/>
+            <a:off x="1371600" y="3520440"/>
+            <a:ext cx="9997135" cy="777240"/>
           </a:xfrm>
           <a:prstGeom prst="rect">
             <a:avLst/>
@@ -8638,9 +7982,13 @@
           </a:bodyPr>
           <a:lstStyle/>
           <a:p>
-            <a:pPr algn="l"/>
-            <a:r>
-              <a:rPr sz="1350" b="0">
+            <a:pPr algn="l">
+              <a:lnSpc>
+                <a:spcPct val="128000"/>
+              </a:lnSpc>
+            </a:pPr>
+            <a:r>
+              <a:rPr sz="1200" b="0">
                 <a:solidFill>
                   <a:srgbClr val="1C2A33"/>
                 </a:solidFill>
@@ -8648,614 +7996,14 @@
                 <a:ea typeface="楷体"/>
                 <a:cs typeface="楷体"/>
               </a:rPr>
-              <a:t>选材(2-3典型) → 结构(三选一) → 语言(简洁+数据+言行)</a:t>
-            </a:r>
-          </a:p>
-        </p:txBody>
-      </p:sp>
-      <p:sp>
-        <p:nvSpPr>
-          <p:cNvPr id="11" name="Rounded Rectangle 10"/>
-          <p:cNvSpPr/>
-          <p:nvPr/>
-        </p:nvSpPr>
-        <p:spPr>
-          <a:xfrm>
-            <a:off x="640080" y="2916936"/>
-            <a:ext cx="10911535" cy="530352"/>
-          </a:xfrm>
-          <a:prstGeom prst="roundRect">
-            <a:avLst/>
-          </a:prstGeom>
-          <a:solidFill>
-            <a:srgbClr val="E7DFD2"/>
-          </a:solidFill>
-          <a:ln w="10160">
-            <a:solidFill>
-              <a:srgbClr val="6B6258"/>
-            </a:solidFill>
-          </a:ln>
-          <a:effectLst/>
-        </p:spPr>
-        <p:style>
-          <a:lnRef idx="1">
-            <a:schemeClr val="accent1"/>
-          </a:lnRef>
-          <a:fillRef idx="3">
-            <a:schemeClr val="accent1"/>
-          </a:fillRef>
-          <a:effectRef idx="2">
-            <a:schemeClr val="accent1"/>
-          </a:effectRef>
-          <a:fontRef idx="minor">
-            <a:schemeClr val="lt1"/>
-          </a:fontRef>
-        </p:style>
-        <p:txBody>
-          <a:bodyPr rtlCol="0" anchor="ctr"/>
-          <a:lstStyle/>
-          <a:p>
-            <a:pPr algn="ctr"/>
-          </a:p>
-        </p:txBody>
-      </p:sp>
-      <p:sp>
-        <p:nvSpPr>
-          <p:cNvPr id="12" name="TextBox 11"/>
-          <p:cNvSpPr txBox="1"/>
-          <p:nvPr/>
-        </p:nvSpPr>
-        <p:spPr>
-          <a:xfrm>
-            <a:off x="914400" y="3008376"/>
-            <a:ext cx="2743200" cy="365760"/>
-          </a:xfrm>
-          <a:prstGeom prst="rect">
-            <a:avLst/>
-          </a:prstGeom>
-          <a:noFill/>
-        </p:spPr>
-        <p:txBody>
-          <a:bodyPr wrap="square" anchor="t" lIns="0" rIns="0" tIns="0" bIns="0">
-            <a:spAutoFit/>
-          </a:bodyPr>
-          <a:lstStyle/>
-          <a:p>
-            <a:pPr algn="l"/>
-            <a:r>
-              <a:rPr sz="1400" b="1">
-                <a:solidFill>
-                  <a:srgbClr val="2E7D6B"/>
-                </a:solidFill>
-                <a:latin typeface="微软雅黑"/>
-                <a:ea typeface="微软雅黑"/>
-                <a:cs typeface="微软雅黑"/>
-              </a:rPr>
-              <a:t>三种结构</a:t>
-            </a:r>
-          </a:p>
-        </p:txBody>
-      </p:sp>
-      <p:sp>
-        <p:nvSpPr>
-          <p:cNvPr id="13" name="TextBox 12"/>
-          <p:cNvSpPr txBox="1"/>
-          <p:nvPr/>
-        </p:nvSpPr>
-        <p:spPr>
-          <a:xfrm>
-            <a:off x="3931920" y="3008376"/>
-            <a:ext cx="8046720" cy="365760"/>
-          </a:xfrm>
-          <a:prstGeom prst="rect">
-            <a:avLst/>
-          </a:prstGeom>
-          <a:noFill/>
-        </p:spPr>
-        <p:txBody>
-          <a:bodyPr wrap="square" anchor="t" lIns="0" rIns="0" tIns="0" bIns="0">
-            <a:spAutoFit/>
-          </a:bodyPr>
-          <a:lstStyle/>
-          <a:p>
-            <a:pPr algn="l"/>
-            <a:r>
-              <a:rPr sz="1350" b="0">
-                <a:solidFill>
-                  <a:srgbClr val="1C2A33"/>
-                </a:solidFill>
-                <a:latin typeface="楷体"/>
-                <a:ea typeface="楷体"/>
-                <a:cs typeface="楷体"/>
-              </a:rPr>
-              <a:t>时间线(袁隆平) · 细节聚焦(张秉贵) · 时间跨度(钟扬)</a:t>
-            </a:r>
-          </a:p>
-        </p:txBody>
-      </p:sp>
-      <p:sp>
-        <p:nvSpPr>
-          <p:cNvPr id="14" name="Rounded Rectangle 13"/>
-          <p:cNvSpPr/>
-          <p:nvPr/>
-        </p:nvSpPr>
-        <p:spPr>
-          <a:xfrm>
-            <a:off x="640080" y="3502152"/>
-            <a:ext cx="10911535" cy="530352"/>
-          </a:xfrm>
-          <a:prstGeom prst="roundRect">
-            <a:avLst/>
-          </a:prstGeom>
-          <a:solidFill>
-            <a:srgbClr val="FFFFFF"/>
-          </a:solidFill>
-          <a:ln w="10160">
-            <a:solidFill>
-              <a:srgbClr val="6B6258"/>
-            </a:solidFill>
-          </a:ln>
-          <a:effectLst/>
-        </p:spPr>
-        <p:style>
-          <a:lnRef idx="1">
-            <a:schemeClr val="accent1"/>
-          </a:lnRef>
-          <a:fillRef idx="3">
-            <a:schemeClr val="accent1"/>
-          </a:fillRef>
-          <a:effectRef idx="2">
-            <a:schemeClr val="accent1"/>
-          </a:effectRef>
-          <a:fontRef idx="minor">
-            <a:schemeClr val="lt1"/>
-          </a:fontRef>
-        </p:style>
-        <p:txBody>
-          <a:bodyPr rtlCol="0" anchor="ctr"/>
-          <a:lstStyle/>
-          <a:p>
-            <a:pPr algn="ctr"/>
-          </a:p>
-        </p:txBody>
-      </p:sp>
-      <p:sp>
-        <p:nvSpPr>
-          <p:cNvPr id="15" name="TextBox 14"/>
-          <p:cNvSpPr txBox="1"/>
-          <p:nvPr/>
-        </p:nvSpPr>
-        <p:spPr>
-          <a:xfrm>
-            <a:off x="914400" y="3593592"/>
-            <a:ext cx="2743200" cy="365760"/>
-          </a:xfrm>
-          <a:prstGeom prst="rect">
-            <a:avLst/>
-          </a:prstGeom>
-          <a:noFill/>
-        </p:spPr>
-        <p:txBody>
-          <a:bodyPr wrap="square" anchor="t" lIns="0" rIns="0" tIns="0" bIns="0">
-            <a:spAutoFit/>
-          </a:bodyPr>
-          <a:lstStyle/>
-          <a:p>
-            <a:pPr algn="l"/>
-            <a:r>
-              <a:rPr sz="1400" b="1">
-                <a:solidFill>
-                  <a:srgbClr val="C8A86B"/>
-                </a:solidFill>
-                <a:latin typeface="微软雅黑"/>
-                <a:ea typeface="微软雅黑"/>
-                <a:cs typeface="微软雅黑"/>
-              </a:rPr>
-              <a:t>选材检测</a:t>
-            </a:r>
-          </a:p>
-        </p:txBody>
-      </p:sp>
-      <p:sp>
-        <p:nvSpPr>
-          <p:cNvPr id="16" name="TextBox 15"/>
-          <p:cNvSpPr txBox="1"/>
-          <p:nvPr/>
-        </p:nvSpPr>
-        <p:spPr>
-          <a:xfrm>
-            <a:off x="3931920" y="3593592"/>
-            <a:ext cx="8046720" cy="365760"/>
-          </a:xfrm>
-          <a:prstGeom prst="rect">
-            <a:avLst/>
-          </a:prstGeom>
-          <a:noFill/>
-        </p:spPr>
-        <p:txBody>
-          <a:bodyPr wrap="square" anchor="t" lIns="0" rIns="0" tIns="0" bIns="0">
-            <a:spAutoFit/>
-          </a:bodyPr>
-          <a:lstStyle/>
-          <a:p>
-            <a:pPr algn="l"/>
-            <a:r>
-              <a:rPr sz="1350" b="0">
-                <a:solidFill>
-                  <a:srgbClr val="1C2A33"/>
-                </a:solidFill>
-                <a:latin typeface="楷体"/>
-                <a:ea typeface="楷体"/>
-                <a:cs typeface="楷体"/>
-              </a:rPr>
-              <a:t>删掉它→形象变不变？不变 = 不典型（小事也能典型）</a:t>
-            </a:r>
-          </a:p>
-        </p:txBody>
-      </p:sp>
-      <p:sp>
-        <p:nvSpPr>
-          <p:cNvPr id="17" name="Rounded Rectangle 16"/>
-          <p:cNvSpPr/>
-          <p:nvPr/>
-        </p:nvSpPr>
-        <p:spPr>
-          <a:xfrm>
-            <a:off x="640080" y="4087368"/>
-            <a:ext cx="10911535" cy="530352"/>
-          </a:xfrm>
-          <a:prstGeom prst="roundRect">
-            <a:avLst/>
-          </a:prstGeom>
-          <a:solidFill>
-            <a:srgbClr val="E7DFD2"/>
-          </a:solidFill>
-          <a:ln w="10160">
-            <a:solidFill>
-              <a:srgbClr val="6B6258"/>
-            </a:solidFill>
-          </a:ln>
-          <a:effectLst/>
-        </p:spPr>
-        <p:style>
-          <a:lnRef idx="1">
-            <a:schemeClr val="accent1"/>
-          </a:lnRef>
-          <a:fillRef idx="3">
-            <a:schemeClr val="accent1"/>
-          </a:fillRef>
-          <a:effectRef idx="2">
-            <a:schemeClr val="accent1"/>
-          </a:effectRef>
-          <a:fontRef idx="minor">
-            <a:schemeClr val="lt1"/>
-          </a:fontRef>
-        </p:style>
-        <p:txBody>
-          <a:bodyPr rtlCol="0" anchor="ctr"/>
-          <a:lstStyle/>
-          <a:p>
-            <a:pPr algn="ctr"/>
-          </a:p>
-        </p:txBody>
-      </p:sp>
-      <p:sp>
-        <p:nvSpPr>
-          <p:cNvPr id="18" name="TextBox 17"/>
-          <p:cNvSpPr txBox="1"/>
-          <p:nvPr/>
-        </p:nvSpPr>
-        <p:spPr>
-          <a:xfrm>
-            <a:off x="914400" y="4178808"/>
-            <a:ext cx="2743200" cy="365760"/>
-          </a:xfrm>
-          <a:prstGeom prst="rect">
-            <a:avLst/>
-          </a:prstGeom>
-          <a:noFill/>
-        </p:spPr>
-        <p:txBody>
-          <a:bodyPr wrap="square" anchor="t" lIns="0" rIns="0" tIns="0" bIns="0">
-            <a:spAutoFit/>
-          </a:bodyPr>
-          <a:lstStyle/>
-          <a:p>
-            <a:pPr algn="l"/>
-            <a:r>
-              <a:rPr sz="1400" b="1">
-                <a:solidFill>
-                  <a:srgbClr val="B23A2A"/>
-                </a:solidFill>
-                <a:latin typeface="微软雅黑"/>
-                <a:ea typeface="微软雅黑"/>
-                <a:cs typeface="微软雅黑"/>
-              </a:rPr>
-              <a:t>以事写人</a:t>
-            </a:r>
-          </a:p>
-        </p:txBody>
-      </p:sp>
-      <p:sp>
-        <p:nvSpPr>
-          <p:cNvPr id="19" name="TextBox 18"/>
-          <p:cNvSpPr txBox="1"/>
-          <p:nvPr/>
-        </p:nvSpPr>
-        <p:spPr>
-          <a:xfrm>
-            <a:off x="3931920" y="4178808"/>
-            <a:ext cx="8046720" cy="365760"/>
-          </a:xfrm>
-          <a:prstGeom prst="rect">
-            <a:avLst/>
-          </a:prstGeom>
-          <a:noFill/>
-        </p:spPr>
-        <p:txBody>
-          <a:bodyPr wrap="square" anchor="t" lIns="0" rIns="0" tIns="0" bIns="0">
-            <a:spAutoFit/>
-          </a:bodyPr>
-          <a:lstStyle/>
-          <a:p>
-            <a:pPr algn="l"/>
-            <a:r>
-              <a:rPr sz="1350" b="0">
-                <a:solidFill>
-                  <a:srgbClr val="1C2A33"/>
-                </a:solidFill>
-                <a:latin typeface="楷体"/>
-                <a:ea typeface="楷体"/>
-                <a:cs typeface="楷体"/>
-              </a:rPr>
-              <a:t>不说"好"，让事件自己说明"好" ≠ 表扬稿</a:t>
-            </a:r>
-          </a:p>
-        </p:txBody>
-      </p:sp>
-      <p:sp>
-        <p:nvSpPr>
-          <p:cNvPr id="20" name="Rounded Rectangle 19"/>
-          <p:cNvSpPr/>
-          <p:nvPr/>
-        </p:nvSpPr>
-        <p:spPr>
-          <a:xfrm>
-            <a:off x="640080" y="4672584"/>
-            <a:ext cx="10911535" cy="530352"/>
-          </a:xfrm>
-          <a:prstGeom prst="roundRect">
-            <a:avLst/>
-          </a:prstGeom>
-          <a:solidFill>
-            <a:srgbClr val="FFFFFF"/>
-          </a:solidFill>
-          <a:ln w="10160">
-            <a:solidFill>
-              <a:srgbClr val="6B6258"/>
-            </a:solidFill>
-          </a:ln>
-          <a:effectLst/>
-        </p:spPr>
-        <p:style>
-          <a:lnRef idx="1">
-            <a:schemeClr val="accent1"/>
-          </a:lnRef>
-          <a:fillRef idx="3">
-            <a:schemeClr val="accent1"/>
-          </a:fillRef>
-          <a:effectRef idx="2">
-            <a:schemeClr val="accent1"/>
-          </a:effectRef>
-          <a:fontRef idx="minor">
-            <a:schemeClr val="lt1"/>
-          </a:fontRef>
-        </p:style>
-        <p:txBody>
-          <a:bodyPr rtlCol="0" anchor="ctr"/>
-          <a:lstStyle/>
-          <a:p>
-            <a:pPr algn="ctr"/>
-          </a:p>
-        </p:txBody>
-      </p:sp>
-      <p:sp>
-        <p:nvSpPr>
-          <p:cNvPr id="21" name="TextBox 20"/>
-          <p:cNvSpPr txBox="1"/>
-          <p:nvPr/>
-        </p:nvSpPr>
-        <p:spPr>
-          <a:xfrm>
-            <a:off x="914400" y="4764024"/>
-            <a:ext cx="2743200" cy="365760"/>
-          </a:xfrm>
-          <a:prstGeom prst="rect">
-            <a:avLst/>
-          </a:prstGeom>
-          <a:noFill/>
-        </p:spPr>
-        <p:txBody>
-          <a:bodyPr wrap="square" anchor="t" lIns="0" rIns="0" tIns="0" bIns="0">
-            <a:spAutoFit/>
-          </a:bodyPr>
-          <a:lstStyle/>
-          <a:p>
-            <a:pPr algn="l"/>
-            <a:r>
-              <a:rPr sz="1400" b="1">
-                <a:solidFill>
-                  <a:srgbClr val="2E7D6B"/>
-                </a:solidFill>
-                <a:latin typeface="微软雅黑"/>
-                <a:ea typeface="微软雅黑"/>
-                <a:cs typeface="微软雅黑"/>
-              </a:rPr>
-              <a:t>真实性</a:t>
-            </a:r>
-          </a:p>
-        </p:txBody>
-      </p:sp>
-      <p:sp>
-        <p:nvSpPr>
-          <p:cNvPr id="22" name="TextBox 21"/>
-          <p:cNvSpPr txBox="1"/>
-          <p:nvPr/>
-        </p:nvSpPr>
-        <p:spPr>
-          <a:xfrm>
-            <a:off x="3931920" y="4764024"/>
-            <a:ext cx="8046720" cy="365760"/>
-          </a:xfrm>
-          <a:prstGeom prst="rect">
-            <a:avLst/>
-          </a:prstGeom>
-          <a:noFill/>
-        </p:spPr>
-        <p:txBody>
-          <a:bodyPr wrap="square" anchor="t" lIns="0" rIns="0" tIns="0" bIns="0">
-            <a:spAutoFit/>
-          </a:bodyPr>
-          <a:lstStyle/>
-          <a:p>
-            <a:pPr algn="l"/>
-            <a:r>
-              <a:rPr sz="1350" b="0">
-                <a:solidFill>
-                  <a:srgbClr val="1C2A33"/>
-                </a:solidFill>
-                <a:latin typeface="楷体"/>
-                <a:ea typeface="楷体"/>
-                <a:cs typeface="楷体"/>
-              </a:rPr>
-              <a:t>不可虚构；缺细节就补采访，不"编"、不"合理想象"</a:t>
-            </a:r>
-          </a:p>
-        </p:txBody>
-      </p:sp>
-      <p:sp>
-        <p:nvSpPr>
-          <p:cNvPr id="23" name="Rounded Rectangle 22"/>
-          <p:cNvSpPr/>
-          <p:nvPr/>
-        </p:nvSpPr>
-        <p:spPr>
-          <a:xfrm>
-            <a:off x="640080" y="5257800"/>
-            <a:ext cx="10911535" cy="530352"/>
-          </a:xfrm>
-          <a:prstGeom prst="roundRect">
-            <a:avLst/>
-          </a:prstGeom>
-          <a:solidFill>
-            <a:srgbClr val="E7DFD2"/>
-          </a:solidFill>
-          <a:ln w="10160">
-            <a:solidFill>
-              <a:srgbClr val="6B6258"/>
-            </a:solidFill>
-          </a:ln>
-          <a:effectLst/>
-        </p:spPr>
-        <p:style>
-          <a:lnRef idx="1">
-            <a:schemeClr val="accent1"/>
-          </a:lnRef>
-          <a:fillRef idx="3">
-            <a:schemeClr val="accent1"/>
-          </a:fillRef>
-          <a:effectRef idx="2">
-            <a:schemeClr val="accent1"/>
-          </a:effectRef>
-          <a:fontRef idx="minor">
-            <a:schemeClr val="lt1"/>
-          </a:fontRef>
-        </p:style>
-        <p:txBody>
-          <a:bodyPr rtlCol="0" anchor="ctr"/>
-          <a:lstStyle/>
-          <a:p>
-            <a:pPr algn="ctr"/>
-          </a:p>
-        </p:txBody>
-      </p:sp>
-      <p:sp>
-        <p:nvSpPr>
-          <p:cNvPr id="24" name="TextBox 23"/>
-          <p:cNvSpPr txBox="1"/>
-          <p:nvPr/>
-        </p:nvSpPr>
-        <p:spPr>
-          <a:xfrm>
-            <a:off x="914400" y="5349240"/>
-            <a:ext cx="2743200" cy="365760"/>
-          </a:xfrm>
-          <a:prstGeom prst="rect">
-            <a:avLst/>
-          </a:prstGeom>
-          <a:noFill/>
-        </p:spPr>
-        <p:txBody>
-          <a:bodyPr wrap="square" anchor="t" lIns="0" rIns="0" tIns="0" bIns="0">
-            <a:spAutoFit/>
-          </a:bodyPr>
-          <a:lstStyle/>
-          <a:p>
-            <a:pPr algn="l"/>
-            <a:r>
-              <a:rPr sz="1400" b="1">
-                <a:solidFill>
-                  <a:srgbClr val="C8A86B"/>
-                </a:solidFill>
-                <a:latin typeface="微软雅黑"/>
-                <a:ea typeface="微软雅黑"/>
-                <a:cs typeface="微软雅黑"/>
-              </a:rPr>
-              <a:t>互评量表</a:t>
-            </a:r>
-          </a:p>
-        </p:txBody>
-      </p:sp>
-      <p:sp>
-        <p:nvSpPr>
-          <p:cNvPr id="25" name="TextBox 24"/>
-          <p:cNvSpPr txBox="1"/>
-          <p:nvPr/>
-        </p:nvSpPr>
-        <p:spPr>
-          <a:xfrm>
-            <a:off x="3931920" y="5349240"/>
-            <a:ext cx="8046720" cy="365760"/>
-          </a:xfrm>
-          <a:prstGeom prst="rect">
-            <a:avLst/>
-          </a:prstGeom>
-          <a:noFill/>
-        </p:spPr>
-        <p:txBody>
-          <a:bodyPr wrap="square" anchor="t" lIns="0" rIns="0" tIns="0" bIns="0">
-            <a:spAutoFit/>
-          </a:bodyPr>
-          <a:lstStyle/>
-          <a:p>
-            <a:pPr algn="l"/>
-            <a:r>
-              <a:rPr sz="1350" b="0">
-                <a:solidFill>
-                  <a:srgbClr val="1C2A33"/>
-                </a:solidFill>
-                <a:latin typeface="楷体"/>
-                <a:ea typeface="楷体"/>
-                <a:cs typeface="楷体"/>
-              </a:rPr>
-              <a:t>真实 | 典型 | 结构 | 语言（四维打分）</a:t>
-            </a:r>
-          </a:p>
-        </p:txBody>
-      </p:sp>
-      <p:sp>
-        <p:nvSpPr>
-          <p:cNvPr id="26" name="TextBox 25"/>
+              <a:t>【提高作业】为你的通讯拟一个新闻标题（主标题+副标题），要求主标题有文学感、副标题说明人物身份。</a:t>
+            </a:r>
+          </a:p>
+        </p:txBody>
+      </p:sp>
+      <p:sp>
+        <p:nvSpPr>
+          <p:cNvPr id="11" name="TextBox 10"/>
           <p:cNvSpPr txBox="1"/>
           <p:nvPr/>
         </p:nvSpPr>
@@ -9382,13 +8130,13 @@
             <a:r>
               <a:rPr sz="1300" b="1">
                 <a:solidFill>
-                  <a:srgbClr val="B23A2A"/>
+                  <a:srgbClr val="C8A86B"/>
                 </a:solidFill>
                 <a:latin typeface="微软雅黑"/>
                 <a:ea typeface="微软雅黑"/>
                 <a:cs typeface="微软雅黑"/>
               </a:rPr>
-              <a:t>作业 · 分层</a:t>
+              <a:t>本课小结</a:t>
             </a:r>
           </a:p>
         </p:txBody>
@@ -9403,469 +8151,6 @@
           <a:xfrm>
             <a:off x="640080" y="1097280"/>
             <a:ext cx="822960" cy="30480"/>
-          </a:xfrm>
-          <a:prstGeom prst="rect">
-            <a:avLst/>
-          </a:prstGeom>
-          <a:solidFill>
-            <a:srgbClr val="B23A2A"/>
-          </a:solidFill>
-          <a:ln>
-            <a:noFill/>
-          </a:ln>
-          <a:effectLst/>
-        </p:spPr>
-        <p:style>
-          <a:lnRef idx="1">
-            <a:schemeClr val="accent1"/>
-          </a:lnRef>
-          <a:fillRef idx="3">
-            <a:schemeClr val="accent1"/>
-          </a:fillRef>
-          <a:effectRef idx="2">
-            <a:schemeClr val="accent1"/>
-          </a:effectRef>
-          <a:fontRef idx="minor">
-            <a:schemeClr val="lt1"/>
-          </a:fontRef>
-        </p:style>
-        <p:txBody>
-          <a:bodyPr rtlCol="0" anchor="ctr"/>
-          <a:lstStyle/>
-          <a:p>
-            <a:pPr algn="ctr"/>
-          </a:p>
-        </p:txBody>
-      </p:sp>
-      <p:sp>
-        <p:nvSpPr>
-          <p:cNvPr id="5" name="TextBox 4"/>
-          <p:cNvSpPr txBox="1"/>
-          <p:nvPr/>
-        </p:nvSpPr>
-        <p:spPr>
-          <a:xfrm>
-            <a:off x="640080" y="1325880"/>
-            <a:ext cx="10058400" cy="548640"/>
-          </a:xfrm>
-          <a:prstGeom prst="rect">
-            <a:avLst/>
-          </a:prstGeom>
-          <a:noFill/>
-        </p:spPr>
-        <p:txBody>
-          <a:bodyPr wrap="square" anchor="t" lIns="0" rIns="0" tIns="0" bIns="0">
-            <a:spAutoFit/>
-          </a:bodyPr>
-          <a:lstStyle/>
-          <a:p>
-            <a:pPr algn="l"/>
-            <a:r>
-              <a:rPr sz="2600" b="1">
-                <a:solidFill>
-                  <a:srgbClr val="1C2A33"/>
-                </a:solidFill>
-                <a:latin typeface="楷体"/>
-                <a:ea typeface="楷体"/>
-                <a:cs typeface="楷体"/>
-              </a:rPr>
-              <a:t>基础 · 提升 · 拓展</a:t>
-            </a:r>
-          </a:p>
-        </p:txBody>
-      </p:sp>
-      <p:sp>
-        <p:nvSpPr>
-          <p:cNvPr id="6" name="Rounded Rectangle 5"/>
-          <p:cNvSpPr/>
-          <p:nvPr/>
-        </p:nvSpPr>
-        <p:spPr>
-          <a:xfrm>
-            <a:off x="640080" y="2194560"/>
-            <a:ext cx="3393338" cy="3383280"/>
-          </a:xfrm>
-          <a:prstGeom prst="roundRect">
-            <a:avLst/>
-          </a:prstGeom>
-          <a:solidFill>
-            <a:srgbClr val="FFFFFF"/>
-          </a:solidFill>
-          <a:ln w="20320">
-            <a:solidFill>
-              <a:srgbClr val="B23A2A"/>
-            </a:solidFill>
-          </a:ln>
-          <a:effectLst/>
-        </p:spPr>
-        <p:style>
-          <a:lnRef idx="1">
-            <a:schemeClr val="accent1"/>
-          </a:lnRef>
-          <a:fillRef idx="3">
-            <a:schemeClr val="accent1"/>
-          </a:fillRef>
-          <a:effectRef idx="2">
-            <a:schemeClr val="accent1"/>
-          </a:effectRef>
-          <a:fontRef idx="minor">
-            <a:schemeClr val="lt1"/>
-          </a:fontRef>
-        </p:style>
-        <p:txBody>
-          <a:bodyPr rtlCol="0" anchor="ctr"/>
-          <a:lstStyle/>
-          <a:p>
-            <a:pPr algn="ctr"/>
-          </a:p>
-        </p:txBody>
-      </p:sp>
-      <p:sp>
-        <p:nvSpPr>
-          <p:cNvPr id="7" name="Rectangle 6"/>
-          <p:cNvSpPr/>
-          <p:nvPr/>
-        </p:nvSpPr>
-        <p:spPr>
-          <a:xfrm>
-            <a:off x="640080" y="2194560"/>
-            <a:ext cx="3393338" cy="548640"/>
-          </a:xfrm>
-          <a:prstGeom prst="rect">
-            <a:avLst/>
-          </a:prstGeom>
-          <a:solidFill>
-            <a:srgbClr val="B23A2A"/>
-          </a:solidFill>
-          <a:ln>
-            <a:noFill/>
-          </a:ln>
-          <a:effectLst/>
-        </p:spPr>
-        <p:style>
-          <a:lnRef idx="1">
-            <a:schemeClr val="accent1"/>
-          </a:lnRef>
-          <a:fillRef idx="3">
-            <a:schemeClr val="accent1"/>
-          </a:fillRef>
-          <a:effectRef idx="2">
-            <a:schemeClr val="accent1"/>
-          </a:effectRef>
-          <a:fontRef idx="minor">
-            <a:schemeClr val="lt1"/>
-          </a:fontRef>
-        </p:style>
-        <p:txBody>
-          <a:bodyPr rtlCol="0" anchor="ctr"/>
-          <a:lstStyle/>
-          <a:p>
-            <a:pPr algn="ctr"/>
-          </a:p>
-        </p:txBody>
-      </p:sp>
-      <p:sp>
-        <p:nvSpPr>
-          <p:cNvPr id="8" name="TextBox 7"/>
-          <p:cNvSpPr txBox="1"/>
-          <p:nvPr/>
-        </p:nvSpPr>
-        <p:spPr>
-          <a:xfrm>
-            <a:off x="640080" y="2304288"/>
-            <a:ext cx="3393338" cy="365760"/>
-          </a:xfrm>
-          <a:prstGeom prst="rect">
-            <a:avLst/>
-          </a:prstGeom>
-          <a:noFill/>
-        </p:spPr>
-        <p:txBody>
-          <a:bodyPr wrap="square" anchor="t" lIns="0" rIns="0" tIns="0" bIns="0">
-            <a:spAutoFit/>
-          </a:bodyPr>
-          <a:lstStyle/>
-          <a:p>
-            <a:pPr algn="ctr"/>
-            <a:r>
-              <a:rPr sz="1600" b="1">
-                <a:solidFill>
-                  <a:srgbClr val="FFFFFF"/>
-                </a:solidFill>
-                <a:latin typeface="微软雅黑"/>
-                <a:ea typeface="微软雅黑"/>
-                <a:cs typeface="微软雅黑"/>
-              </a:rPr>
-              <a:t>基础 · 必做</a:t>
-            </a:r>
-          </a:p>
-        </p:txBody>
-      </p:sp>
-      <p:sp>
-        <p:nvSpPr>
-          <p:cNvPr id="9" name="TextBox 8"/>
-          <p:cNvSpPr txBox="1"/>
-          <p:nvPr/>
-        </p:nvSpPr>
-        <p:spPr>
-          <a:xfrm>
-            <a:off x="914400" y="2971800"/>
-            <a:ext cx="2844698" cy="2468880"/>
-          </a:xfrm>
-          <a:prstGeom prst="rect">
-            <a:avLst/>
-          </a:prstGeom>
-          <a:noFill/>
-        </p:spPr>
-        <p:txBody>
-          <a:bodyPr wrap="square" anchor="t" lIns="0" rIns="0" tIns="0" bIns="0">
-            <a:spAutoFit/>
-          </a:bodyPr>
-          <a:lstStyle/>
-          <a:p>
-            <a:pPr algn="l">
-              <a:lnSpc>
-                <a:spcPct val="155000"/>
-              </a:lnSpc>
-            </a:pPr>
-            <a:r>
-              <a:rPr sz="1350" b="0">
-                <a:solidFill>
-                  <a:srgbClr val="1C2A33"/>
-                </a:solidFill>
-                <a:latin typeface="楷体"/>
-                <a:ea typeface="楷体"/>
-                <a:cs typeface="楷体"/>
-              </a:rPr>
-              <a:t>按互评意见修改初稿（600字内）誊抄；在文下标注：选了哪种结构、哪 2–3 个典型事件。</a:t>
-            </a:r>
-          </a:p>
-        </p:txBody>
-      </p:sp>
-      <p:sp>
-        <p:nvSpPr>
-          <p:cNvPr id="10" name="Rounded Rectangle 9"/>
-          <p:cNvSpPr/>
-          <p:nvPr/>
-        </p:nvSpPr>
-        <p:spPr>
-          <a:xfrm>
-            <a:off x="4399178" y="2194560"/>
-            <a:ext cx="3393338" cy="3383280"/>
-          </a:xfrm>
-          <a:prstGeom prst="roundRect">
-            <a:avLst/>
-          </a:prstGeom>
-          <a:solidFill>
-            <a:srgbClr val="FFFFFF"/>
-          </a:solidFill>
-          <a:ln w="20320">
-            <a:solidFill>
-              <a:srgbClr val="2E7D6B"/>
-            </a:solidFill>
-          </a:ln>
-          <a:effectLst/>
-        </p:spPr>
-        <p:style>
-          <a:lnRef idx="1">
-            <a:schemeClr val="accent1"/>
-          </a:lnRef>
-          <a:fillRef idx="3">
-            <a:schemeClr val="accent1"/>
-          </a:fillRef>
-          <a:effectRef idx="2">
-            <a:schemeClr val="accent1"/>
-          </a:effectRef>
-          <a:fontRef idx="minor">
-            <a:schemeClr val="lt1"/>
-          </a:fontRef>
-        </p:style>
-        <p:txBody>
-          <a:bodyPr rtlCol="0" anchor="ctr"/>
-          <a:lstStyle/>
-          <a:p>
-            <a:pPr algn="ctr"/>
-          </a:p>
-        </p:txBody>
-      </p:sp>
-      <p:sp>
-        <p:nvSpPr>
-          <p:cNvPr id="11" name="Rectangle 10"/>
-          <p:cNvSpPr/>
-          <p:nvPr/>
-        </p:nvSpPr>
-        <p:spPr>
-          <a:xfrm>
-            <a:off x="4399178" y="2194560"/>
-            <a:ext cx="3393338" cy="548640"/>
-          </a:xfrm>
-          <a:prstGeom prst="rect">
-            <a:avLst/>
-          </a:prstGeom>
-          <a:solidFill>
-            <a:srgbClr val="2E7D6B"/>
-          </a:solidFill>
-          <a:ln>
-            <a:noFill/>
-          </a:ln>
-          <a:effectLst/>
-        </p:spPr>
-        <p:style>
-          <a:lnRef idx="1">
-            <a:schemeClr val="accent1"/>
-          </a:lnRef>
-          <a:fillRef idx="3">
-            <a:schemeClr val="accent1"/>
-          </a:fillRef>
-          <a:effectRef idx="2">
-            <a:schemeClr val="accent1"/>
-          </a:effectRef>
-          <a:fontRef idx="minor">
-            <a:schemeClr val="lt1"/>
-          </a:fontRef>
-        </p:style>
-        <p:txBody>
-          <a:bodyPr rtlCol="0" anchor="ctr"/>
-          <a:lstStyle/>
-          <a:p>
-            <a:pPr algn="ctr"/>
-          </a:p>
-        </p:txBody>
-      </p:sp>
-      <p:sp>
-        <p:nvSpPr>
-          <p:cNvPr id="12" name="TextBox 11"/>
-          <p:cNvSpPr txBox="1"/>
-          <p:nvPr/>
-        </p:nvSpPr>
-        <p:spPr>
-          <a:xfrm>
-            <a:off x="4399178" y="2304288"/>
-            <a:ext cx="3393338" cy="365760"/>
-          </a:xfrm>
-          <a:prstGeom prst="rect">
-            <a:avLst/>
-          </a:prstGeom>
-          <a:noFill/>
-        </p:spPr>
-        <p:txBody>
-          <a:bodyPr wrap="square" anchor="t" lIns="0" rIns="0" tIns="0" bIns="0">
-            <a:spAutoFit/>
-          </a:bodyPr>
-          <a:lstStyle/>
-          <a:p>
-            <a:pPr algn="ctr"/>
-            <a:r>
-              <a:rPr sz="1600" b="1">
-                <a:solidFill>
-                  <a:srgbClr val="FFFFFF"/>
-                </a:solidFill>
-                <a:latin typeface="微软雅黑"/>
-                <a:ea typeface="微软雅黑"/>
-                <a:cs typeface="微软雅黑"/>
-              </a:rPr>
-              <a:t>提升 · 选做</a:t>
-            </a:r>
-          </a:p>
-        </p:txBody>
-      </p:sp>
-      <p:sp>
-        <p:nvSpPr>
-          <p:cNvPr id="13" name="TextBox 12"/>
-          <p:cNvSpPr txBox="1"/>
-          <p:nvPr/>
-        </p:nvSpPr>
-        <p:spPr>
-          <a:xfrm>
-            <a:off x="4673498" y="2971800"/>
-            <a:ext cx="2844698" cy="2468880"/>
-          </a:xfrm>
-          <a:prstGeom prst="rect">
-            <a:avLst/>
-          </a:prstGeom>
-          <a:noFill/>
-        </p:spPr>
-        <p:txBody>
-          <a:bodyPr wrap="square" anchor="t" lIns="0" rIns="0" tIns="0" bIns="0">
-            <a:spAutoFit/>
-          </a:bodyPr>
-          <a:lstStyle/>
-          <a:p>
-            <a:pPr algn="l">
-              <a:lnSpc>
-                <a:spcPct val="155000"/>
-              </a:lnSpc>
-            </a:pPr>
-            <a:r>
-              <a:rPr sz="1350" b="0">
-                <a:solidFill>
-                  <a:srgbClr val="1C2A33"/>
-                </a:solidFill>
-                <a:latin typeface="楷体"/>
-                <a:ea typeface="楷体"/>
-                <a:cs typeface="楷体"/>
-              </a:rPr>
-              <a:t>为通讯拟新闻标题：主标题有文采 + 副标题说明人物身份（如"门房里的几百个名字——记校工王师傅"）。</a:t>
-            </a:r>
-          </a:p>
-        </p:txBody>
-      </p:sp>
-      <p:sp>
-        <p:nvSpPr>
-          <p:cNvPr id="14" name="Rounded Rectangle 13"/>
-          <p:cNvSpPr/>
-          <p:nvPr/>
-        </p:nvSpPr>
-        <p:spPr>
-          <a:xfrm>
-            <a:off x="8158276" y="2194560"/>
-            <a:ext cx="3393338" cy="3383280"/>
-          </a:xfrm>
-          <a:prstGeom prst="roundRect">
-            <a:avLst/>
-          </a:prstGeom>
-          <a:solidFill>
-            <a:srgbClr val="FFFFFF"/>
-          </a:solidFill>
-          <a:ln w="20320">
-            <a:solidFill>
-              <a:srgbClr val="C8A86B"/>
-            </a:solidFill>
-          </a:ln>
-          <a:effectLst/>
-        </p:spPr>
-        <p:style>
-          <a:lnRef idx="1">
-            <a:schemeClr val="accent1"/>
-          </a:lnRef>
-          <a:fillRef idx="3">
-            <a:schemeClr val="accent1"/>
-          </a:fillRef>
-          <a:effectRef idx="2">
-            <a:schemeClr val="accent1"/>
-          </a:effectRef>
-          <a:fontRef idx="minor">
-            <a:schemeClr val="lt1"/>
-          </a:fontRef>
-        </p:style>
-        <p:txBody>
-          <a:bodyPr rtlCol="0" anchor="ctr"/>
-          <a:lstStyle/>
-          <a:p>
-            <a:pPr algn="ctr"/>
-          </a:p>
-        </p:txBody>
-      </p:sp>
-      <p:sp>
-        <p:nvSpPr>
-          <p:cNvPr id="15" name="Rectangle 14"/>
-          <p:cNvSpPr/>
-          <p:nvPr/>
-        </p:nvSpPr>
-        <p:spPr>
-          <a:xfrm>
-            <a:off x="8158276" y="2194560"/>
-            <a:ext cx="3393338" cy="548640"/>
           </a:xfrm>
           <a:prstGeom prst="rect">
             <a:avLst/>
@@ -9902,133 +8187,14 @@
       </p:sp>
       <p:sp>
         <p:nvSpPr>
-          <p:cNvPr id="16" name="TextBox 15"/>
-          <p:cNvSpPr txBox="1"/>
-          <p:nvPr/>
-        </p:nvSpPr>
-        <p:spPr>
-          <a:xfrm>
-            <a:off x="8158276" y="2304288"/>
-            <a:ext cx="3393338" cy="365760"/>
-          </a:xfrm>
-          <a:prstGeom prst="rect">
-            <a:avLst/>
-          </a:prstGeom>
-          <a:noFill/>
-        </p:spPr>
-        <p:txBody>
-          <a:bodyPr wrap="square" anchor="t" lIns="0" rIns="0" tIns="0" bIns="0">
-            <a:spAutoFit/>
-          </a:bodyPr>
-          <a:lstStyle/>
-          <a:p>
-            <a:pPr algn="ctr"/>
-            <a:r>
-              <a:rPr sz="1600" b="1">
-                <a:solidFill>
-                  <a:srgbClr val="FFFFFF"/>
-                </a:solidFill>
-                <a:latin typeface="微软雅黑"/>
-                <a:ea typeface="微软雅黑"/>
-                <a:cs typeface="微软雅黑"/>
-              </a:rPr>
-              <a:t>拓展 · 衔接</a:t>
-            </a:r>
-          </a:p>
-        </p:txBody>
-      </p:sp>
-      <p:sp>
-        <p:nvSpPr>
-          <p:cNvPr id="17" name="TextBox 16"/>
-          <p:cNvSpPr txBox="1"/>
-          <p:nvPr/>
-        </p:nvSpPr>
-        <p:spPr>
-          <a:xfrm>
-            <a:off x="8432596" y="2971800"/>
-            <a:ext cx="2844698" cy="2468880"/>
-          </a:xfrm>
-          <a:prstGeom prst="rect">
-            <a:avLst/>
-          </a:prstGeom>
-          <a:noFill/>
-        </p:spPr>
-        <p:txBody>
-          <a:bodyPr wrap="square" anchor="t" lIns="0" rIns="0" tIns="0" bIns="0">
-            <a:spAutoFit/>
-          </a:bodyPr>
-          <a:lstStyle/>
-          <a:p>
-            <a:pPr algn="l">
-              <a:lnSpc>
-                <a:spcPct val="155000"/>
-              </a:lnSpc>
-            </a:pPr>
-            <a:r>
-              <a:rPr sz="1350" b="0">
-                <a:solidFill>
-                  <a:srgbClr val="1C2A33"/>
-                </a:solidFill>
-                <a:latin typeface="楷体"/>
-                <a:ea typeface="楷体"/>
-                <a:cs typeface="楷体"/>
-              </a:rPr>
-              <a:t>写你认识的人（家长/校工/身边爱岗敬业的普通人），确保可采访可核实，不写离自己太远的人。</a:t>
-            </a:r>
-          </a:p>
-        </p:txBody>
-      </p:sp>
-      <p:sp>
-        <p:nvSpPr>
-          <p:cNvPr id="18" name="Rounded Rectangle 17"/>
+          <p:cNvPr id="5" name="Rectangle 4"/>
           <p:cNvSpPr/>
           <p:nvPr/>
         </p:nvSpPr>
         <p:spPr>
           <a:xfrm>
-            <a:off x="640080" y="5166360"/>
-            <a:ext cx="10911535" cy="1325880"/>
-          </a:xfrm>
-          <a:prstGeom prst="roundRect">
-            <a:avLst/>
-          </a:prstGeom>
-          <a:solidFill>
-            <a:srgbClr val="1C2A33"/>
-          </a:solidFill>
-          <a:effectLst/>
-        </p:spPr>
-        <p:style>
-          <a:lnRef idx="1">
-            <a:schemeClr val="accent1"/>
-          </a:lnRef>
-          <a:fillRef idx="3">
-            <a:schemeClr val="accent1"/>
-          </a:fillRef>
-          <a:effectRef idx="2">
-            <a:schemeClr val="accent1"/>
-          </a:effectRef>
-          <a:fontRef idx="minor">
-            <a:schemeClr val="lt1"/>
-          </a:fontRef>
-        </p:style>
-        <p:txBody>
-          <a:bodyPr rtlCol="0" anchor="ctr"/>
-          <a:lstStyle/>
-          <a:p>
-            <a:pPr algn="ctr"/>
-          </a:p>
-        </p:txBody>
-      </p:sp>
-      <p:sp>
-        <p:nvSpPr>
-          <p:cNvPr id="19" name="Rectangle 18"/>
-          <p:cNvSpPr/>
-          <p:nvPr/>
-        </p:nvSpPr>
-        <p:spPr>
-          <a:xfrm>
-            <a:off x="914400" y="5394960"/>
-            <a:ext cx="54864" cy="279400"/>
+            <a:off x="640080" y="1737360"/>
+            <a:ext cx="54864" cy="431800"/>
           </a:xfrm>
           <a:prstGeom prst="rect">
             <a:avLst/>
@@ -10065,14 +8231,14 @@
       </p:sp>
       <p:sp>
         <p:nvSpPr>
-          <p:cNvPr id="20" name="TextBox 19"/>
+          <p:cNvPr id="6" name="TextBox 5"/>
           <p:cNvSpPr txBox="1"/>
           <p:nvPr/>
         </p:nvSpPr>
         <p:spPr>
           <a:xfrm>
-            <a:off x="1143000" y="5303520"/>
-            <a:ext cx="10180015" cy="1097280"/>
+            <a:off x="868680" y="1645920"/>
+            <a:ext cx="10682935" cy="2194560"/>
           </a:xfrm>
           <a:prstGeom prst="rect">
             <a:avLst/>
@@ -10086,45 +8252,44 @@
           <a:lstStyle/>
           <a:p>
             <a:pPr algn="l">
+              <a:lnSpc>
+                <a:spcPct val="150000"/>
+              </a:lnSpc>
               <a:spcAft>
-                <a:spcPts val="400"/>
+                <a:spcPts val="1000"/>
               </a:spcAft>
             </a:pPr>
             <a:r>
-              <a:rPr sz="1600" b="1">
-                <a:solidFill>
-                  <a:srgbClr val="C8A86B"/>
+              <a:rPr sz="2200" b="0">
+                <a:solidFill>
+                  <a:srgbClr val="1C2A33"/>
                 </a:solidFill>
                 <a:latin typeface="楷体"/>
                 <a:ea typeface="楷体"/>
                 <a:cs typeface="楷体"/>
               </a:rPr>
-              <a:t>通讯写作三步法口诀</a:t>
-            </a:r>
-          </a:p>
-          <a:p>
-            <a:pPr algn="l">
-              <a:lnSpc>
-                <a:spcPct val="145000"/>
-              </a:lnSpc>
-            </a:pPr>
-            <a:r>
-              <a:rPr sz="1350" b="0">
-                <a:solidFill>
-                  <a:srgbClr val="FFFFFF"/>
-                </a:solidFill>
-                <a:latin typeface="楷体"/>
-                <a:ea typeface="楷体"/>
-                <a:cs typeface="楷体"/>
+              <a:t>本单元主题：劳动光荣。把今天学到的方法带进下一篇——自己读、自己想、自己写。</a:t>
+            </a:r>
+          </a:p>
+          <a:p>
+            <a:pPr algn="l"/>
+            <a:r>
+              <a:rPr sz="1600" b="1">
+                <a:solidFill>
+                  <a:srgbClr val="B23A2A"/>
+                </a:solidFill>
+                <a:latin typeface="微软雅黑"/>
+                <a:ea typeface="微软雅黑"/>
+                <a:cs typeface="微软雅黑"/>
               </a:rPr>
-              <a:t>选典型事件 → 定结构线索 → 写新闻语言。下节课：精选初稿公开讲评（评价词违规型 / 选材不准型 / 以事写人优秀型）。</a:t>
-            </a:r>
-          </a:p>
-        </p:txBody>
-      </p:sp>
-      <p:sp>
-        <p:nvSpPr>
-          <p:cNvPr id="21" name="TextBox 20"/>
+              <a:t>方法迁移：圈关键信息 → 理事件脉络 → 析人物精神</a:t>
+            </a:r>
+          </a:p>
+        </p:txBody>
+      </p:sp>
+      <p:sp>
+        <p:nvSpPr>
+          <p:cNvPr id="7" name="TextBox 6"/>
           <p:cNvSpPr txBox="1"/>
           <p:nvPr/>
         </p:nvSpPr>
